--- a/static/ppts/G6_Math_T4_Two_Step_Equations.pptx
+++ b/static/ppts/G6_Math_T4_Two_Step_Equations.pptx
@@ -9,9 +9,10 @@
     <p:sldId id="257" r:id="rId3"/>
     <p:sldId id="258" r:id="rId4"/>
     <p:sldId id="259" r:id="rId5"/>
+    <p:sldId id="260" r:id="rId6"/>
   </p:sldIdLst>
   <p:notesMasterIdLst>
-    <p:notesMasterId r:id="rId6"/>
+    <p:notesMasterId r:id="rId7"/>
   </p:notesMasterIdLst>
   <p:sldSz cx="9144000" cy="5143500"/>
   <p:notesSz cx="5143500" cy="9144000"/>
@@ -811,6 +812,94 @@
 </p:notes>
 </file>
 
+<file path=ppt/notesSlides/notesSlide5.xml><?xml version="1.0" encoding="utf-8"?>
+<p:notes xmlns:a="http://schemas.openxmlformats.org/drawingml/2006/main" xmlns:r="http://schemas.openxmlformats.org/officeDocument/2006/relationships" xmlns:p="http://schemas.openxmlformats.org/presentationml/2006/main">
+  <p:cSld>
+    <p:spTree>
+      <p:nvGrpSpPr>
+        <p:cNvPr id="1" name=""/>
+        <p:cNvGrpSpPr/>
+        <p:nvPr/>
+      </p:nvGrpSpPr>
+      <p:grpSpPr>
+        <a:xfrm>
+          <a:off x="0" y="0"/>
+          <a:ext cx="0" cy="0"/>
+          <a:chOff x="0" y="0"/>
+          <a:chExt cx="0" cy="0"/>
+        </a:xfrm>
+      </p:grpSpPr>
+      <p:sp>
+        <p:nvSpPr>
+          <p:cNvPr id="2" name="Slide Image Placeholder 1"/>
+          <p:cNvSpPr>
+            <a:spLocks noGrp="1" noRot="1" noChangeAspect="1"/>
+          </p:cNvSpPr>
+          <p:nvPr>
+            <p:ph type="sldImg"/>
+          </p:nvPr>
+        </p:nvSpPr>
+        <p:spPr/>
+      </p:sp>
+      <p:sp>
+        <p:nvSpPr>
+          <p:cNvPr id="3" name="Notes Placeholder 2"/>
+          <p:cNvSpPr>
+            <a:spLocks noGrp="1"/>
+          </p:cNvSpPr>
+          <p:nvPr>
+            <p:ph type="body" idx="1"/>
+          </p:nvPr>
+        </p:nvSpPr>
+        <p:spPr/>
+        <p:txBody>
+          <a:bodyPr/>
+          <a:lstStyle/>
+          <a:p>
+            <a:r>
+              <a:rPr lang="en-US" dirty="0"/>
+              <a:t/>
+            </a:r>
+            <a:endParaRPr lang="en-US" dirty="0"/>
+          </a:p>
+        </p:txBody>
+      </p:sp>
+      <p:sp>
+        <p:nvSpPr>
+          <p:cNvPr id="4" name="Slide Number Placeholder 3"/>
+          <p:cNvSpPr>
+            <a:spLocks noGrp="1"/>
+          </p:cNvSpPr>
+          <p:nvPr>
+            <p:ph type="sldNum" sz="quarter" idx="10"/>
+          </p:nvPr>
+        </p:nvSpPr>
+        <p:spPr/>
+        <p:txBody>
+          <a:bodyPr/>
+          <a:lstStyle/>
+          <a:p>
+            <a:fld id="{F7021451-1387-4CA6-816F-3879F97B5CBC}" type="slidenum">
+              <a:rPr lang="en-US"/>
+              <a:t>5</a:t>
+            </a:fld>
+            <a:endParaRPr lang="en-US"/>
+          </a:p>
+        </p:txBody>
+      </p:sp>
+    </p:spTree>
+    <p:extLst>
+      <p:ext uri="{BB962C8B-B14F-4D97-AF65-F5344CB8AC3E}">
+        <p14:creationId xmlns:p14="http://schemas.microsoft.com/office/powerpoint/2010/main" val="1024086991"/>
+      </p:ext>
+    </p:extLst>
+  </p:cSld>
+  <p:clrMapOvr>
+    <a:masterClrMapping/>
+  </p:clrMapOvr>
+</p:notes>
+</file>
+
 <file path=ppt/slideLayouts/slideLayout1.xml><?xml version="1.0" encoding="utf-8"?>
 <p:sldLayout xmlns:a="http://schemas.openxmlformats.org/drawingml/2006/main" xmlns:r="http://schemas.openxmlformats.org/officeDocument/2006/relationships" xmlns:p="http://schemas.openxmlformats.org/presentationml/2006/main" preserve="1">
   <p:cSld name="DEFAULT">
@@ -1170,7 +1259,7 @@
         </p:nvSpPr>
         <p:spPr>
           <a:xfrm>
-            <a:off x="731520" y="1280160"/>
+            <a:off x="731520" y="1097280"/>
             <a:ext cx="7772400" cy="1371600"/>
           </a:xfrm>
           <a:prstGeom prst="rect">
@@ -1187,7 +1276,7 @@
               <a:buNone/>
             </a:pPr>
             <a:r>
-              <a:rPr lang="en-US" sz="3600" b="1" dirty="0">
+              <a:rPr lang="en-US" sz="4000" b="1" dirty="0">
                 <a:solidFill>
                   <a:srgbClr val="FFFFFF"/>
                 </a:solidFill>
@@ -1197,7 +1286,7 @@
               </a:rPr>
               <a:t>Solving Two-Step Equations</a:t>
             </a:r>
-            <a:endParaRPr lang="en-US" sz="3600" dirty="0"/>
+            <a:endParaRPr lang="en-US" sz="4000" dirty="0"/>
           </a:p>
         </p:txBody>
       </p:sp>
@@ -1209,7 +1298,7 @@
         </p:nvSpPr>
         <p:spPr>
           <a:xfrm>
-            <a:off x="731520" y="2743200"/>
+            <a:off x="731520" y="2560320"/>
             <a:ext cx="7772400" cy="548640"/>
           </a:xfrm>
           <a:prstGeom prst="rect">
@@ -1228,13 +1317,13 @@
             <a:r>
               <a:rPr lang="en-US" sz="1600" dirty="0">
                 <a:solidFill>
-                  <a:srgbClr val="9B9690"/>
+                  <a:srgbClr val="E9C46A"/>
                 </a:solidFill>
                 <a:latin typeface="Calibri" pitchFamily="34" charset="0"/>
                 <a:ea typeface="Calibri" pitchFamily="34" charset="-122"/>
                 <a:cs typeface="Calibri" pitchFamily="34" charset="-120"/>
               </a:rPr>
-              <a:t>G6 Maths · Algebra</a:t>
+              <a:t>Grade 6 Mathematics · Mr Zocchi</a:t>
             </a:r>
             <a:endParaRPr lang="en-US" sz="1600" dirty="0"/>
           </a:p>
@@ -1242,14 +1331,36 @@
       </p:sp>
       <p:sp>
         <p:nvSpPr>
-          <p:cNvPr id="5" name="Text 3"/>
+          <p:cNvPr id="5" name="Shape 3"/>
           <p:cNvSpPr/>
           <p:nvPr/>
         </p:nvSpPr>
         <p:spPr>
           <a:xfrm>
-            <a:off x="731520" y="4389120"/>
-            <a:ext cx="7772400" cy="457200"/>
+            <a:off x="731520" y="3474720"/>
+            <a:ext cx="2011680" cy="411480"/>
+          </a:xfrm>
+          <a:prstGeom prst="roundRect">
+            <a:avLst>
+              <a:gd name="adj" fmla="val 17778"/>
+            </a:avLst>
+          </a:prstGeom>
+          <a:solidFill>
+            <a:srgbClr val="2A9D8F"/>
+          </a:solidFill>
+          <a:ln/>
+        </p:spPr>
+      </p:sp>
+      <p:sp>
+        <p:nvSpPr>
+          <p:cNvPr id="6" name="Text 4"/>
+          <p:cNvSpPr/>
+          <p:nvPr/>
+        </p:nvSpPr>
+        <p:spPr>
+          <a:xfrm>
+            <a:off x="731520" y="3474720"/>
+            <a:ext cx="2011680" cy="411480"/>
           </a:xfrm>
           <a:prstGeom prst="rect">
             <a:avLst/>
@@ -1261,21 +1372,21 @@
           <a:bodyPr wrap="square" rtlCol="0" anchor="ctr"/>
           <a:lstStyle/>
           <a:p>
-            <a:pPr indent="0" marL="0">
+            <a:pPr algn="ctr" indent="0" marL="0">
               <a:buNone/>
             </a:pPr>
             <a:r>
-              <a:rPr lang="en-US" sz="1000" dirty="0">
-                <a:solidFill>
-                  <a:srgbClr val="6B6660"/>
+              <a:rPr lang="en-US" sz="1200" b="1" dirty="0">
+                <a:solidFill>
+                  <a:srgbClr val="FFFFFF"/>
                 </a:solidFill>
                 <a:latin typeface="Calibri" pitchFamily="34" charset="0"/>
                 <a:ea typeface="Calibri" pitchFamily="34" charset="-122"/>
                 <a:cs typeface="Calibri" pitchFamily="34" charset="-120"/>
               </a:rPr>
-              <a:t>Mr Zocchi · mrzocchi.com</a:t>
-            </a:r>
-            <a:endParaRPr lang="en-US" sz="1000" dirty="0"/>
+              <a:t>Term 4 · Algebra</a:t>
+            </a:r>
+            <a:endParaRPr lang="en-US" sz="1200" dirty="0"/>
           </a:p>
         </p:txBody>
       </p:sp>
@@ -1293,7 +1404,7 @@
     <p:bg>
       <p:bgPr>
         <a:solidFill>
-          <a:srgbClr val="FFFFFF"/>
+          <a:srgbClr val="FAF8F5"/>
         </a:solidFill>
       </p:bgPr>
     </p:bg>
@@ -1339,8 +1450,8 @@
         </p:nvSpPr>
         <p:spPr>
           <a:xfrm>
-            <a:off x="548640" y="274320"/>
-            <a:ext cx="8046720" cy="640080"/>
+            <a:off x="7772400" y="4709160"/>
+            <a:ext cx="1097280" cy="320040"/>
           </a:xfrm>
           <a:prstGeom prst="rect">
             <a:avLst/>
@@ -1349,14 +1460,105 @@
           <a:ln/>
         </p:spPr>
         <p:txBody>
-          <a:bodyPr wrap="square" lIns="0" tIns="0" rIns="0" bIns="0" rtlCol="0" anchor="ctr"/>
+          <a:bodyPr wrap="square" rtlCol="0" anchor="ctr"/>
+          <a:lstStyle/>
+          <a:p>
+            <a:pPr algn="r" indent="0" marL="0">
+              <a:buNone/>
+            </a:pPr>
+            <a:r>
+              <a:rPr lang="en-US" sz="900" dirty="0">
+                <a:solidFill>
+                  <a:srgbClr val="6B6660"/>
+                </a:solidFill>
+                <a:latin typeface="Calibri" pitchFamily="34" charset="0"/>
+                <a:ea typeface="Calibri" pitchFamily="34" charset="-122"/>
+                <a:cs typeface="Calibri" pitchFamily="34" charset="-120"/>
+              </a:rPr>
+              <a:t>2 / 5</a:t>
+            </a:r>
+            <a:endParaRPr lang="en-US" sz="900" dirty="0"/>
+          </a:p>
+        </p:txBody>
+      </p:sp>
+      <p:sp>
+        <p:nvSpPr>
+          <p:cNvPr id="4" name="Shape 2"/>
+          <p:cNvSpPr/>
+          <p:nvPr/>
+        </p:nvSpPr>
+        <p:spPr>
+          <a:xfrm>
+            <a:off x="1371600" y="914400"/>
+            <a:ext cx="6400800" cy="3200400"/>
+          </a:xfrm>
+          <a:prstGeom prst="rect">
+            <a:avLst/>
+          </a:prstGeom>
+          <a:solidFill>
+            <a:srgbClr val="FFFFFF"/>
+          </a:solidFill>
+          <a:ln w="12700">
+            <a:solidFill>
+              <a:srgbClr val="E5E2DC"/>
+            </a:solidFill>
+            <a:prstDash val="solid"/>
+          </a:ln>
+          <a:effectLst>
+            <a:outerShdw sx="100000" sy="100000" kx="0" ky="0" algn="bl" rotWithShape="0" blurRad="50800" dist="25400" dir="8100000">
+              <a:srgbClr val="000000">
+                <a:alpha val="10000"/>
+              </a:srgbClr>
+            </a:outerShdw>
+          </a:effectLst>
+        </p:spPr>
+      </p:sp>
+      <p:sp>
+        <p:nvSpPr>
+          <p:cNvPr id="5" name="Shape 3"/>
+          <p:cNvSpPr/>
+          <p:nvPr/>
+        </p:nvSpPr>
+        <p:spPr>
+          <a:xfrm>
+            <a:off x="1371600" y="914400"/>
+            <a:ext cx="91440" cy="3200400"/>
+          </a:xfrm>
+          <a:prstGeom prst="rect">
+            <a:avLst/>
+          </a:prstGeom>
+          <a:solidFill>
+            <a:srgbClr val="2A9D8F"/>
+          </a:solidFill>
+          <a:ln/>
+        </p:spPr>
+      </p:sp>
+      <p:sp>
+        <p:nvSpPr>
+          <p:cNvPr id="6" name="Text 4"/>
+          <p:cNvSpPr/>
+          <p:nvPr/>
+        </p:nvSpPr>
+        <p:spPr>
+          <a:xfrm>
+            <a:off x="1828800" y="1097280"/>
+            <a:ext cx="5669280" cy="640080"/>
+          </a:xfrm>
+          <a:prstGeom prst="rect">
+            <a:avLst/>
+          </a:prstGeom>
+          <a:noFill/>
+          <a:ln/>
+        </p:spPr>
+        <p:txBody>
+          <a:bodyPr wrap="square" rtlCol="0" anchor="ctr"/>
           <a:lstStyle/>
           <a:p>
             <a:pPr indent="0" marL="0">
               <a:buNone/>
             </a:pPr>
             <a:r>
-              <a:rPr lang="en-US" sz="2600" b="1" dirty="0">
+              <a:rPr lang="en-US" sz="2400" b="1" dirty="0">
                 <a:solidFill>
                   <a:srgbClr val="1B2A4A"/>
                 </a:solidFill>
@@ -1364,22 +1566,22 @@
                 <a:ea typeface="Georgia" pitchFamily="34" charset="-122"/>
                 <a:cs typeface="Georgia" pitchFamily="34" charset="-120"/>
               </a:rPr>
-              <a:t>Two Operations to Undo</a:t>
-            </a:r>
-            <a:endParaRPr lang="en-US" sz="2600" dirty="0"/>
-          </a:p>
-        </p:txBody>
-      </p:sp>
-      <p:sp>
-        <p:nvSpPr>
-          <p:cNvPr id="4" name="Text 2"/>
+              <a:t>Two Steps to Solve</a:t>
+            </a:r>
+            <a:endParaRPr lang="en-US" sz="2400" dirty="0"/>
+          </a:p>
+        </p:txBody>
+      </p:sp>
+      <p:sp>
+        <p:nvSpPr>
+          <p:cNvPr id="7" name="Text 5"/>
           <p:cNvSpPr/>
           <p:nvPr/>
         </p:nvSpPr>
         <p:spPr>
           <a:xfrm>
-            <a:off x="548640" y="1097280"/>
-            <a:ext cx="8046720" cy="3474720"/>
+            <a:off x="1828800" y="1828800"/>
+            <a:ext cx="5669280" cy="2011680"/>
           </a:xfrm>
           <a:prstGeom prst="rect">
             <a:avLst/>
@@ -1391,12 +1593,11 @@
           <a:bodyPr wrap="square" rtlCol="0" anchor="t"/>
           <a:lstStyle/>
           <a:p>
-            <a:pPr marL="342900" indent="-342900">
-              <a:spcAft>
-                <a:spcPts val="800"/>
-              </a:spcAft>
-              <a:buSzPct val="100000"/>
-              <a:buChar char="•"/>
+            <a:pPr indent="0" marL="0">
+              <a:lnSpc>
+                <a:spcPct val="130000"/>
+              </a:lnSpc>
+              <a:buNone/>
             </a:pPr>
             <a:r>
               <a:rPr lang="en-US" sz="1500" dirty="0">
@@ -1407,108 +1608,9 @@
                 <a:ea typeface="Calibri" pitchFamily="34" charset="-122"/>
                 <a:cs typeface="Calibri" pitchFamily="34" charset="-120"/>
               </a:rPr>
-              <a:t>Two-step equations need TWO inverse operations</a:t>
+              <a:t>A two-step equation needs two inverse operations to solve. Example: 2x + 5 = 13. Step 1: undo the +5 (subtract 5 from both sides) → 2x = 8. Step 2: undo the ×2 (divide both sides by 2) → x = 4. Always undo addition/subtraction FIRST, then multiplication/division.</a:t>
             </a:r>
             <a:endParaRPr lang="en-US" sz="1500" dirty="0"/>
-          </a:p>
-          <a:p>
-            <a:pPr marL="342900" indent="-342900">
-              <a:spcAft>
-                <a:spcPts val="800"/>
-              </a:spcAft>
-              <a:buSzPct val="100000"/>
-              <a:buChar char="•"/>
-            </a:pPr>
-            <a:r>
-              <a:rPr lang="en-US" sz="1500" dirty="0">
-                <a:solidFill>
-                  <a:srgbClr val="3D3A36"/>
-                </a:solidFill>
-                <a:latin typeface="Calibri" pitchFamily="34" charset="0"/>
-                <a:ea typeface="Calibri" pitchFamily="34" charset="-122"/>
-                <a:cs typeface="Calibri" pitchFamily="34" charset="-120"/>
-              </a:rPr>
-              <a:t>Undo in REVERSE order of BIDMAS (addition/subtraction first, then multiplication/division)</a:t>
-            </a:r>
-            <a:endParaRPr lang="en-US" sz="1500" dirty="0"/>
-          </a:p>
-          <a:p>
-            <a:pPr marL="342900" indent="-342900">
-              <a:spcAft>
-                <a:spcPts val="800"/>
-              </a:spcAft>
-              <a:buSzPct val="100000"/>
-              <a:buChar char="•"/>
-            </a:pPr>
-            <a:r>
-              <a:rPr lang="en-US" sz="1500" dirty="0">
-                <a:solidFill>
-                  <a:srgbClr val="3D3A36"/>
-                </a:solidFill>
-                <a:latin typeface="Calibri" pitchFamily="34" charset="0"/>
-                <a:ea typeface="Calibri" pitchFamily="34" charset="-122"/>
-                <a:cs typeface="Calibri" pitchFamily="34" charset="-120"/>
-              </a:rPr>
-              <a:t>3x + 5 = 20 → Step 1: subtract 5 → 3x = 15 → Step 2: divide by 3 → x = 5</a:t>
-            </a:r>
-            <a:endParaRPr lang="en-US" sz="1500" dirty="0"/>
-          </a:p>
-          <a:p>
-            <a:pPr marL="342900" indent="-342900">
-              <a:spcAft>
-                <a:spcPts val="800"/>
-              </a:spcAft>
-              <a:buSzPct val="100000"/>
-              <a:buChar char="•"/>
-            </a:pPr>
-            <a:r>
-              <a:rPr lang="en-US" sz="1500" dirty="0">
-                <a:solidFill>
-                  <a:srgbClr val="3D3A36"/>
-                </a:solidFill>
-                <a:latin typeface="Calibri" pitchFamily="34" charset="0"/>
-                <a:ea typeface="Calibri" pitchFamily="34" charset="-122"/>
-                <a:cs typeface="Calibri" pitchFamily="34" charset="-120"/>
-              </a:rPr>
-              <a:t>2n - 7 = 9 → Step 1: add 7 → 2n = 16 → Step 2: divide by 2 → n = 8</a:t>
-            </a:r>
-            <a:endParaRPr lang="en-US" sz="1500" dirty="0"/>
-          </a:p>
-        </p:txBody>
-      </p:sp>
-      <p:sp>
-        <p:nvSpPr>
-          <p:cNvPr id="5" name="Text 3"/>
-          <p:cNvSpPr/>
-          <p:nvPr/>
-        </p:nvSpPr>
-        <p:spPr>
-          <a:xfrm>
-            <a:off x="548640" y="4800600"/>
-            <a:ext cx="3657600" cy="274320"/>
-          </a:xfrm>
-          <a:prstGeom prst="rect">
-            <a:avLst/>
-          </a:prstGeom>
-          <a:noFill/>
-          <a:ln/>
-        </p:spPr>
-        <p:txBody>
-          <a:bodyPr wrap="square" rtlCol="0" anchor="ctr"/>
-          <a:lstStyle/>
-          <a:p>
-            <a:pPr indent="0" marL="0">
-              <a:buNone/>
-            </a:pPr>
-            <a:r>
-              <a:rPr lang="en-US" sz="800" dirty="0">
-                <a:solidFill>
-                  <a:srgbClr val="9B9690"/>
-                </a:solidFill>
-              </a:rPr>
-              <a:t>mrzocchi.com</a:t>
-            </a:r>
-            <a:endParaRPr lang="en-US" sz="800" dirty="0"/>
           </a:p>
         </p:txBody>
       </p:sp>
@@ -1526,7 +1628,7 @@
     <p:bg>
       <p:bgPr>
         <a:solidFill>
-          <a:srgbClr val="FFFFFF"/>
+          <a:srgbClr val="FAF8F5"/>
         </a:solidFill>
       </p:bgPr>
     </p:bg>
@@ -1572,8 +1674,8 @@
         </p:nvSpPr>
         <p:spPr>
           <a:xfrm>
-            <a:off x="548640" y="274320"/>
-            <a:ext cx="8046720" cy="640080"/>
+            <a:off x="7772400" y="4709160"/>
+            <a:ext cx="1097280" cy="320040"/>
           </a:xfrm>
           <a:prstGeom prst="rect">
             <a:avLst/>
@@ -1582,7 +1684,46 @@
           <a:ln/>
         </p:spPr>
         <p:txBody>
-          <a:bodyPr wrap="square" lIns="0" tIns="0" rIns="0" bIns="0" rtlCol="0" anchor="ctr"/>
+          <a:bodyPr wrap="square" rtlCol="0" anchor="ctr"/>
+          <a:lstStyle/>
+          <a:p>
+            <a:pPr algn="r" indent="0" marL="0">
+              <a:buNone/>
+            </a:pPr>
+            <a:r>
+              <a:rPr lang="en-US" sz="900" dirty="0">
+                <a:solidFill>
+                  <a:srgbClr val="6B6660"/>
+                </a:solidFill>
+                <a:latin typeface="Calibri" pitchFamily="34" charset="0"/>
+                <a:ea typeface="Calibri" pitchFamily="34" charset="-122"/>
+                <a:cs typeface="Calibri" pitchFamily="34" charset="-120"/>
+              </a:rPr>
+              <a:t>3 / 5</a:t>
+            </a:r>
+            <a:endParaRPr lang="en-US" sz="900" dirty="0"/>
+          </a:p>
+        </p:txBody>
+      </p:sp>
+      <p:sp>
+        <p:nvSpPr>
+          <p:cNvPr id="4" name="Text 2"/>
+          <p:cNvSpPr/>
+          <p:nvPr/>
+        </p:nvSpPr>
+        <p:spPr>
+          <a:xfrm>
+            <a:off x="457200" y="274320"/>
+            <a:ext cx="8229600" cy="640080"/>
+          </a:xfrm>
+          <a:prstGeom prst="rect">
+            <a:avLst/>
+          </a:prstGeom>
+          <a:noFill/>
+          <a:ln/>
+        </p:spPr>
+        <p:txBody>
+          <a:bodyPr wrap="square" rtlCol="0" anchor="ctr"/>
           <a:lstStyle/>
           <a:p>
             <a:pPr indent="0" marL="0">
@@ -1597,7 +1738,7 @@
                 <a:ea typeface="Georgia" pitchFamily="34" charset="-122"/>
                 <a:cs typeface="Georgia" pitchFamily="34" charset="-120"/>
               </a:rPr>
-              <a:t>More Examples</a:t>
+              <a:t>Worked Examples</a:t>
             </a:r>
             <a:endParaRPr lang="en-US" sz="2600" dirty="0"/>
           </a:p>
@@ -1605,14 +1746,14 @@
       </p:sp>
       <p:sp>
         <p:nvSpPr>
-          <p:cNvPr id="4" name="Text 2"/>
+          <p:cNvPr id="5" name="Text 3"/>
           <p:cNvSpPr/>
           <p:nvPr/>
         </p:nvSpPr>
         <p:spPr>
           <a:xfrm>
-            <a:off x="548640" y="1097280"/>
-            <a:ext cx="8046720" cy="3474720"/>
+            <a:off x="457200" y="1188720"/>
+            <a:ext cx="3840480" cy="3474720"/>
           </a:xfrm>
           <a:prstGeom prst="rect">
             <a:avLst/>
@@ -1626,13 +1767,13 @@
           <a:p>
             <a:pPr marL="342900" indent="-342900">
               <a:spcAft>
-                <a:spcPts val="800"/>
+                <a:spcPts val="600"/>
               </a:spcAft>
               <a:buSzPct val="100000"/>
               <a:buChar char="•"/>
             </a:pPr>
             <a:r>
-              <a:rPr lang="en-US" sz="1500" dirty="0">
+              <a:rPr lang="en-US" sz="1400" dirty="0">
                 <a:solidFill>
                   <a:srgbClr val="3D3A36"/>
                 </a:solidFill>
@@ -1640,20 +1781,20 @@
                 <a:ea typeface="Calibri" pitchFamily="34" charset="-122"/>
                 <a:cs typeface="Calibri" pitchFamily="34" charset="-120"/>
               </a:rPr>
-              <a:t>x/4 + 3 = 7 → subtract 3 → x/4 = 4 → multiply by 4 → x = 16</a:t>
-            </a:r>
-            <a:endParaRPr lang="en-US" sz="1500" dirty="0"/>
+              <a:t>3x + 4 = 19 → subtract 4 → 3x = 15 → divide by 3 → x = 5</a:t>
+            </a:r>
+            <a:endParaRPr lang="en-US" sz="1400" dirty="0"/>
           </a:p>
           <a:p>
             <a:pPr marL="342900" indent="-342900">
               <a:spcAft>
-                <a:spcPts val="800"/>
+                <a:spcPts val="600"/>
               </a:spcAft>
               <a:buSzPct val="100000"/>
               <a:buChar char="•"/>
             </a:pPr>
             <a:r>
-              <a:rPr lang="en-US" sz="1500" dirty="0">
+              <a:rPr lang="en-US" sz="1400" dirty="0">
                 <a:solidFill>
                   <a:srgbClr val="3D3A36"/>
                 </a:solidFill>
@@ -1661,20 +1802,20 @@
                 <a:ea typeface="Calibri" pitchFamily="34" charset="-122"/>
                 <a:cs typeface="Calibri" pitchFamily="34" charset="-120"/>
               </a:rPr>
-              <a:t>5y - 2 = 13 → add 2 → 5y = 15 → divide by 5 → y = 3</a:t>
-            </a:r>
-            <a:endParaRPr lang="en-US" sz="1500" dirty="0"/>
+              <a:t>5x − 2 = 23 → add 2 → 5x = 25 → divide by 5 → x = 5</a:t>
+            </a:r>
+            <a:endParaRPr lang="en-US" sz="1400" dirty="0"/>
           </a:p>
           <a:p>
             <a:pPr marL="342900" indent="-342900">
               <a:spcAft>
-                <a:spcPts val="800"/>
+                <a:spcPts val="600"/>
               </a:spcAft>
               <a:buSzPct val="100000"/>
               <a:buChar char="•"/>
             </a:pPr>
             <a:r>
-              <a:rPr lang="en-US" sz="1500" dirty="0">
+              <a:rPr lang="en-US" sz="1400" dirty="0">
                 <a:solidFill>
                   <a:srgbClr val="3D3A36"/>
                 </a:solidFill>
@@ -1682,20 +1823,20 @@
                 <a:ea typeface="Calibri" pitchFamily="34" charset="-122"/>
                 <a:cs typeface="Calibri" pitchFamily="34" charset="-120"/>
               </a:rPr>
-              <a:t>Always show your working step by step</a:t>
-            </a:r>
-            <a:endParaRPr lang="en-US" sz="1500" dirty="0"/>
+              <a:t>x/4 + 3 = 7 → subtract 3 → x/4 = 4 → multiply by 4 → x = 16</a:t>
+            </a:r>
+            <a:endParaRPr lang="en-US" sz="1400" dirty="0"/>
           </a:p>
           <a:p>
             <a:pPr marL="342900" indent="-342900">
               <a:spcAft>
-                <a:spcPts val="800"/>
+                <a:spcPts val="600"/>
               </a:spcAft>
               <a:buSzPct val="100000"/>
               <a:buChar char="•"/>
             </a:pPr>
             <a:r>
-              <a:rPr lang="en-US" sz="1500" dirty="0">
+              <a:rPr lang="en-US" sz="1400" dirty="0">
                 <a:solidFill>
                   <a:srgbClr val="3D3A36"/>
                 </a:solidFill>
@@ -1703,22 +1844,95 @@
                 <a:ea typeface="Calibri" pitchFamily="34" charset="-122"/>
                 <a:cs typeface="Calibri" pitchFamily="34" charset="-120"/>
               </a:rPr>
-              <a:t>Check: substitute your answer back: 5(3)-2 = 15-2 = 13 ✓</a:t>
-            </a:r>
-            <a:endParaRPr lang="en-US" sz="1500" dirty="0"/>
-          </a:p>
-        </p:txBody>
-      </p:sp>
-      <p:sp>
-        <p:nvSpPr>
-          <p:cNvPr id="5" name="Text 3"/>
+              <a:t>2(x + 3) = 14 → divide by 2 → x + 3 = 7 → subtract 3 → x = 4</a:t>
+            </a:r>
+            <a:endParaRPr lang="en-US" sz="1400" dirty="0"/>
+          </a:p>
+          <a:p>
+            <a:pPr marL="342900" indent="-342900">
+              <a:spcAft>
+                <a:spcPts val="600"/>
+              </a:spcAft>
+              <a:buSzPct val="100000"/>
+              <a:buChar char="•"/>
+            </a:pPr>
+            <a:r>
+              <a:rPr lang="en-US" sz="1400" dirty="0">
+                <a:solidFill>
+                  <a:srgbClr val="3D3A36"/>
+                </a:solidFill>
+                <a:latin typeface="Calibri" pitchFamily="34" charset="0"/>
+                <a:ea typeface="Calibri" pitchFamily="34" charset="-122"/>
+                <a:cs typeface="Calibri" pitchFamily="34" charset="-120"/>
+              </a:rPr>
+              <a:t>Check each: substitute x back into the original equation</a:t>
+            </a:r>
+            <a:endParaRPr lang="en-US" sz="1400" dirty="0"/>
+          </a:p>
+        </p:txBody>
+      </p:sp>
+      <p:sp>
+        <p:nvSpPr>
+          <p:cNvPr id="6" name="Shape 4"/>
           <p:cNvSpPr/>
           <p:nvPr/>
         </p:nvSpPr>
         <p:spPr>
           <a:xfrm>
-            <a:off x="548640" y="4800600"/>
-            <a:ext cx="3657600" cy="274320"/>
+            <a:off x="4846320" y="1188720"/>
+            <a:ext cx="3840480" cy="3474720"/>
+          </a:xfrm>
+          <a:prstGeom prst="rect">
+            <a:avLst/>
+          </a:prstGeom>
+          <a:solidFill>
+            <a:srgbClr val="FFFFFF"/>
+          </a:solidFill>
+          <a:ln w="12700">
+            <a:solidFill>
+              <a:srgbClr val="E5E2DC"/>
+            </a:solidFill>
+            <a:prstDash val="solid"/>
+          </a:ln>
+          <a:effectLst>
+            <a:outerShdw sx="100000" sy="100000" kx="0" ky="0" algn="bl" rotWithShape="0" blurRad="50800" dist="25400" dir="8100000">
+              <a:srgbClr val="000000">
+                <a:alpha val="10000"/>
+              </a:srgbClr>
+            </a:outerShdw>
+          </a:effectLst>
+        </p:spPr>
+      </p:sp>
+      <p:sp>
+        <p:nvSpPr>
+          <p:cNvPr id="7" name="Shape 5"/>
+          <p:cNvSpPr/>
+          <p:nvPr/>
+        </p:nvSpPr>
+        <p:spPr>
+          <a:xfrm>
+            <a:off x="4846320" y="1188720"/>
+            <a:ext cx="3840480" cy="54864"/>
+          </a:xfrm>
+          <a:prstGeom prst="rect">
+            <a:avLst/>
+          </a:prstGeom>
+          <a:solidFill>
+            <a:srgbClr val="2A9D8F"/>
+          </a:solidFill>
+          <a:ln/>
+        </p:spPr>
+      </p:sp>
+      <p:sp>
+        <p:nvSpPr>
+          <p:cNvPr id="8" name="Text 6"/>
+          <p:cNvSpPr/>
+          <p:nvPr/>
+        </p:nvSpPr>
+        <p:spPr>
+          <a:xfrm>
+            <a:off x="5120640" y="1371600"/>
+            <a:ext cx="3291840" cy="3108960"/>
           </a:xfrm>
           <a:prstGeom prst="rect">
             <a:avLst/>
@@ -1727,21 +1941,156 @@
           <a:ln/>
         </p:spPr>
         <p:txBody>
-          <a:bodyPr wrap="square" rtlCol="0" anchor="ctr"/>
+          <a:bodyPr wrap="square" rtlCol="0" anchor="t"/>
           <a:lstStyle/>
           <a:p>
             <a:pPr indent="0" marL="0">
+              <a:spcAft>
+                <a:spcPts val="400"/>
+              </a:spcAft>
               <a:buNone/>
             </a:pPr>
             <a:r>
-              <a:rPr lang="en-US" sz="800" dirty="0">
-                <a:solidFill>
-                  <a:srgbClr val="9B9690"/>
-                </a:solidFill>
-              </a:rPr>
-              <a:t>mrzocchi.com</a:t>
-            </a:r>
-            <a:endParaRPr lang="en-US" sz="800" dirty="0"/>
+              <a:rPr lang="en-US" sz="1600" b="1" dirty="0">
+                <a:solidFill>
+                  <a:srgbClr val="1B2A4A"/>
+                </a:solidFill>
+                <a:latin typeface="Calibri" pitchFamily="34" charset="0"/>
+                <a:ea typeface="Calibri" pitchFamily="34" charset="-122"/>
+                <a:cs typeface="Calibri" pitchFamily="34" charset="-120"/>
+              </a:rPr>
+              <a:t>Order of Operations (Reversed!)</a:t>
+            </a:r>
+            <a:endParaRPr lang="en-US" sz="1600" dirty="0"/>
+          </a:p>
+          <a:p>
+            <a:pPr indent="0" marL="0">
+              <a:spcAft>
+                <a:spcPts val="400"/>
+              </a:spcAft>
+              <a:buNone/>
+            </a:pPr>
+            <a:endParaRPr lang="en-US" sz="1600" dirty="0"/>
+          </a:p>
+          <a:p>
+            <a:pPr indent="0" marL="0">
+              <a:spcAft>
+                <a:spcPts val="400"/>
+              </a:spcAft>
+              <a:buNone/>
+            </a:pPr>
+            <a:r>
+              <a:rPr lang="en-US" sz="1300" dirty="0">
+                <a:solidFill>
+                  <a:srgbClr val="3D3A36"/>
+                </a:solidFill>
+                <a:latin typeface="Calibri" pitchFamily="34" charset="0"/>
+                <a:ea typeface="Calibri" pitchFamily="34" charset="-122"/>
+                <a:cs typeface="Calibri" pitchFamily="34" charset="-120"/>
+              </a:rPr>
+              <a:t>When SOLVING, you reverse BIDMAS</a:t>
+            </a:r>
+            <a:endParaRPr lang="en-US" sz="1600" dirty="0"/>
+          </a:p>
+          <a:p>
+            <a:pPr indent="0" marL="0">
+              <a:spcAft>
+                <a:spcPts val="400"/>
+              </a:spcAft>
+              <a:buNone/>
+            </a:pPr>
+            <a:r>
+              <a:rPr lang="en-US" sz="1300" dirty="0">
+                <a:solidFill>
+                  <a:srgbClr val="3D3A36"/>
+                </a:solidFill>
+                <a:latin typeface="Calibri" pitchFamily="34" charset="0"/>
+                <a:ea typeface="Calibri" pitchFamily="34" charset="-122"/>
+                <a:cs typeface="Calibri" pitchFamily="34" charset="-120"/>
+              </a:rPr>
+              <a:t>Undo addition/subtraction FIRST</a:t>
+            </a:r>
+            <a:endParaRPr lang="en-US" sz="1600" dirty="0"/>
+          </a:p>
+          <a:p>
+            <a:pPr indent="0" marL="0">
+              <a:spcAft>
+                <a:spcPts val="400"/>
+              </a:spcAft>
+              <a:buNone/>
+            </a:pPr>
+            <a:r>
+              <a:rPr lang="en-US" sz="1300" dirty="0">
+                <a:solidFill>
+                  <a:srgbClr val="3D3A36"/>
+                </a:solidFill>
+                <a:latin typeface="Calibri" pitchFamily="34" charset="0"/>
+                <a:ea typeface="Calibri" pitchFamily="34" charset="-122"/>
+                <a:cs typeface="Calibri" pitchFamily="34" charset="-120"/>
+              </a:rPr>
+              <a:t>Then undo multiplication/division</a:t>
+            </a:r>
+            <a:endParaRPr lang="en-US" sz="1600" dirty="0"/>
+          </a:p>
+          <a:p>
+            <a:pPr indent="0" marL="0">
+              <a:spcAft>
+                <a:spcPts val="400"/>
+              </a:spcAft>
+              <a:buNone/>
+            </a:pPr>
+            <a:r>
+              <a:rPr lang="en-US" sz="1300" dirty="0">
+                <a:solidFill>
+                  <a:srgbClr val="3D3A36"/>
+                </a:solidFill>
+                <a:latin typeface="Calibri" pitchFamily="34" charset="0"/>
+                <a:ea typeface="Calibri" pitchFamily="34" charset="-122"/>
+                <a:cs typeface="Calibri" pitchFamily="34" charset="-120"/>
+              </a:rPr>
+              <a:t>Then undo indices/brackets</a:t>
+            </a:r>
+            <a:endParaRPr lang="en-US" sz="1600" dirty="0"/>
+          </a:p>
+          <a:p>
+            <a:pPr indent="0" marL="0">
+              <a:spcAft>
+                <a:spcPts val="400"/>
+              </a:spcAft>
+              <a:buNone/>
+            </a:pPr>
+            <a:r>
+              <a:rPr lang="en-US" sz="1300" dirty="0">
+                <a:solidFill>
+                  <a:srgbClr val="3D3A36"/>
+                </a:solidFill>
+                <a:latin typeface="Calibri" pitchFamily="34" charset="0"/>
+                <a:ea typeface="Calibri" pitchFamily="34" charset="-122"/>
+                <a:cs typeface="Calibri" pitchFamily="34" charset="-120"/>
+              </a:rPr>
+              <a:t>This is the OPPOSITE of the order for calculating</a:t>
+            </a:r>
+            <a:endParaRPr lang="en-US" sz="1600" dirty="0"/>
+          </a:p>
+          <a:p>
+            <a:pPr indent="0" marL="0">
+              <a:spcAft>
+                <a:spcPts val="400"/>
+              </a:spcAft>
+              <a:buNone/>
+            </a:pPr>
+            <a:r>
+              <a:rPr lang="en-US" sz="1300" dirty="0">
+                <a:solidFill>
+                  <a:srgbClr val="3D3A36"/>
+                </a:solidFill>
+                <a:latin typeface="Calibri" pitchFamily="34" charset="0"/>
+                <a:ea typeface="Calibri" pitchFamily="34" charset="-122"/>
+                <a:cs typeface="Calibri" pitchFamily="34" charset="-120"/>
+              </a:rPr>
+              <a:t>Think: 'unwrap' the equation from the outside in</a:t>
+            </a:r>
+            <a:endParaRPr lang="en-US" sz="1600" dirty="0"/>
           </a:p>
         </p:txBody>
       </p:sp>
@@ -1756,6 +2105,263 @@
 <file path=ppt/slides/slide4.xml><?xml version="1.0" encoding="utf-8"?>
 <p:sld xmlns:a="http://schemas.openxmlformats.org/drawingml/2006/main" xmlns:r="http://schemas.openxmlformats.org/officeDocument/2006/relationships" xmlns:p="http://schemas.openxmlformats.org/presentationml/2006/main">
   <p:cSld name="Slide 4">
+    <p:bg>
+      <p:bgPr>
+        <a:solidFill>
+          <a:srgbClr val="FAF8F5"/>
+        </a:solidFill>
+      </p:bgPr>
+    </p:bg>
+    <p:spTree>
+      <p:nvGrpSpPr>
+        <p:cNvPr id="1" name=""/>
+        <p:cNvGrpSpPr/>
+        <p:nvPr/>
+      </p:nvGrpSpPr>
+      <p:grpSpPr>
+        <a:xfrm>
+          <a:off x="0" y="0"/>
+          <a:ext cx="0" cy="0"/>
+          <a:chOff x="0" y="0"/>
+          <a:chExt cx="0" cy="0"/>
+        </a:xfrm>
+      </p:grpSpPr>
+      <p:sp>
+        <p:nvSpPr>
+          <p:cNvPr id="2" name="Shape 0"/>
+          <p:cNvSpPr/>
+          <p:nvPr/>
+        </p:nvSpPr>
+        <p:spPr>
+          <a:xfrm>
+            <a:off x="0" y="0"/>
+            <a:ext cx="9144000" cy="54864"/>
+          </a:xfrm>
+          <a:prstGeom prst="rect">
+            <a:avLst/>
+          </a:prstGeom>
+          <a:solidFill>
+            <a:srgbClr val="2A9D8F"/>
+          </a:solidFill>
+          <a:ln/>
+        </p:spPr>
+      </p:sp>
+      <p:sp>
+        <p:nvSpPr>
+          <p:cNvPr id="3" name="Text 1"/>
+          <p:cNvSpPr/>
+          <p:nvPr/>
+        </p:nvSpPr>
+        <p:spPr>
+          <a:xfrm>
+            <a:off x="7772400" y="4709160"/>
+            <a:ext cx="1097280" cy="320040"/>
+          </a:xfrm>
+          <a:prstGeom prst="rect">
+            <a:avLst/>
+          </a:prstGeom>
+          <a:noFill/>
+          <a:ln/>
+        </p:spPr>
+        <p:txBody>
+          <a:bodyPr wrap="square" rtlCol="0" anchor="ctr"/>
+          <a:lstStyle/>
+          <a:p>
+            <a:pPr algn="r" indent="0" marL="0">
+              <a:buNone/>
+            </a:pPr>
+            <a:r>
+              <a:rPr lang="en-US" sz="900" dirty="0">
+                <a:solidFill>
+                  <a:srgbClr val="6B6660"/>
+                </a:solidFill>
+                <a:latin typeface="Calibri" pitchFamily="34" charset="0"/>
+                <a:ea typeface="Calibri" pitchFamily="34" charset="-122"/>
+                <a:cs typeface="Calibri" pitchFamily="34" charset="-120"/>
+              </a:rPr>
+              <a:t>4 / 5</a:t>
+            </a:r>
+            <a:endParaRPr lang="en-US" sz="900" dirty="0"/>
+          </a:p>
+        </p:txBody>
+      </p:sp>
+      <p:sp>
+        <p:nvSpPr>
+          <p:cNvPr id="4" name="Text 2"/>
+          <p:cNvSpPr/>
+          <p:nvPr/>
+        </p:nvSpPr>
+        <p:spPr>
+          <a:xfrm>
+            <a:off x="457200" y="274320"/>
+            <a:ext cx="8229600" cy="640080"/>
+          </a:xfrm>
+          <a:prstGeom prst="rect">
+            <a:avLst/>
+          </a:prstGeom>
+          <a:noFill/>
+          <a:ln/>
+        </p:spPr>
+        <p:txBody>
+          <a:bodyPr wrap="square" rtlCol="0" anchor="ctr"/>
+          <a:lstStyle/>
+          <a:p>
+            <a:pPr indent="0" marL="0">
+              <a:buNone/>
+            </a:pPr>
+            <a:r>
+              <a:rPr lang="en-US" sz="2600" b="1" dirty="0">
+                <a:solidFill>
+                  <a:srgbClr val="1B2A4A"/>
+                </a:solidFill>
+                <a:latin typeface="Georgia" pitchFamily="34" charset="0"/>
+                <a:ea typeface="Georgia" pitchFamily="34" charset="-122"/>
+                <a:cs typeface="Georgia" pitchFamily="34" charset="-120"/>
+              </a:rPr>
+              <a:t>Practice</a:t>
+            </a:r>
+            <a:endParaRPr lang="en-US" sz="2600" dirty="0"/>
+          </a:p>
+        </p:txBody>
+      </p:sp>
+      <p:sp>
+        <p:nvSpPr>
+          <p:cNvPr id="5" name="Text 3"/>
+          <p:cNvSpPr/>
+          <p:nvPr/>
+        </p:nvSpPr>
+        <p:spPr>
+          <a:xfrm>
+            <a:off x="457200" y="1097280"/>
+            <a:ext cx="8229600" cy="3657600"/>
+          </a:xfrm>
+          <a:prstGeom prst="rect">
+            <a:avLst/>
+          </a:prstGeom>
+          <a:noFill/>
+          <a:ln/>
+        </p:spPr>
+        <p:txBody>
+          <a:bodyPr wrap="square" rtlCol="0" anchor="t"/>
+          <a:lstStyle/>
+          <a:p>
+            <a:pPr marL="342900" indent="-342900">
+              <a:spcAft>
+                <a:spcPts val="800"/>
+              </a:spcAft>
+              <a:buSzPct val="100000"/>
+              <a:buChar char="•"/>
+            </a:pPr>
+            <a:r>
+              <a:rPr lang="en-US" sz="1400" dirty="0">
+                <a:solidFill>
+                  <a:srgbClr val="3D3A36"/>
+                </a:solidFill>
+                <a:latin typeface="Calibri" pitchFamily="34" charset="0"/>
+                <a:ea typeface="Calibri" pitchFamily="34" charset="-122"/>
+                <a:cs typeface="Calibri" pitchFamily="34" charset="-120"/>
+              </a:rPr>
+              <a:t>4x + 7 = 31 → 4x = 24 → x = 6. Check: 4(6)+7 = 31 ✓</a:t>
+            </a:r>
+            <a:endParaRPr lang="en-US" sz="1400" dirty="0"/>
+          </a:p>
+          <a:p>
+            <a:pPr marL="342900" indent="-342900">
+              <a:spcAft>
+                <a:spcPts val="800"/>
+              </a:spcAft>
+              <a:buSzPct val="100000"/>
+              <a:buChar char="•"/>
+            </a:pPr>
+            <a:r>
+              <a:rPr lang="en-US" sz="1400" dirty="0">
+                <a:solidFill>
+                  <a:srgbClr val="3D3A36"/>
+                </a:solidFill>
+                <a:latin typeface="Calibri" pitchFamily="34" charset="0"/>
+                <a:ea typeface="Calibri" pitchFamily="34" charset="-122"/>
+                <a:cs typeface="Calibri" pitchFamily="34" charset="-120"/>
+              </a:rPr>
+              <a:t>2x − 9 = 1 → 2x = 10 → x = 5. Check: 2(5)−9 = 1 ✓</a:t>
+            </a:r>
+            <a:endParaRPr lang="en-US" sz="1400" dirty="0"/>
+          </a:p>
+          <a:p>
+            <a:pPr marL="342900" indent="-342900">
+              <a:spcAft>
+                <a:spcPts val="800"/>
+              </a:spcAft>
+              <a:buSzPct val="100000"/>
+              <a:buChar char="•"/>
+            </a:pPr>
+            <a:r>
+              <a:rPr lang="en-US" sz="1400" dirty="0">
+                <a:solidFill>
+                  <a:srgbClr val="3D3A36"/>
+                </a:solidFill>
+                <a:latin typeface="Calibri" pitchFamily="34" charset="0"/>
+                <a:ea typeface="Calibri" pitchFamily="34" charset="-122"/>
+                <a:cs typeface="Calibri" pitchFamily="34" charset="-120"/>
+              </a:rPr>
+              <a:t>x/3 + 5 = 8 → x/3 = 3 → x = 9. Check: 9/3+5 = 8 ✓</a:t>
+            </a:r>
+            <a:endParaRPr lang="en-US" sz="1400" dirty="0"/>
+          </a:p>
+          <a:p>
+            <a:pPr marL="342900" indent="-342900">
+              <a:spcAft>
+                <a:spcPts val="800"/>
+              </a:spcAft>
+              <a:buSzPct val="100000"/>
+              <a:buChar char="•"/>
+            </a:pPr>
+            <a:r>
+              <a:rPr lang="en-US" sz="1400" dirty="0">
+                <a:solidFill>
+                  <a:srgbClr val="3D3A36"/>
+                </a:solidFill>
+                <a:latin typeface="Calibri" pitchFamily="34" charset="0"/>
+                <a:ea typeface="Calibri" pitchFamily="34" charset="-122"/>
+                <a:cs typeface="Calibri" pitchFamily="34" charset="-120"/>
+              </a:rPr>
+              <a:t>3(x − 2) = 15 → x − 2 = 5 → x = 7. Check: 3(7−2) = 15 ✓</a:t>
+            </a:r>
+            <a:endParaRPr lang="en-US" sz="1400" dirty="0"/>
+          </a:p>
+          <a:p>
+            <a:pPr marL="342900" indent="-342900">
+              <a:spcAft>
+                <a:spcPts val="800"/>
+              </a:spcAft>
+              <a:buSzPct val="100000"/>
+              <a:buChar char="•"/>
+            </a:pPr>
+            <a:r>
+              <a:rPr lang="en-US" sz="1400" dirty="0">
+                <a:solidFill>
+                  <a:srgbClr val="3D3A36"/>
+                </a:solidFill>
+                <a:latin typeface="Calibri" pitchFamily="34" charset="0"/>
+                <a:ea typeface="Calibri" pitchFamily="34" charset="-122"/>
+                <a:cs typeface="Calibri" pitchFamily="34" charset="-120"/>
+              </a:rPr>
+              <a:t>Always show your working — write each step on a new line</a:t>
+            </a:r>
+            <a:endParaRPr lang="en-US" sz="1400" dirty="0"/>
+          </a:p>
+        </p:txBody>
+      </p:sp>
+    </p:spTree>
+  </p:cSld>
+  <p:clrMapOvr>
+    <a:masterClrMapping/>
+  </p:clrMapOvr>
+</p:sld>
+</file>
+
+<file path=ppt/slides/slide5.xml><?xml version="1.0" encoding="utf-8"?>
+<p:sld xmlns:a="http://schemas.openxmlformats.org/drawingml/2006/main" xmlns:r="http://schemas.openxmlformats.org/officeDocument/2006/relationships" xmlns:p="http://schemas.openxmlformats.org/presentationml/2006/main">
+  <p:cSld name="Slide 5">
     <p:bg>
       <p:bgPr>
         <a:solidFill>
@@ -1786,13 +2392,13 @@
         <p:spPr>
           <a:xfrm>
             <a:off x="0" y="0"/>
-            <a:ext cx="9144000" cy="54864"/>
-          </a:xfrm>
-          <a:prstGeom prst="rect">
-            <a:avLst/>
-          </a:prstGeom>
-          <a:solidFill>
-            <a:srgbClr val="2A9D8F"/>
+            <a:ext cx="109728" cy="5143500"/>
+          </a:xfrm>
+          <a:prstGeom prst="rect">
+            <a:avLst/>
+          </a:prstGeom>
+          <a:solidFill>
+            <a:srgbClr val="E9C46A"/>
           </a:solidFill>
           <a:ln/>
         </p:spPr>
@@ -1805,8 +2411,8 @@
         </p:nvSpPr>
         <p:spPr>
           <a:xfrm>
-            <a:off x="548640" y="457200"/>
-            <a:ext cx="8046720" cy="640080"/>
+            <a:off x="731520" y="457200"/>
+            <a:ext cx="7772400" cy="731520"/>
           </a:xfrm>
           <a:prstGeom prst="rect">
             <a:avLst/>
@@ -1822,7 +2428,7 @@
               <a:buNone/>
             </a:pPr>
             <a:r>
-              <a:rPr lang="en-US" sz="2800" b="1" dirty="0">
+              <a:rPr lang="en-US" sz="3200" b="1" dirty="0">
                 <a:solidFill>
                   <a:srgbClr val="FFFFFF"/>
                 </a:solidFill>
@@ -1832,7 +2438,7 @@
               </a:rPr>
               <a:t>Key Takeaways</a:t>
             </a:r>
-            <a:endParaRPr lang="en-US" sz="2800" dirty="0"/>
+            <a:endParaRPr lang="en-US" sz="3200" dirty="0"/>
           </a:p>
         </p:txBody>
       </p:sp>
@@ -1844,8 +2450,8 @@
         </p:nvSpPr>
         <p:spPr>
           <a:xfrm>
-            <a:off x="731520" y="1371600"/>
-            <a:ext cx="7680960" cy="3200400"/>
+            <a:off x="731520" y="1463040"/>
+            <a:ext cx="7772400" cy="3200400"/>
           </a:xfrm>
           <a:prstGeom prst="rect">
             <a:avLst/>
@@ -1865,7 +2471,7 @@
               <a:buChar char="•"/>
             </a:pPr>
             <a:r>
-              <a:rPr lang="en-US" sz="1600" dirty="0">
+              <a:rPr lang="en-US" sz="1500" dirty="0">
                 <a:solidFill>
                   <a:srgbClr val="CADCFC"/>
                 </a:solidFill>
@@ -1873,9 +2479,9 @@
                 <a:ea typeface="Calibri" pitchFamily="34" charset="-122"/>
                 <a:cs typeface="Calibri" pitchFamily="34" charset="-120"/>
               </a:rPr>
-              <a:t>Two-step: undo addition/subtraction first, then multiplication/division</a:t>
-            </a:r>
-            <a:endParaRPr lang="en-US" sz="1600" dirty="0"/>
+              <a:t>Two-step equations need two inverse operations</a:t>
+            </a:r>
+            <a:endParaRPr lang="en-US" sz="1500" dirty="0"/>
           </a:p>
           <a:p>
             <a:pPr marL="342900" indent="-342900">
@@ -1886,7 +2492,7 @@
               <a:buChar char="•"/>
             </a:pPr>
             <a:r>
-              <a:rPr lang="en-US" sz="1600" dirty="0">
+              <a:rPr lang="en-US" sz="1500" dirty="0">
                 <a:solidFill>
                   <a:srgbClr val="CADCFC"/>
                 </a:solidFill>
@@ -1894,9 +2500,9 @@
                 <a:ea typeface="Calibri" pitchFamily="34" charset="-122"/>
                 <a:cs typeface="Calibri" pitchFamily="34" charset="-120"/>
               </a:rPr>
-              <a:t>Reverse the order of BIDMAS</a:t>
-            </a:r>
-            <a:endParaRPr lang="en-US" sz="1600" dirty="0"/>
+              <a:t>Undo +/− first, then ×/÷ (reverse of BIDMAS)</a:t>
+            </a:r>
+            <a:endParaRPr lang="en-US" sz="1500" dirty="0"/>
           </a:p>
           <a:p>
             <a:pPr marL="342900" indent="-342900">
@@ -1907,7 +2513,7 @@
               <a:buChar char="•"/>
             </a:pPr>
             <a:r>
-              <a:rPr lang="en-US" sz="1600" dirty="0">
+              <a:rPr lang="en-US" sz="1500" dirty="0">
                 <a:solidFill>
                   <a:srgbClr val="CADCFC"/>
                 </a:solidFill>
@@ -1915,9 +2521,9 @@
                 <a:ea typeface="Calibri" pitchFamily="34" charset="-122"/>
                 <a:cs typeface="Calibri" pitchFamily="34" charset="-120"/>
               </a:rPr>
-              <a:t>Show each step clearly</a:t>
-            </a:r>
-            <a:endParaRPr lang="en-US" sz="1600" dirty="0"/>
+              <a:t>Whatever you do to one side, do to the other</a:t>
+            </a:r>
+            <a:endParaRPr lang="en-US" sz="1500" dirty="0"/>
           </a:p>
           <a:p>
             <a:pPr marL="342900" indent="-342900">
@@ -1928,7 +2534,7 @@
               <a:buChar char="•"/>
             </a:pPr>
             <a:r>
-              <a:rPr lang="en-US" sz="1600" dirty="0">
+              <a:rPr lang="en-US" sz="1500" dirty="0">
                 <a:solidFill>
                   <a:srgbClr val="CADCFC"/>
                 </a:solidFill>
@@ -1936,9 +2542,30 @@
                 <a:ea typeface="Calibri" pitchFamily="34" charset="-122"/>
                 <a:cs typeface="Calibri" pitchFamily="34" charset="-120"/>
               </a:rPr>
-              <a:t>Always check your answer by substituting back</a:t>
-            </a:r>
-            <a:endParaRPr lang="en-US" sz="1600" dirty="0"/>
+              <a:t>Show working: each step on a new line</a:t>
+            </a:r>
+            <a:endParaRPr lang="en-US" sz="1500" dirty="0"/>
+          </a:p>
+          <a:p>
+            <a:pPr marL="342900" indent="-342900">
+              <a:spcAft>
+                <a:spcPts val="1000"/>
+              </a:spcAft>
+              <a:buSzPct val="100000"/>
+              <a:buChar char="•"/>
+            </a:pPr>
+            <a:r>
+              <a:rPr lang="en-US" sz="1500" dirty="0">
+                <a:solidFill>
+                  <a:srgbClr val="CADCFC"/>
+                </a:solidFill>
+                <a:latin typeface="Calibri" pitchFamily="34" charset="0"/>
+                <a:ea typeface="Calibri" pitchFamily="34" charset="-122"/>
+                <a:cs typeface="Calibri" pitchFamily="34" charset="-120"/>
+              </a:rPr>
+              <a:t>Always check by substituting your answer back</a:t>
+            </a:r>
+            <a:endParaRPr lang="en-US" sz="1500" dirty="0"/>
           </a:p>
         </p:txBody>
       </p:sp>
@@ -1950,8 +2577,8 @@
         </p:nvSpPr>
         <p:spPr>
           <a:xfrm>
-            <a:off x="548640" y="4572000"/>
-            <a:ext cx="3657600" cy="274320"/>
+            <a:off x="731520" y="4572000"/>
+            <a:ext cx="7772400" cy="365760"/>
           </a:xfrm>
           <a:prstGeom prst="rect">
             <a:avLst/>
@@ -1967,14 +2594,17 @@
               <a:buNone/>
             </a:pPr>
             <a:r>
-              <a:rPr lang="en-US" sz="1000" dirty="0">
-                <a:solidFill>
-                  <a:srgbClr val="6B6660"/>
-                </a:solidFill>
+              <a:rPr lang="en-US" sz="1100" dirty="0">
+                <a:solidFill>
+                  <a:srgbClr val="E9C46A"/>
+                </a:solidFill>
+                <a:latin typeface="Calibri" pitchFamily="34" charset="0"/>
+                <a:ea typeface="Calibri" pitchFamily="34" charset="-122"/>
+                <a:cs typeface="Calibri" pitchFamily="34" charset="-120"/>
               </a:rPr>
               <a:t>mrzocchi.com</a:t>
             </a:r>
-            <a:endParaRPr lang="en-US" sz="1000" dirty="0"/>
+            <a:endParaRPr lang="en-US" sz="1100" dirty="0"/>
           </a:p>
         </p:txBody>
       </p:sp>

--- a/static/ppts/G6_Math_T4_Two_Step_Equations.pptx
+++ b/static/ppts/G6_Math_T4_Two_Step_Equations.pptx
@@ -10,9 +10,11 @@
     <p:sldId id="258" r:id="rId4"/>
     <p:sldId id="259" r:id="rId5"/>
     <p:sldId id="260" r:id="rId6"/>
+    <p:sldId id="261" r:id="rId7"/>
+    <p:sldId id="262" r:id="rId8"/>
   </p:sldIdLst>
   <p:notesMasterIdLst>
-    <p:notesMasterId r:id="rId7"/>
+    <p:notesMasterId r:id="rId9"/>
   </p:notesMasterIdLst>
   <p:sldSz cx="9144000" cy="5143500"/>
   <p:notesSz cx="5143500" cy="9144000"/>
@@ -900,6 +902,182 @@
 </p:notes>
 </file>
 
+<file path=ppt/notesSlides/notesSlide6.xml><?xml version="1.0" encoding="utf-8"?>
+<p:notes xmlns:a="http://schemas.openxmlformats.org/drawingml/2006/main" xmlns:r="http://schemas.openxmlformats.org/officeDocument/2006/relationships" xmlns:p="http://schemas.openxmlformats.org/presentationml/2006/main">
+  <p:cSld>
+    <p:spTree>
+      <p:nvGrpSpPr>
+        <p:cNvPr id="1" name=""/>
+        <p:cNvGrpSpPr/>
+        <p:nvPr/>
+      </p:nvGrpSpPr>
+      <p:grpSpPr>
+        <a:xfrm>
+          <a:off x="0" y="0"/>
+          <a:ext cx="0" cy="0"/>
+          <a:chOff x="0" y="0"/>
+          <a:chExt cx="0" cy="0"/>
+        </a:xfrm>
+      </p:grpSpPr>
+      <p:sp>
+        <p:nvSpPr>
+          <p:cNvPr id="2" name="Slide Image Placeholder 1"/>
+          <p:cNvSpPr>
+            <a:spLocks noGrp="1" noRot="1" noChangeAspect="1"/>
+          </p:cNvSpPr>
+          <p:nvPr>
+            <p:ph type="sldImg"/>
+          </p:nvPr>
+        </p:nvSpPr>
+        <p:spPr/>
+      </p:sp>
+      <p:sp>
+        <p:nvSpPr>
+          <p:cNvPr id="3" name="Notes Placeholder 2"/>
+          <p:cNvSpPr>
+            <a:spLocks noGrp="1"/>
+          </p:cNvSpPr>
+          <p:nvPr>
+            <p:ph type="body" idx="1"/>
+          </p:nvPr>
+        </p:nvSpPr>
+        <p:spPr/>
+        <p:txBody>
+          <a:bodyPr/>
+          <a:lstStyle/>
+          <a:p>
+            <a:r>
+              <a:rPr lang="en-US" dirty="0"/>
+              <a:t/>
+            </a:r>
+            <a:endParaRPr lang="en-US" dirty="0"/>
+          </a:p>
+        </p:txBody>
+      </p:sp>
+      <p:sp>
+        <p:nvSpPr>
+          <p:cNvPr id="4" name="Slide Number Placeholder 3"/>
+          <p:cNvSpPr>
+            <a:spLocks noGrp="1"/>
+          </p:cNvSpPr>
+          <p:nvPr>
+            <p:ph type="sldNum" sz="quarter" idx="10"/>
+          </p:nvPr>
+        </p:nvSpPr>
+        <p:spPr/>
+        <p:txBody>
+          <a:bodyPr/>
+          <a:lstStyle/>
+          <a:p>
+            <a:fld id="{F7021451-1387-4CA6-816F-3879F97B5CBC}" type="slidenum">
+              <a:rPr lang="en-US"/>
+              <a:t>6</a:t>
+            </a:fld>
+            <a:endParaRPr lang="en-US"/>
+          </a:p>
+        </p:txBody>
+      </p:sp>
+    </p:spTree>
+    <p:extLst>
+      <p:ext uri="{BB962C8B-B14F-4D97-AF65-F5344CB8AC3E}">
+        <p14:creationId xmlns:p14="http://schemas.microsoft.com/office/powerpoint/2010/main" val="1024086991"/>
+      </p:ext>
+    </p:extLst>
+  </p:cSld>
+  <p:clrMapOvr>
+    <a:masterClrMapping/>
+  </p:clrMapOvr>
+</p:notes>
+</file>
+
+<file path=ppt/notesSlides/notesSlide7.xml><?xml version="1.0" encoding="utf-8"?>
+<p:notes xmlns:a="http://schemas.openxmlformats.org/drawingml/2006/main" xmlns:r="http://schemas.openxmlformats.org/officeDocument/2006/relationships" xmlns:p="http://schemas.openxmlformats.org/presentationml/2006/main">
+  <p:cSld>
+    <p:spTree>
+      <p:nvGrpSpPr>
+        <p:cNvPr id="1" name=""/>
+        <p:cNvGrpSpPr/>
+        <p:nvPr/>
+      </p:nvGrpSpPr>
+      <p:grpSpPr>
+        <a:xfrm>
+          <a:off x="0" y="0"/>
+          <a:ext cx="0" cy="0"/>
+          <a:chOff x="0" y="0"/>
+          <a:chExt cx="0" cy="0"/>
+        </a:xfrm>
+      </p:grpSpPr>
+      <p:sp>
+        <p:nvSpPr>
+          <p:cNvPr id="2" name="Slide Image Placeholder 1"/>
+          <p:cNvSpPr>
+            <a:spLocks noGrp="1" noRot="1" noChangeAspect="1"/>
+          </p:cNvSpPr>
+          <p:nvPr>
+            <p:ph type="sldImg"/>
+          </p:nvPr>
+        </p:nvSpPr>
+        <p:spPr/>
+      </p:sp>
+      <p:sp>
+        <p:nvSpPr>
+          <p:cNvPr id="3" name="Notes Placeholder 2"/>
+          <p:cNvSpPr>
+            <a:spLocks noGrp="1"/>
+          </p:cNvSpPr>
+          <p:nvPr>
+            <p:ph type="body" idx="1"/>
+          </p:nvPr>
+        </p:nvSpPr>
+        <p:spPr/>
+        <p:txBody>
+          <a:bodyPr/>
+          <a:lstStyle/>
+          <a:p>
+            <a:r>
+              <a:rPr lang="en-US" dirty="0"/>
+              <a:t/>
+            </a:r>
+            <a:endParaRPr lang="en-US" dirty="0"/>
+          </a:p>
+        </p:txBody>
+      </p:sp>
+      <p:sp>
+        <p:nvSpPr>
+          <p:cNvPr id="4" name="Slide Number Placeholder 3"/>
+          <p:cNvSpPr>
+            <a:spLocks noGrp="1"/>
+          </p:cNvSpPr>
+          <p:nvPr>
+            <p:ph type="sldNum" sz="quarter" idx="10"/>
+          </p:nvPr>
+        </p:nvSpPr>
+        <p:spPr/>
+        <p:txBody>
+          <a:bodyPr/>
+          <a:lstStyle/>
+          <a:p>
+            <a:fld id="{F7021451-1387-4CA6-816F-3879F97B5CBC}" type="slidenum">
+              <a:rPr lang="en-US"/>
+              <a:t>7</a:t>
+            </a:fld>
+            <a:endParaRPr lang="en-US"/>
+          </a:p>
+        </p:txBody>
+      </p:sp>
+    </p:spTree>
+    <p:extLst>
+      <p:ext uri="{BB962C8B-B14F-4D97-AF65-F5344CB8AC3E}">
+        <p14:creationId xmlns:p14="http://schemas.microsoft.com/office/powerpoint/2010/main" val="1024086991"/>
+      </p:ext>
+    </p:extLst>
+  </p:cSld>
+  <p:clrMapOvr>
+    <a:masterClrMapping/>
+  </p:clrMapOvr>
+</p:notes>
+</file>
+
 <file path=ppt/slideLayouts/slideLayout1.xml><?xml version="1.0" encoding="utf-8"?>
 <p:sldLayout xmlns:a="http://schemas.openxmlformats.org/drawingml/2006/main" xmlns:r="http://schemas.openxmlformats.org/officeDocument/2006/relationships" xmlns:p="http://schemas.openxmlformats.org/presentationml/2006/main" preserve="1">
   <p:cSld name="DEFAULT">
@@ -1210,13 +1388,6 @@
 <file path=ppt/slides/slide1.xml><?xml version="1.0" encoding="utf-8"?>
 <p:sld xmlns:a="http://schemas.openxmlformats.org/drawingml/2006/main" xmlns:r="http://schemas.openxmlformats.org/officeDocument/2006/relationships" xmlns:p="http://schemas.openxmlformats.org/presentationml/2006/main">
   <p:cSld name="Slide 1">
-    <p:bg>
-      <p:bgPr>
-        <a:solidFill>
-          <a:srgbClr val="1B2A4A"/>
-        </a:solidFill>
-      </p:bgPr>
-    </p:bg>
     <p:spTree>
       <p:nvGrpSpPr>
         <p:cNvPr id="1" name=""/>
@@ -1240,7 +1411,27 @@
         <p:spPr>
           <a:xfrm>
             <a:off x="0" y="0"/>
-            <a:ext cx="109728" cy="5143500"/>
+            <a:ext cx="9144000" cy="5143500"/>
+          </a:xfrm>
+          <a:prstGeom prst="rect">
+            <a:avLst/>
+          </a:prstGeom>
+          <a:solidFill>
+            <a:srgbClr val="1B2A4A"/>
+          </a:solidFill>
+          <a:ln/>
+        </p:spPr>
+      </p:sp>
+      <p:sp>
+        <p:nvSpPr>
+          <p:cNvPr id="3" name="Shape 1"/>
+          <p:cNvSpPr/>
+          <p:nvPr/>
+        </p:nvSpPr>
+        <p:spPr>
+          <a:xfrm>
+            <a:off x="0" y="4777740"/>
+            <a:ext cx="9144000" cy="365760"/>
           </a:xfrm>
           <a:prstGeom prst="rect">
             <a:avLst/>
@@ -1253,14 +1444,14 @@
       </p:sp>
       <p:sp>
         <p:nvSpPr>
-          <p:cNvPr id="3" name="Text 1"/>
+          <p:cNvPr id="4" name="Text 2"/>
           <p:cNvSpPr/>
           <p:nvPr/>
         </p:nvSpPr>
         <p:spPr>
           <a:xfrm>
             <a:off x="731520" y="1097280"/>
-            <a:ext cx="7772400" cy="1371600"/>
+            <a:ext cx="7680960" cy="457200"/>
           </a:xfrm>
           <a:prstGeom prst="rect">
             <a:avLst/>
@@ -1270,6 +1461,45 @@
         </p:spPr>
         <p:txBody>
           <a:bodyPr wrap="square" rtlCol="0" anchor="ctr"/>
+          <a:lstStyle/>
+          <a:p>
+            <a:pPr indent="0" marL="0">
+              <a:buNone/>
+            </a:pPr>
+            <a:r>
+              <a:rPr lang="en-US" sz="1400" b="1" spc="400" kern="0" dirty="0">
+                <a:solidFill>
+                  <a:srgbClr val="2A9D8F"/>
+                </a:solidFill>
+                <a:latin typeface="Calibri" pitchFamily="34" charset="0"/>
+                <a:ea typeface="Calibri" pitchFamily="34" charset="-122"/>
+                <a:cs typeface="Calibri" pitchFamily="34" charset="-120"/>
+              </a:rPr>
+              <a:t>GRADE 6 MATHEMATICS</a:t>
+            </a:r>
+            <a:endParaRPr lang="en-US" sz="1400" dirty="0"/>
+          </a:p>
+        </p:txBody>
+      </p:sp>
+      <p:sp>
+        <p:nvSpPr>
+          <p:cNvPr id="5" name="Text 3"/>
+          <p:cNvSpPr/>
+          <p:nvPr/>
+        </p:nvSpPr>
+        <p:spPr>
+          <a:xfrm>
+            <a:off x="731520" y="1645920"/>
+            <a:ext cx="7680960" cy="1463040"/>
+          </a:xfrm>
+          <a:prstGeom prst="rect">
+            <a:avLst/>
+          </a:prstGeom>
+          <a:noFill/>
+          <a:ln/>
+        </p:spPr>
+        <p:txBody>
+          <a:bodyPr wrap="square" rtlCol="0" anchor="t"/>
           <a:lstStyle/>
           <a:p>
             <a:pPr indent="0" marL="0">
@@ -1284,46 +1514,63 @@
                 <a:ea typeface="Georgia" pitchFamily="34" charset="-122"/>
                 <a:cs typeface="Georgia" pitchFamily="34" charset="-120"/>
               </a:rPr>
-              <a:t>Solving Two-Step Equations</a:t>
+              <a:t>Solving Two-Step</a:t>
             </a:r>
             <a:endParaRPr lang="en-US" sz="4000" dirty="0"/>
           </a:p>
-        </p:txBody>
-      </p:sp>
-      <p:sp>
-        <p:nvSpPr>
-          <p:cNvPr id="4" name="Text 2"/>
-          <p:cNvSpPr/>
-          <p:nvPr/>
-        </p:nvSpPr>
-        <p:spPr>
-          <a:xfrm>
-            <a:off x="731520" y="2560320"/>
-            <a:ext cx="7772400" cy="548640"/>
-          </a:xfrm>
-          <a:prstGeom prst="rect">
-            <a:avLst/>
-          </a:prstGeom>
-          <a:noFill/>
-          <a:ln/>
-        </p:spPr>
-        <p:txBody>
-          <a:bodyPr wrap="square" rtlCol="0" anchor="ctr"/>
-          <a:lstStyle/>
           <a:p>
             <a:pPr indent="0" marL="0">
               <a:buNone/>
             </a:pPr>
             <a:r>
-              <a:rPr lang="en-US" sz="1600" dirty="0">
-                <a:solidFill>
-                  <a:srgbClr val="E9C46A"/>
+              <a:rPr lang="en-US" sz="4000" b="1" dirty="0">
+                <a:solidFill>
+                  <a:srgbClr val="FFFFFF"/>
+                </a:solidFill>
+                <a:latin typeface="Georgia" pitchFamily="34" charset="0"/>
+                <a:ea typeface="Georgia" pitchFamily="34" charset="-122"/>
+                <a:cs typeface="Georgia" pitchFamily="34" charset="-120"/>
+              </a:rPr>
+              <a:t>Equations</a:t>
+            </a:r>
+            <a:endParaRPr lang="en-US" sz="4000" dirty="0"/>
+          </a:p>
+        </p:txBody>
+      </p:sp>
+      <p:sp>
+        <p:nvSpPr>
+          <p:cNvPr id="6" name="Text 4"/>
+          <p:cNvSpPr/>
+          <p:nvPr/>
+        </p:nvSpPr>
+        <p:spPr>
+          <a:xfrm>
+            <a:off x="731520" y="3200400"/>
+            <a:ext cx="7680960" cy="548640"/>
+          </a:xfrm>
+          <a:prstGeom prst="rect">
+            <a:avLst/>
+          </a:prstGeom>
+          <a:noFill/>
+          <a:ln/>
+        </p:spPr>
+        <p:txBody>
+          <a:bodyPr wrap="square" rtlCol="0" anchor="ctr"/>
+          <a:lstStyle/>
+          <a:p>
+            <a:pPr indent="0" marL="0">
+              <a:buNone/>
+            </a:pPr>
+            <a:r>
+              <a:rPr lang="en-US" sz="1600" i="1" dirty="0">
+                <a:solidFill>
+                  <a:srgbClr val="9B9690"/>
                 </a:solidFill>
                 <a:latin typeface="Calibri" pitchFamily="34" charset="0"/>
                 <a:ea typeface="Calibri" pitchFamily="34" charset="-122"/>
                 <a:cs typeface="Calibri" pitchFamily="34" charset="-120"/>
               </a:rPr>
-              <a:t>Grade 6 Mathematics · Mr Zocchi</a:t>
+              <a:t>Two moves to find the unknown</a:t>
             </a:r>
             <a:endParaRPr lang="en-US" sz="1600" dirty="0"/>
           </a:p>
@@ -1331,36 +1578,14 @@
       </p:sp>
       <p:sp>
         <p:nvSpPr>
-          <p:cNvPr id="5" name="Shape 3"/>
-          <p:cNvSpPr/>
-          <p:nvPr/>
-        </p:nvSpPr>
-        <p:spPr>
-          <a:xfrm>
-            <a:off x="731520" y="3474720"/>
-            <a:ext cx="2011680" cy="411480"/>
-          </a:xfrm>
-          <a:prstGeom prst="roundRect">
-            <a:avLst>
-              <a:gd name="adj" fmla="val 17778"/>
-            </a:avLst>
-          </a:prstGeom>
-          <a:solidFill>
-            <a:srgbClr val="2A9D8F"/>
-          </a:solidFill>
-          <a:ln/>
-        </p:spPr>
-      </p:sp>
-      <p:sp>
-        <p:nvSpPr>
-          <p:cNvPr id="6" name="Text 4"/>
-          <p:cNvSpPr/>
-          <p:nvPr/>
-        </p:nvSpPr>
-        <p:spPr>
-          <a:xfrm>
-            <a:off x="731520" y="3474720"/>
-            <a:ext cx="2011680" cy="411480"/>
+          <p:cNvPr id="7" name="Text 5"/>
+          <p:cNvSpPr/>
+          <p:nvPr/>
+        </p:nvSpPr>
+        <p:spPr>
+          <a:xfrm>
+            <a:off x="731520" y="4206240"/>
+            <a:ext cx="3657600" cy="365760"/>
           </a:xfrm>
           <a:prstGeom prst="rect">
             <a:avLst/>
@@ -1372,19 +1597,19 @@
           <a:bodyPr wrap="square" rtlCol="0" anchor="ctr"/>
           <a:lstStyle/>
           <a:p>
-            <a:pPr algn="ctr" indent="0" marL="0">
+            <a:pPr indent="0" marL="0">
               <a:buNone/>
             </a:pPr>
             <a:r>
-              <a:rPr lang="en-US" sz="1200" b="1" dirty="0">
-                <a:solidFill>
-                  <a:srgbClr val="FFFFFF"/>
+              <a:rPr lang="en-US" sz="1200" dirty="0">
+                <a:solidFill>
+                  <a:srgbClr val="6B6660"/>
                 </a:solidFill>
                 <a:latin typeface="Calibri" pitchFamily="34" charset="0"/>
                 <a:ea typeface="Calibri" pitchFamily="34" charset="-122"/>
                 <a:cs typeface="Calibri" pitchFamily="34" charset="-120"/>
               </a:rPr>
-              <a:t>Term 4 · Algebra</a:t>
+              <a:t>Mr Zocchi</a:t>
             </a:r>
             <a:endParaRPr lang="en-US" sz="1200" dirty="0"/>
           </a:p>
@@ -1401,13 +1626,6 @@
 <file path=ppt/slides/slide2.xml><?xml version="1.0" encoding="utf-8"?>
 <p:sld xmlns:a="http://schemas.openxmlformats.org/drawingml/2006/main" xmlns:r="http://schemas.openxmlformats.org/officeDocument/2006/relationships" xmlns:p="http://schemas.openxmlformats.org/presentationml/2006/main">
   <p:cSld name="Slide 2">
-    <p:bg>
-      <p:bgPr>
-        <a:solidFill>
-          <a:srgbClr val="FAF8F5"/>
-        </a:solidFill>
-      </p:bgPr>
-    </p:bg>
     <p:spTree>
       <p:nvGrpSpPr>
         <p:cNvPr id="1" name=""/>
@@ -1431,13 +1649,13 @@
         <p:spPr>
           <a:xfrm>
             <a:off x="0" y="0"/>
-            <a:ext cx="9144000" cy="54864"/>
-          </a:xfrm>
-          <a:prstGeom prst="rect">
-            <a:avLst/>
-          </a:prstGeom>
-          <a:solidFill>
-            <a:srgbClr val="2A9D8F"/>
+            <a:ext cx="9144000" cy="5143500"/>
+          </a:xfrm>
+          <a:prstGeom prst="rect">
+            <a:avLst/>
+          </a:prstGeom>
+          <a:solidFill>
+            <a:srgbClr val="111D35"/>
           </a:solidFill>
           <a:ln/>
         </p:spPr>
@@ -1450,8 +1668,8 @@
         </p:nvSpPr>
         <p:spPr>
           <a:xfrm>
-            <a:off x="7772400" y="4709160"/>
-            <a:ext cx="1097280" cy="320040"/>
+            <a:off x="6858000" y="182880"/>
+            <a:ext cx="2286000" cy="2743200"/>
           </a:xfrm>
           <a:prstGeom prst="rect">
             <a:avLst/>
@@ -1463,86 +1681,75 @@
           <a:bodyPr wrap="square" rtlCol="0" anchor="ctr"/>
           <a:lstStyle/>
           <a:p>
-            <a:pPr algn="r" indent="0" marL="0">
+            <a:pPr algn="ctr" indent="0" marL="0">
               <a:buNone/>
             </a:pPr>
             <a:r>
-              <a:rPr lang="en-US" sz="900" dirty="0">
-                <a:solidFill>
-                  <a:srgbClr val="6B6660"/>
+              <a:rPr lang="en-US" sz="16000" b="1" dirty="0">
+                <a:solidFill>
+                  <a:srgbClr val="2A9D8F">
+                    <a:alpha val="80000"/>
+                  </a:srgbClr>
+                </a:solidFill>
+                <a:latin typeface="Georgia" pitchFamily="34" charset="0"/>
+                <a:ea typeface="Georgia" pitchFamily="34" charset="-122"/>
+                <a:cs typeface="Georgia" pitchFamily="34" charset="-120"/>
+              </a:rPr>
+              <a:t>?</a:t>
+            </a:r>
+            <a:endParaRPr lang="en-US" sz="16000" dirty="0"/>
+          </a:p>
+        </p:txBody>
+      </p:sp>
+      <p:sp>
+        <p:nvSpPr>
+          <p:cNvPr id="4" name="Text 2"/>
+          <p:cNvSpPr/>
+          <p:nvPr/>
+        </p:nvSpPr>
+        <p:spPr>
+          <a:xfrm>
+            <a:off x="731520" y="548640"/>
+            <a:ext cx="2743200" cy="365760"/>
+          </a:xfrm>
+          <a:prstGeom prst="rect">
+            <a:avLst/>
+          </a:prstGeom>
+          <a:noFill/>
+          <a:ln/>
+        </p:spPr>
+        <p:txBody>
+          <a:bodyPr wrap="square" rtlCol="0" anchor="ctr"/>
+          <a:lstStyle/>
+          <a:p>
+            <a:pPr indent="0" marL="0">
+              <a:buNone/>
+            </a:pPr>
+            <a:r>
+              <a:rPr lang="en-US" sz="1200" b="1" spc="400" kern="0" dirty="0">
+                <a:solidFill>
+                  <a:srgbClr val="2A9D8F"/>
                 </a:solidFill>
                 <a:latin typeface="Calibri" pitchFamily="34" charset="0"/>
                 <a:ea typeface="Calibri" pitchFamily="34" charset="-122"/>
                 <a:cs typeface="Calibri" pitchFamily="34" charset="-120"/>
               </a:rPr>
-              <a:t>2 / 5</a:t>
-            </a:r>
-            <a:endParaRPr lang="en-US" sz="900" dirty="0"/>
-          </a:p>
-        </p:txBody>
-      </p:sp>
-      <p:sp>
-        <p:nvSpPr>
-          <p:cNvPr id="4" name="Shape 2"/>
-          <p:cNvSpPr/>
-          <p:nvPr/>
-        </p:nvSpPr>
-        <p:spPr>
-          <a:xfrm>
-            <a:off x="1371600" y="914400"/>
-            <a:ext cx="6400800" cy="3200400"/>
-          </a:xfrm>
-          <a:prstGeom prst="rect">
-            <a:avLst/>
-          </a:prstGeom>
-          <a:solidFill>
-            <a:srgbClr val="FFFFFF"/>
-          </a:solidFill>
-          <a:ln w="12700">
-            <a:solidFill>
-              <a:srgbClr val="E5E2DC"/>
-            </a:solidFill>
-            <a:prstDash val="solid"/>
-          </a:ln>
-          <a:effectLst>
-            <a:outerShdw sx="100000" sy="100000" kx="0" ky="0" algn="bl" rotWithShape="0" blurRad="50800" dist="25400" dir="8100000">
-              <a:srgbClr val="000000">
-                <a:alpha val="10000"/>
-              </a:srgbClr>
-            </a:outerShdw>
-          </a:effectLst>
-        </p:spPr>
-      </p:sp>
-      <p:sp>
-        <p:nvSpPr>
-          <p:cNvPr id="5" name="Shape 3"/>
-          <p:cNvSpPr/>
-          <p:nvPr/>
-        </p:nvSpPr>
-        <p:spPr>
-          <a:xfrm>
-            <a:off x="1371600" y="914400"/>
-            <a:ext cx="91440" cy="3200400"/>
-          </a:xfrm>
-          <a:prstGeom prst="rect">
-            <a:avLst/>
-          </a:prstGeom>
-          <a:solidFill>
-            <a:srgbClr val="2A9D8F"/>
-          </a:solidFill>
-          <a:ln/>
-        </p:spPr>
-      </p:sp>
-      <p:sp>
-        <p:nvSpPr>
-          <p:cNvPr id="6" name="Text 4"/>
-          <p:cNvSpPr/>
-          <p:nvPr/>
-        </p:nvSpPr>
-        <p:spPr>
-          <a:xfrm>
-            <a:off x="1828800" y="1097280"/>
-            <a:ext cx="5669280" cy="640080"/>
+              <a:t>INQUIRY</a:t>
+            </a:r>
+            <a:endParaRPr lang="en-US" sz="1200" dirty="0"/>
+          </a:p>
+        </p:txBody>
+      </p:sp>
+      <p:sp>
+        <p:nvSpPr>
+          <p:cNvPr id="5" name="Text 3"/>
+          <p:cNvSpPr/>
+          <p:nvPr/>
+        </p:nvSpPr>
+        <p:spPr>
+          <a:xfrm>
+            <a:off x="731520" y="1005840"/>
+            <a:ext cx="6858000" cy="1463040"/>
           </a:xfrm>
           <a:prstGeom prst="rect">
             <a:avLst/>
@@ -1551,37 +1758,37 @@
           <a:ln/>
         </p:spPr>
         <p:txBody>
-          <a:bodyPr wrap="square" rtlCol="0" anchor="ctr"/>
+          <a:bodyPr wrap="square" rtlCol="0" anchor="t"/>
           <a:lstStyle/>
           <a:p>
             <a:pPr indent="0" marL="0">
               <a:buNone/>
             </a:pPr>
             <a:r>
-              <a:rPr lang="en-US" sz="2400" b="1" dirty="0">
-                <a:solidFill>
-                  <a:srgbClr val="1B2A4A"/>
+              <a:rPr lang="en-US" sz="2800" b="1" dirty="0">
+                <a:solidFill>
+                  <a:srgbClr val="FFFFFF"/>
                 </a:solidFill>
                 <a:latin typeface="Georgia" pitchFamily="34" charset="0"/>
                 <a:ea typeface="Georgia" pitchFamily="34" charset="-122"/>
                 <a:cs typeface="Georgia" pitchFamily="34" charset="-120"/>
               </a:rPr>
-              <a:t>Two Steps to Solve</a:t>
-            </a:r>
-            <a:endParaRPr lang="en-US" sz="2400" dirty="0"/>
-          </a:p>
-        </p:txBody>
-      </p:sp>
-      <p:sp>
-        <p:nvSpPr>
-          <p:cNvPr id="7" name="Text 5"/>
-          <p:cNvSpPr/>
-          <p:nvPr/>
-        </p:nvSpPr>
-        <p:spPr>
-          <a:xfrm>
-            <a:off x="1828800" y="1828800"/>
-            <a:ext cx="5669280" cy="2011680"/>
+              <a:t>You spent ¥47 on lunch: a bowl of duck blood noodle soup for ¥20 and 3 baozi. How much was each baozi?</a:t>
+            </a:r>
+            <a:endParaRPr lang="en-US" sz="2800" dirty="0"/>
+          </a:p>
+        </p:txBody>
+      </p:sp>
+      <p:sp>
+        <p:nvSpPr>
+          <p:cNvPr id="6" name="Text 4"/>
+          <p:cNvSpPr/>
+          <p:nvPr/>
+        </p:nvSpPr>
+        <p:spPr>
+          <a:xfrm>
+            <a:off x="731520" y="2560320"/>
+            <a:ext cx="6858000" cy="548640"/>
           </a:xfrm>
           <a:prstGeom prst="rect">
             <a:avLst/>
@@ -1590,27 +1797,168 @@
           <a:ln/>
         </p:spPr>
         <p:txBody>
-          <a:bodyPr wrap="square" rtlCol="0" anchor="t"/>
+          <a:bodyPr wrap="square" rtlCol="0" anchor="ctr"/>
           <a:lstStyle/>
           <a:p>
             <a:pPr indent="0" marL="0">
-              <a:lnSpc>
-                <a:spcPct val="130000"/>
-              </a:lnSpc>
               <a:buNone/>
             </a:pPr>
             <a:r>
-              <a:rPr lang="en-US" sz="1500" dirty="0">
-                <a:solidFill>
-                  <a:srgbClr val="3D3A36"/>
+              <a:rPr lang="en-US" sz="1400" i="1" dirty="0">
+                <a:solidFill>
+                  <a:srgbClr val="9B9690"/>
                 </a:solidFill>
                 <a:latin typeface="Calibri" pitchFamily="34" charset="0"/>
                 <a:ea typeface="Calibri" pitchFamily="34" charset="-122"/>
                 <a:cs typeface="Calibri" pitchFamily="34" charset="-120"/>
               </a:rPr>
-              <a:t>A two-step equation needs two inverse operations to solve. Example: 2x + 5 = 13. Step 1: undo the +5 (subtract 5 from both sides) → 2x = 8. Step 2: undo the ×2 (divide both sides by 2) → x = 4. Always undo addition/subtraction FIRST, then multiplication/division.</a:t>
-            </a:r>
-            <a:endParaRPr lang="en-US" sz="1500" dirty="0"/>
+              <a:t>This needs TWO steps: first deal with the soup, then divide by the number of baozi.</a:t>
+            </a:r>
+            <a:endParaRPr lang="en-US" sz="1400" dirty="0"/>
+          </a:p>
+        </p:txBody>
+      </p:sp>
+      <p:sp>
+        <p:nvSpPr>
+          <p:cNvPr id="7" name="Shape 5"/>
+          <p:cNvSpPr/>
+          <p:nvPr/>
+        </p:nvSpPr>
+        <p:spPr>
+          <a:xfrm>
+            <a:off x="548640" y="3200400"/>
+            <a:ext cx="7315200" cy="1645920"/>
+          </a:xfrm>
+          <a:prstGeom prst="rect">
+            <a:avLst/>
+          </a:prstGeom>
+          <a:solidFill>
+            <a:srgbClr val="243660"/>
+          </a:solidFill>
+          <a:ln/>
+        </p:spPr>
+      </p:sp>
+      <p:sp>
+        <p:nvSpPr>
+          <p:cNvPr id="8" name="Text 6"/>
+          <p:cNvSpPr/>
+          <p:nvPr/>
+        </p:nvSpPr>
+        <p:spPr>
+          <a:xfrm>
+            <a:off x="731520" y="3246120"/>
+            <a:ext cx="3657600" cy="320040"/>
+          </a:xfrm>
+          <a:prstGeom prst="rect">
+            <a:avLst/>
+          </a:prstGeom>
+          <a:noFill/>
+          <a:ln/>
+        </p:spPr>
+        <p:txBody>
+          <a:bodyPr wrap="square" rtlCol="0" anchor="ctr"/>
+          <a:lstStyle/>
+          <a:p>
+            <a:pPr indent="0" marL="0">
+              <a:buNone/>
+            </a:pPr>
+            <a:r>
+              <a:rPr lang="en-US" sz="1100" b="1" spc="200" kern="0" dirty="0">
+                <a:solidFill>
+                  <a:srgbClr val="2A9D8F"/>
+                </a:solidFill>
+                <a:latin typeface="Calibri" pitchFamily="34" charset="0"/>
+                <a:ea typeface="Calibri" pitchFamily="34" charset="-122"/>
+                <a:cs typeface="Calibri" pitchFamily="34" charset="-120"/>
+              </a:rPr>
+              <a:t>Think — Pair — Share</a:t>
+            </a:r>
+            <a:endParaRPr lang="en-US" sz="1100" dirty="0"/>
+          </a:p>
+        </p:txBody>
+      </p:sp>
+      <p:sp>
+        <p:nvSpPr>
+          <p:cNvPr id="9" name="Text 7"/>
+          <p:cNvSpPr/>
+          <p:nvPr/>
+        </p:nvSpPr>
+        <p:spPr>
+          <a:xfrm>
+            <a:off x="731520" y="3566160"/>
+            <a:ext cx="6949440" cy="1188720"/>
+          </a:xfrm>
+          <a:prstGeom prst="rect">
+            <a:avLst/>
+          </a:prstGeom>
+          <a:noFill/>
+          <a:ln/>
+        </p:spPr>
+        <p:txBody>
+          <a:bodyPr wrap="square" rtlCol="0" anchor="ctr"/>
+          <a:lstStyle/>
+          <a:p>
+            <a:pPr marL="342900" indent="-342900">
+              <a:spcAft>
+                <a:spcPts val="600"/>
+              </a:spcAft>
+              <a:buSzPct val="100000"/>
+              <a:buChar char="•"/>
+            </a:pPr>
+            <a:r>
+              <a:rPr lang="en-US" sz="1400" dirty="0">
+                <a:solidFill>
+                  <a:srgbClr val="E5E2DC"/>
+                </a:solidFill>
+                <a:latin typeface="Calibri" pitchFamily="34" charset="0"/>
+                <a:ea typeface="Calibri" pitchFamily="34" charset="-122"/>
+                <a:cs typeface="Calibri" pitchFamily="34" charset="-120"/>
+              </a:rPr>
+              <a:t>Can you write this as an equation? (20 + 3b = 47)</a:t>
+            </a:r>
+            <a:endParaRPr lang="en-US" sz="1400" dirty="0"/>
+          </a:p>
+          <a:p>
+            <a:pPr marL="342900" indent="-342900">
+              <a:spcAft>
+                <a:spcPts val="600"/>
+              </a:spcAft>
+              <a:buSzPct val="100000"/>
+              <a:buChar char="•"/>
+            </a:pPr>
+            <a:r>
+              <a:rPr lang="en-US" sz="1400" dirty="0">
+                <a:solidFill>
+                  <a:srgbClr val="E5E2DC"/>
+                </a:solidFill>
+                <a:latin typeface="Calibri" pitchFamily="34" charset="0"/>
+                <a:ea typeface="Calibri" pitchFamily="34" charset="-122"/>
+                <a:cs typeface="Calibri" pitchFamily="34" charset="-120"/>
+              </a:rPr>
+              <a:t>Which part do you 'undo' first?</a:t>
+            </a:r>
+            <a:endParaRPr lang="en-US" sz="1400" dirty="0"/>
+          </a:p>
+          <a:p>
+            <a:pPr marL="342900" indent="-342900">
+              <a:spcAft>
+                <a:spcPts val="600"/>
+              </a:spcAft>
+              <a:buSzPct val="100000"/>
+              <a:buChar char="•"/>
+            </a:pPr>
+            <a:r>
+              <a:rPr lang="en-US" sz="1400" dirty="0">
+                <a:solidFill>
+                  <a:srgbClr val="E5E2DC"/>
+                </a:solidFill>
+                <a:latin typeface="Calibri" pitchFamily="34" charset="0"/>
+                <a:ea typeface="Calibri" pitchFamily="34" charset="-122"/>
+                <a:cs typeface="Calibri" pitchFamily="34" charset="-120"/>
+              </a:rPr>
+              <a:t>Why can't you divide by 3 first?</a:t>
+            </a:r>
+            <a:endParaRPr lang="en-US" sz="1400" dirty="0"/>
           </a:p>
         </p:txBody>
       </p:sp>
@@ -1655,7 +2003,27 @@
         <p:spPr>
           <a:xfrm>
             <a:off x="0" y="0"/>
-            <a:ext cx="9144000" cy="54864"/>
+            <a:ext cx="9144000" cy="822960"/>
+          </a:xfrm>
+          <a:prstGeom prst="rect">
+            <a:avLst/>
+          </a:prstGeom>
+          <a:solidFill>
+            <a:srgbClr val="FFFFFF"/>
+          </a:solidFill>
+          <a:ln/>
+        </p:spPr>
+      </p:sp>
+      <p:sp>
+        <p:nvSpPr>
+          <p:cNvPr id="3" name="Shape 1"/>
+          <p:cNvSpPr/>
+          <p:nvPr/>
+        </p:nvSpPr>
+        <p:spPr>
+          <a:xfrm>
+            <a:off x="0" y="795528"/>
+            <a:ext cx="9144000" cy="27432"/>
           </a:xfrm>
           <a:prstGeom prst="rect">
             <a:avLst/>
@@ -1668,14 +2036,14 @@
       </p:sp>
       <p:sp>
         <p:nvSpPr>
-          <p:cNvPr id="3" name="Text 1"/>
-          <p:cNvSpPr/>
-          <p:nvPr/>
-        </p:nvSpPr>
-        <p:spPr>
-          <a:xfrm>
-            <a:off x="7772400" y="4709160"/>
-            <a:ext cx="1097280" cy="320040"/>
+          <p:cNvPr id="4" name="Text 2"/>
+          <p:cNvSpPr/>
+          <p:nvPr/>
+        </p:nvSpPr>
+        <p:spPr>
+          <a:xfrm>
+            <a:off x="640080" y="91440"/>
+            <a:ext cx="7863840" cy="640080"/>
           </a:xfrm>
           <a:prstGeom prst="rect">
             <a:avLst/>
@@ -1684,96 +2052,78 @@
           <a:ln/>
         </p:spPr>
         <p:txBody>
+          <a:bodyPr wrap="square" lIns="0" tIns="0" rIns="0" bIns="0" rtlCol="0" anchor="ctr"/>
+          <a:lstStyle/>
+          <a:p>
+            <a:pPr indent="0" marL="0">
+              <a:buNone/>
+            </a:pPr>
+            <a:r>
+              <a:rPr lang="en-US" sz="2200" b="1" dirty="0">
+                <a:solidFill>
+                  <a:srgbClr val="1B2A4A"/>
+                </a:solidFill>
+                <a:latin typeface="Georgia" pitchFamily="34" charset="0"/>
+                <a:ea typeface="Georgia" pitchFamily="34" charset="-122"/>
+                <a:cs typeface="Georgia" pitchFamily="34" charset="-120"/>
+              </a:rPr>
+              <a:t>Two Steps, Two Inverses</a:t>
+            </a:r>
+            <a:endParaRPr lang="en-US" sz="2200" dirty="0"/>
+          </a:p>
+        </p:txBody>
+      </p:sp>
+      <p:sp>
+        <p:nvSpPr>
+          <p:cNvPr id="5" name="Text 3"/>
+          <p:cNvSpPr/>
+          <p:nvPr/>
+        </p:nvSpPr>
+        <p:spPr>
+          <a:xfrm>
+            <a:off x="640080" y="1005840"/>
+            <a:ext cx="7863840" cy="2926080"/>
+          </a:xfrm>
+          <a:prstGeom prst="rect">
+            <a:avLst/>
+          </a:prstGeom>
+          <a:noFill/>
+          <a:ln/>
+        </p:spPr>
+        <p:txBody>
           <a:bodyPr wrap="square" rtlCol="0" anchor="ctr"/>
           <a:lstStyle/>
           <a:p>
-            <a:pPr algn="r" indent="0" marL="0">
-              <a:buNone/>
-            </a:pPr>
-            <a:r>
-              <a:rPr lang="en-US" sz="900" dirty="0">
-                <a:solidFill>
-                  <a:srgbClr val="6B6660"/>
+            <a:pPr marL="342900" indent="-342900">
+              <a:spcAft>
+                <a:spcPts val="800"/>
+              </a:spcAft>
+              <a:buSzPct val="100000"/>
+              <a:buChar char="•"/>
+            </a:pPr>
+            <a:r>
+              <a:rPr lang="en-US" sz="1600" dirty="0">
+                <a:solidFill>
+                  <a:srgbClr val="3D3A36"/>
                 </a:solidFill>
                 <a:latin typeface="Calibri" pitchFamily="34" charset="0"/>
                 <a:ea typeface="Calibri" pitchFamily="34" charset="-122"/>
                 <a:cs typeface="Calibri" pitchFamily="34" charset="-120"/>
               </a:rPr>
-              <a:t>3 / 5</a:t>
-            </a:r>
-            <a:endParaRPr lang="en-US" sz="900" dirty="0"/>
-          </a:p>
-        </p:txBody>
-      </p:sp>
-      <p:sp>
-        <p:nvSpPr>
-          <p:cNvPr id="4" name="Text 2"/>
-          <p:cNvSpPr/>
-          <p:nvPr/>
-        </p:nvSpPr>
-        <p:spPr>
-          <a:xfrm>
-            <a:off x="457200" y="274320"/>
-            <a:ext cx="8229600" cy="640080"/>
-          </a:xfrm>
-          <a:prstGeom prst="rect">
-            <a:avLst/>
-          </a:prstGeom>
-          <a:noFill/>
-          <a:ln/>
-        </p:spPr>
-        <p:txBody>
-          <a:bodyPr wrap="square" rtlCol="0" anchor="ctr"/>
-          <a:lstStyle/>
-          <a:p>
-            <a:pPr indent="0" marL="0">
-              <a:buNone/>
-            </a:pPr>
-            <a:r>
-              <a:rPr lang="en-US" sz="2600" b="1" dirty="0">
-                <a:solidFill>
-                  <a:srgbClr val="1B2A4A"/>
-                </a:solidFill>
-                <a:latin typeface="Georgia" pitchFamily="34" charset="0"/>
-                <a:ea typeface="Georgia" pitchFamily="34" charset="-122"/>
-                <a:cs typeface="Georgia" pitchFamily="34" charset="-120"/>
-              </a:rPr>
-              <a:t>Worked Examples</a:t>
-            </a:r>
-            <a:endParaRPr lang="en-US" sz="2600" dirty="0"/>
-          </a:p>
-        </p:txBody>
-      </p:sp>
-      <p:sp>
-        <p:nvSpPr>
-          <p:cNvPr id="5" name="Text 3"/>
-          <p:cNvSpPr/>
-          <p:nvPr/>
-        </p:nvSpPr>
-        <p:spPr>
-          <a:xfrm>
-            <a:off x="457200" y="1188720"/>
-            <a:ext cx="3840480" cy="3474720"/>
-          </a:xfrm>
-          <a:prstGeom prst="rect">
-            <a:avLst/>
-          </a:prstGeom>
-          <a:noFill/>
-          <a:ln/>
-        </p:spPr>
-        <p:txBody>
-          <a:bodyPr wrap="square" rtlCol="0" anchor="t"/>
-          <a:lstStyle/>
+              <a:t>Example: 3x + 5 = 20</a:t>
+            </a:r>
+            <a:endParaRPr lang="en-US" sz="1600" dirty="0"/>
+          </a:p>
           <a:p>
             <a:pPr marL="342900" indent="-342900">
               <a:spcAft>
-                <a:spcPts val="600"/>
+                <a:spcPts val="800"/>
               </a:spcAft>
               <a:buSzPct val="100000"/>
               <a:buChar char="•"/>
             </a:pPr>
             <a:r>
-              <a:rPr lang="en-US" sz="1400" dirty="0">
+              <a:rPr lang="en-US" sz="1600" dirty="0">
                 <a:solidFill>
                   <a:srgbClr val="3D3A36"/>
                 </a:solidFill>
@@ -1781,20 +2131,20 @@
                 <a:ea typeface="Calibri" pitchFamily="34" charset="-122"/>
                 <a:cs typeface="Calibri" pitchFamily="34" charset="-120"/>
               </a:rPr>
-              <a:t>3x + 4 = 19 → subtract 4 → 3x = 15 → divide by 3 → x = 5</a:t>
-            </a:r>
-            <a:endParaRPr lang="en-US" sz="1400" dirty="0"/>
+              <a:t>Step 1: Undo the +5 → 3x = 15</a:t>
+            </a:r>
+            <a:endParaRPr lang="en-US" sz="1600" dirty="0"/>
           </a:p>
           <a:p>
             <a:pPr marL="342900" indent="-342900">
               <a:spcAft>
-                <a:spcPts val="600"/>
+                <a:spcPts val="800"/>
               </a:spcAft>
               <a:buSzPct val="100000"/>
               <a:buChar char="•"/>
             </a:pPr>
             <a:r>
-              <a:rPr lang="en-US" sz="1400" dirty="0">
+              <a:rPr lang="en-US" sz="1600" dirty="0">
                 <a:solidFill>
                   <a:srgbClr val="3D3A36"/>
                 </a:solidFill>
@@ -1802,20 +2152,20 @@
                 <a:ea typeface="Calibri" pitchFamily="34" charset="-122"/>
                 <a:cs typeface="Calibri" pitchFamily="34" charset="-120"/>
               </a:rPr>
-              <a:t>5x − 2 = 23 → add 2 → 5x = 25 → divide by 5 → x = 5</a:t>
-            </a:r>
-            <a:endParaRPr lang="en-US" sz="1400" dirty="0"/>
+              <a:t>Step 2: Undo the ×3 → x = 5</a:t>
+            </a:r>
+            <a:endParaRPr lang="en-US" sz="1600" dirty="0"/>
           </a:p>
           <a:p>
             <a:pPr marL="342900" indent="-342900">
               <a:spcAft>
-                <a:spcPts val="600"/>
+                <a:spcPts val="800"/>
               </a:spcAft>
               <a:buSzPct val="100000"/>
               <a:buChar char="•"/>
             </a:pPr>
             <a:r>
-              <a:rPr lang="en-US" sz="1400" dirty="0">
+              <a:rPr lang="en-US" sz="1600" dirty="0">
                 <a:solidFill>
                   <a:srgbClr val="3D3A36"/>
                 </a:solidFill>
@@ -1823,20 +2173,20 @@
                 <a:ea typeface="Calibri" pitchFamily="34" charset="-122"/>
                 <a:cs typeface="Calibri" pitchFamily="34" charset="-120"/>
               </a:rPr>
-              <a:t>x/4 + 3 = 7 → subtract 3 → x/4 = 4 → multiply by 4 → x = 16</a:t>
-            </a:r>
-            <a:endParaRPr lang="en-US" sz="1400" dirty="0"/>
+              <a:t>Rule: deal with + or − FIRST, then × or ÷</a:t>
+            </a:r>
+            <a:endParaRPr lang="en-US" sz="1600" dirty="0"/>
           </a:p>
           <a:p>
             <a:pPr marL="342900" indent="-342900">
               <a:spcAft>
-                <a:spcPts val="600"/>
+                <a:spcPts val="800"/>
               </a:spcAft>
               <a:buSzPct val="100000"/>
               <a:buChar char="•"/>
             </a:pPr>
             <a:r>
-              <a:rPr lang="en-US" sz="1400" dirty="0">
+              <a:rPr lang="en-US" sz="1600" dirty="0">
                 <a:solidFill>
                   <a:srgbClr val="3D3A36"/>
                 </a:solidFill>
@@ -1844,20 +2194,85 @@
                 <a:ea typeface="Calibri" pitchFamily="34" charset="-122"/>
                 <a:cs typeface="Calibri" pitchFamily="34" charset="-120"/>
               </a:rPr>
-              <a:t>2(x + 3) = 14 → divide by 2 → x + 3 = 7 → subtract 3 → x = 4</a:t>
-            </a:r>
-            <a:endParaRPr lang="en-US" sz="1400" dirty="0"/>
-          </a:p>
-          <a:p>
-            <a:pPr marL="342900" indent="-342900">
-              <a:spcAft>
-                <a:spcPts val="600"/>
-              </a:spcAft>
-              <a:buSzPct val="100000"/>
-              <a:buChar char="•"/>
-            </a:pPr>
-            <a:r>
-              <a:rPr lang="en-US" sz="1400" dirty="0">
+              <a:t>Think of it as reverse BIDMAS!</a:t>
+            </a:r>
+            <a:endParaRPr lang="en-US" sz="1600" dirty="0"/>
+          </a:p>
+        </p:txBody>
+      </p:sp>
+      <p:sp>
+        <p:nvSpPr>
+          <p:cNvPr id="6" name="Shape 4"/>
+          <p:cNvSpPr/>
+          <p:nvPr/>
+        </p:nvSpPr>
+        <p:spPr>
+          <a:xfrm>
+            <a:off x="640080" y="4114800"/>
+            <a:ext cx="7863840" cy="731520"/>
+          </a:xfrm>
+          <a:prstGeom prst="rect">
+            <a:avLst/>
+          </a:prstGeom>
+          <a:solidFill>
+            <a:srgbClr val="E8F5F3"/>
+          </a:solidFill>
+          <a:ln/>
+          <a:effectLst>
+            <a:outerShdw sx="100000" sy="100000" kx="0" ky="0" algn="bl" rotWithShape="0" blurRad="76200" dist="25400" dir="8100000">
+              <a:srgbClr val="000000">
+                <a:alpha val="12000"/>
+              </a:srgbClr>
+            </a:outerShdw>
+          </a:effectLst>
+        </p:spPr>
+      </p:sp>
+      <p:sp>
+        <p:nvSpPr>
+          <p:cNvPr id="7" name="Shape 5"/>
+          <p:cNvSpPr/>
+          <p:nvPr/>
+        </p:nvSpPr>
+        <p:spPr>
+          <a:xfrm>
+            <a:off x="640080" y="4114800"/>
+            <a:ext cx="64008" cy="731520"/>
+          </a:xfrm>
+          <a:prstGeom prst="rect">
+            <a:avLst/>
+          </a:prstGeom>
+          <a:solidFill>
+            <a:srgbClr val="2A9D8F"/>
+          </a:solidFill>
+          <a:ln/>
+        </p:spPr>
+      </p:sp>
+      <p:sp>
+        <p:nvSpPr>
+          <p:cNvPr id="8" name="Text 6"/>
+          <p:cNvSpPr/>
+          <p:nvPr/>
+        </p:nvSpPr>
+        <p:spPr>
+          <a:xfrm>
+            <a:off x="914400" y="4160520"/>
+            <a:ext cx="7406640" cy="640080"/>
+          </a:xfrm>
+          <a:prstGeom prst="rect">
+            <a:avLst/>
+          </a:prstGeom>
+          <a:noFill/>
+          <a:ln/>
+        </p:spPr>
+        <p:txBody>
+          <a:bodyPr wrap="square" rtlCol="0" anchor="ctr"/>
+          <a:lstStyle/>
+          <a:p>
+            <a:pPr indent="0" marL="0">
+              <a:buNone/>
+            </a:pPr>
+            <a:r>
+              <a:rPr lang="en-US" sz="1300" i="1" dirty="0">
                 <a:solidFill>
                   <a:srgbClr val="3D3A36"/>
                 </a:solidFill>
@@ -1865,232 +2280,9 @@
                 <a:ea typeface="Calibri" pitchFamily="34" charset="-122"/>
                 <a:cs typeface="Calibri" pitchFamily="34" charset="-120"/>
               </a:rPr>
-              <a:t>Check each: substitute x back into the original equation</a:t>
-            </a:r>
-            <a:endParaRPr lang="en-US" sz="1400" dirty="0"/>
-          </a:p>
-        </p:txBody>
-      </p:sp>
-      <p:sp>
-        <p:nvSpPr>
-          <p:cNvPr id="6" name="Shape 4"/>
-          <p:cNvSpPr/>
-          <p:nvPr/>
-        </p:nvSpPr>
-        <p:spPr>
-          <a:xfrm>
-            <a:off x="4846320" y="1188720"/>
-            <a:ext cx="3840480" cy="3474720"/>
-          </a:xfrm>
-          <a:prstGeom prst="rect">
-            <a:avLst/>
-          </a:prstGeom>
-          <a:solidFill>
-            <a:srgbClr val="FFFFFF"/>
-          </a:solidFill>
-          <a:ln w="12700">
-            <a:solidFill>
-              <a:srgbClr val="E5E2DC"/>
-            </a:solidFill>
-            <a:prstDash val="solid"/>
-          </a:ln>
-          <a:effectLst>
-            <a:outerShdw sx="100000" sy="100000" kx="0" ky="0" algn="bl" rotWithShape="0" blurRad="50800" dist="25400" dir="8100000">
-              <a:srgbClr val="000000">
-                <a:alpha val="10000"/>
-              </a:srgbClr>
-            </a:outerShdw>
-          </a:effectLst>
-        </p:spPr>
-      </p:sp>
-      <p:sp>
-        <p:nvSpPr>
-          <p:cNvPr id="7" name="Shape 5"/>
-          <p:cNvSpPr/>
-          <p:nvPr/>
-        </p:nvSpPr>
-        <p:spPr>
-          <a:xfrm>
-            <a:off x="4846320" y="1188720"/>
-            <a:ext cx="3840480" cy="54864"/>
-          </a:xfrm>
-          <a:prstGeom prst="rect">
-            <a:avLst/>
-          </a:prstGeom>
-          <a:solidFill>
-            <a:srgbClr val="2A9D8F"/>
-          </a:solidFill>
-          <a:ln/>
-        </p:spPr>
-      </p:sp>
-      <p:sp>
-        <p:nvSpPr>
-          <p:cNvPr id="8" name="Text 6"/>
-          <p:cNvSpPr/>
-          <p:nvPr/>
-        </p:nvSpPr>
-        <p:spPr>
-          <a:xfrm>
-            <a:off x="5120640" y="1371600"/>
-            <a:ext cx="3291840" cy="3108960"/>
-          </a:xfrm>
-          <a:prstGeom prst="rect">
-            <a:avLst/>
-          </a:prstGeom>
-          <a:noFill/>
-          <a:ln/>
-        </p:spPr>
-        <p:txBody>
-          <a:bodyPr wrap="square" rtlCol="0" anchor="t"/>
-          <a:lstStyle/>
-          <a:p>
-            <a:pPr indent="0" marL="0">
-              <a:spcAft>
-                <a:spcPts val="400"/>
-              </a:spcAft>
-              <a:buNone/>
-            </a:pPr>
-            <a:r>
-              <a:rPr lang="en-US" sz="1600" b="1" dirty="0">
-                <a:solidFill>
-                  <a:srgbClr val="1B2A4A"/>
-                </a:solidFill>
-                <a:latin typeface="Calibri" pitchFamily="34" charset="0"/>
-                <a:ea typeface="Calibri" pitchFamily="34" charset="-122"/>
-                <a:cs typeface="Calibri" pitchFamily="34" charset="-120"/>
-              </a:rPr>
-              <a:t>Order of Operations (Reversed!)</a:t>
-            </a:r>
-            <a:endParaRPr lang="en-US" sz="1600" dirty="0"/>
-          </a:p>
-          <a:p>
-            <a:pPr indent="0" marL="0">
-              <a:spcAft>
-                <a:spcPts val="400"/>
-              </a:spcAft>
-              <a:buNone/>
-            </a:pPr>
-            <a:endParaRPr lang="en-US" sz="1600" dirty="0"/>
-          </a:p>
-          <a:p>
-            <a:pPr indent="0" marL="0">
-              <a:spcAft>
-                <a:spcPts val="400"/>
-              </a:spcAft>
-              <a:buNone/>
-            </a:pPr>
-            <a:r>
-              <a:rPr lang="en-US" sz="1300" dirty="0">
-                <a:solidFill>
-                  <a:srgbClr val="3D3A36"/>
-                </a:solidFill>
-                <a:latin typeface="Calibri" pitchFamily="34" charset="0"/>
-                <a:ea typeface="Calibri" pitchFamily="34" charset="-122"/>
-                <a:cs typeface="Calibri" pitchFamily="34" charset="-120"/>
-              </a:rPr>
-              <a:t>When SOLVING, you reverse BIDMAS</a:t>
-            </a:r>
-            <a:endParaRPr lang="en-US" sz="1600" dirty="0"/>
-          </a:p>
-          <a:p>
-            <a:pPr indent="0" marL="0">
-              <a:spcAft>
-                <a:spcPts val="400"/>
-              </a:spcAft>
-              <a:buNone/>
-            </a:pPr>
-            <a:r>
-              <a:rPr lang="en-US" sz="1300" dirty="0">
-                <a:solidFill>
-                  <a:srgbClr val="3D3A36"/>
-                </a:solidFill>
-                <a:latin typeface="Calibri" pitchFamily="34" charset="0"/>
-                <a:ea typeface="Calibri" pitchFamily="34" charset="-122"/>
-                <a:cs typeface="Calibri" pitchFamily="34" charset="-120"/>
-              </a:rPr>
-              <a:t>Undo addition/subtraction FIRST</a:t>
-            </a:r>
-            <a:endParaRPr lang="en-US" sz="1600" dirty="0"/>
-          </a:p>
-          <a:p>
-            <a:pPr indent="0" marL="0">
-              <a:spcAft>
-                <a:spcPts val="400"/>
-              </a:spcAft>
-              <a:buNone/>
-            </a:pPr>
-            <a:r>
-              <a:rPr lang="en-US" sz="1300" dirty="0">
-                <a:solidFill>
-                  <a:srgbClr val="3D3A36"/>
-                </a:solidFill>
-                <a:latin typeface="Calibri" pitchFamily="34" charset="0"/>
-                <a:ea typeface="Calibri" pitchFamily="34" charset="-122"/>
-                <a:cs typeface="Calibri" pitchFamily="34" charset="-120"/>
-              </a:rPr>
-              <a:t>Then undo multiplication/division</a:t>
-            </a:r>
-            <a:endParaRPr lang="en-US" sz="1600" dirty="0"/>
-          </a:p>
-          <a:p>
-            <a:pPr indent="0" marL="0">
-              <a:spcAft>
-                <a:spcPts val="400"/>
-              </a:spcAft>
-              <a:buNone/>
-            </a:pPr>
-            <a:r>
-              <a:rPr lang="en-US" sz="1300" dirty="0">
-                <a:solidFill>
-                  <a:srgbClr val="3D3A36"/>
-                </a:solidFill>
-                <a:latin typeface="Calibri" pitchFamily="34" charset="0"/>
-                <a:ea typeface="Calibri" pitchFamily="34" charset="-122"/>
-                <a:cs typeface="Calibri" pitchFamily="34" charset="-120"/>
-              </a:rPr>
-              <a:t>Then undo indices/brackets</a:t>
-            </a:r>
-            <a:endParaRPr lang="en-US" sz="1600" dirty="0"/>
-          </a:p>
-          <a:p>
-            <a:pPr indent="0" marL="0">
-              <a:spcAft>
-                <a:spcPts val="400"/>
-              </a:spcAft>
-              <a:buNone/>
-            </a:pPr>
-            <a:r>
-              <a:rPr lang="en-US" sz="1300" dirty="0">
-                <a:solidFill>
-                  <a:srgbClr val="3D3A36"/>
-                </a:solidFill>
-                <a:latin typeface="Calibri" pitchFamily="34" charset="0"/>
-                <a:ea typeface="Calibri" pitchFamily="34" charset="-122"/>
-                <a:cs typeface="Calibri" pitchFamily="34" charset="-120"/>
-              </a:rPr>
-              <a:t>This is the OPPOSITE of the order for calculating</a:t>
-            </a:r>
-            <a:endParaRPr lang="en-US" sz="1600" dirty="0"/>
-          </a:p>
-          <a:p>
-            <a:pPr indent="0" marL="0">
-              <a:spcAft>
-                <a:spcPts val="400"/>
-              </a:spcAft>
-              <a:buNone/>
-            </a:pPr>
-            <a:r>
-              <a:rPr lang="en-US" sz="1300" dirty="0">
-                <a:solidFill>
-                  <a:srgbClr val="3D3A36"/>
-                </a:solidFill>
-                <a:latin typeface="Calibri" pitchFamily="34" charset="0"/>
-                <a:ea typeface="Calibri" pitchFamily="34" charset="-122"/>
-                <a:cs typeface="Calibri" pitchFamily="34" charset="-120"/>
-              </a:rPr>
-              <a:t>Think: 'unwrap' the equation from the outside in</a:t>
-            </a:r>
-            <a:endParaRPr lang="en-US" sz="1600" dirty="0"/>
+              <a:t>Baozi problem: 20 + 3b = 47 → 3b = 27 → b = 9. Each baozi costs ¥9.</a:t>
+            </a:r>
+            <a:endParaRPr lang="en-US" sz="1300" dirty="0"/>
           </a:p>
         </p:txBody>
       </p:sp>
@@ -2135,7 +2327,27 @@
         <p:spPr>
           <a:xfrm>
             <a:off x="0" y="0"/>
-            <a:ext cx="9144000" cy="54864"/>
+            <a:ext cx="9144000" cy="822960"/>
+          </a:xfrm>
+          <a:prstGeom prst="rect">
+            <a:avLst/>
+          </a:prstGeom>
+          <a:solidFill>
+            <a:srgbClr val="FFFFFF"/>
+          </a:solidFill>
+          <a:ln/>
+        </p:spPr>
+      </p:sp>
+      <p:sp>
+        <p:nvSpPr>
+          <p:cNvPr id="3" name="Shape 1"/>
+          <p:cNvSpPr/>
+          <p:nvPr/>
+        </p:nvSpPr>
+        <p:spPr>
+          <a:xfrm>
+            <a:off x="0" y="795528"/>
+            <a:ext cx="9144000" cy="27432"/>
           </a:xfrm>
           <a:prstGeom prst="rect">
             <a:avLst/>
@@ -2148,14 +2360,14 @@
       </p:sp>
       <p:sp>
         <p:nvSpPr>
-          <p:cNvPr id="3" name="Text 1"/>
-          <p:cNvSpPr/>
-          <p:nvPr/>
-        </p:nvSpPr>
-        <p:spPr>
-          <a:xfrm>
-            <a:off x="7772400" y="4709160"/>
-            <a:ext cx="1097280" cy="320040"/>
+          <p:cNvPr id="4" name="Text 2"/>
+          <p:cNvSpPr/>
+          <p:nvPr/>
+        </p:nvSpPr>
+        <p:spPr>
+          <a:xfrm>
+            <a:off x="640080" y="91440"/>
+            <a:ext cx="7863840" cy="640080"/>
           </a:xfrm>
           <a:prstGeom prst="rect">
             <a:avLst/>
@@ -2164,53 +2376,14 @@
           <a:ln/>
         </p:spPr>
         <p:txBody>
-          <a:bodyPr wrap="square" rtlCol="0" anchor="ctr"/>
-          <a:lstStyle/>
-          <a:p>
-            <a:pPr algn="r" indent="0" marL="0">
-              <a:buNone/>
-            </a:pPr>
-            <a:r>
-              <a:rPr lang="en-US" sz="900" dirty="0">
-                <a:solidFill>
-                  <a:srgbClr val="6B6660"/>
-                </a:solidFill>
-                <a:latin typeface="Calibri" pitchFamily="34" charset="0"/>
-                <a:ea typeface="Calibri" pitchFamily="34" charset="-122"/>
-                <a:cs typeface="Calibri" pitchFamily="34" charset="-120"/>
-              </a:rPr>
-              <a:t>4 / 5</a:t>
-            </a:r>
-            <a:endParaRPr lang="en-US" sz="900" dirty="0"/>
-          </a:p>
-        </p:txBody>
-      </p:sp>
-      <p:sp>
-        <p:nvSpPr>
-          <p:cNvPr id="4" name="Text 2"/>
-          <p:cNvSpPr/>
-          <p:nvPr/>
-        </p:nvSpPr>
-        <p:spPr>
-          <a:xfrm>
-            <a:off x="457200" y="274320"/>
-            <a:ext cx="8229600" cy="640080"/>
-          </a:xfrm>
-          <a:prstGeom prst="rect">
-            <a:avLst/>
-          </a:prstGeom>
-          <a:noFill/>
-          <a:ln/>
-        </p:spPr>
-        <p:txBody>
-          <a:bodyPr wrap="square" rtlCol="0" anchor="ctr"/>
+          <a:bodyPr wrap="square" lIns="0" tIns="0" rIns="0" bIns="0" rtlCol="0" anchor="ctr"/>
           <a:lstStyle/>
           <a:p>
             <a:pPr indent="0" marL="0">
               <a:buNone/>
             </a:pPr>
             <a:r>
-              <a:rPr lang="en-US" sz="2600" b="1" dirty="0">
+              <a:rPr lang="en-US" sz="2200" b="1" dirty="0">
                 <a:solidFill>
                   <a:srgbClr val="1B2A4A"/>
                 </a:solidFill>
@@ -2218,9 +2391,9 @@
                 <a:ea typeface="Georgia" pitchFamily="34" charset="-122"/>
                 <a:cs typeface="Georgia" pitchFamily="34" charset="-120"/>
               </a:rPr>
-              <a:t>Practice</a:t>
-            </a:r>
-            <a:endParaRPr lang="en-US" sz="2600" dirty="0"/>
+              <a:t>Worked Examples</a:t>
+            </a:r>
+            <a:endParaRPr lang="en-US" sz="2200" dirty="0"/>
           </a:p>
         </p:txBody>
       </p:sp>
@@ -2232,8 +2405,8 @@
         </p:nvSpPr>
         <p:spPr>
           <a:xfrm>
-            <a:off x="457200" y="1097280"/>
-            <a:ext cx="8229600" cy="3657600"/>
+            <a:off x="640080" y="1005840"/>
+            <a:ext cx="7863840" cy="2926080"/>
           </a:xfrm>
           <a:prstGeom prst="rect">
             <a:avLst/>
@@ -2242,7 +2415,7 @@
           <a:ln/>
         </p:spPr>
         <p:txBody>
-          <a:bodyPr wrap="square" rtlCol="0" anchor="t"/>
+          <a:bodyPr wrap="square" rtlCol="0" anchor="ctr"/>
           <a:lstStyle/>
           <a:p>
             <a:pPr marL="342900" indent="-342900">
@@ -2253,7 +2426,7 @@
               <a:buChar char="•"/>
             </a:pPr>
             <a:r>
-              <a:rPr lang="en-US" sz="1400" dirty="0">
+              <a:rPr lang="en-US" sz="1600" dirty="0">
                 <a:solidFill>
                   <a:srgbClr val="3D3A36"/>
                 </a:solidFill>
@@ -2261,9 +2434,9 @@
                 <a:ea typeface="Calibri" pitchFamily="34" charset="-122"/>
                 <a:cs typeface="Calibri" pitchFamily="34" charset="-120"/>
               </a:rPr>
-              <a:t>4x + 7 = 31 → 4x = 24 → x = 6. Check: 4(6)+7 = 31 ✓</a:t>
-            </a:r>
-            <a:endParaRPr lang="en-US" sz="1400" dirty="0"/>
+              <a:t>4y − 7 = 13 → 4y = 20 → y = 5</a:t>
+            </a:r>
+            <a:endParaRPr lang="en-US" sz="1600" dirty="0"/>
           </a:p>
           <a:p>
             <a:pPr marL="342900" indent="-342900">
@@ -2274,7 +2447,7 @@
               <a:buChar char="•"/>
             </a:pPr>
             <a:r>
-              <a:rPr lang="en-US" sz="1400" dirty="0">
+              <a:rPr lang="en-US" sz="1600" dirty="0">
                 <a:solidFill>
                   <a:srgbClr val="3D3A36"/>
                 </a:solidFill>
@@ -2282,9 +2455,9 @@
                 <a:ea typeface="Calibri" pitchFamily="34" charset="-122"/>
                 <a:cs typeface="Calibri" pitchFamily="34" charset="-120"/>
               </a:rPr>
-              <a:t>2x − 9 = 1 → 2x = 10 → x = 5. Check: 2(5)−9 = 1 ✓</a:t>
-            </a:r>
-            <a:endParaRPr lang="en-US" sz="1400" dirty="0"/>
+              <a:t>(x + 3) ÷ 2 = 8 → x + 3 = 16 → x = 13</a:t>
+            </a:r>
+            <a:endParaRPr lang="en-US" sz="1600" dirty="0"/>
           </a:p>
           <a:p>
             <a:pPr marL="342900" indent="-342900">
@@ -2295,7 +2468,7 @@
               <a:buChar char="•"/>
             </a:pPr>
             <a:r>
-              <a:rPr lang="en-US" sz="1400" dirty="0">
+              <a:rPr lang="en-US" sz="1600" dirty="0">
                 <a:solidFill>
                   <a:srgbClr val="3D3A36"/>
                 </a:solidFill>
@@ -2303,9 +2476,9 @@
                 <a:ea typeface="Calibri" pitchFamily="34" charset="-122"/>
                 <a:cs typeface="Calibri" pitchFamily="34" charset="-120"/>
               </a:rPr>
-              <a:t>x/3 + 5 = 8 → x/3 = 3 → x = 9. Check: 9/3+5 = 8 ✓</a:t>
-            </a:r>
-            <a:endParaRPr lang="en-US" sz="1400" dirty="0"/>
+              <a:t>2n + 10 = 30 → 2n = 20 → n = 10</a:t>
+            </a:r>
+            <a:endParaRPr lang="en-US" sz="1600" dirty="0"/>
           </a:p>
           <a:p>
             <a:pPr marL="342900" indent="-342900">
@@ -2316,7 +2489,7 @@
               <a:buChar char="•"/>
             </a:pPr>
             <a:r>
-              <a:rPr lang="en-US" sz="1400" dirty="0">
+              <a:rPr lang="en-US" sz="1600" dirty="0">
                 <a:solidFill>
                   <a:srgbClr val="3D3A36"/>
                 </a:solidFill>
@@ -2324,30 +2497,9 @@
                 <a:ea typeface="Calibri" pitchFamily="34" charset="-122"/>
                 <a:cs typeface="Calibri" pitchFamily="34" charset="-120"/>
               </a:rPr>
-              <a:t>3(x − 2) = 15 → x − 2 = 5 → x = 7. Check: 3(7−2) = 15 ✓</a:t>
-            </a:r>
-            <a:endParaRPr lang="en-US" sz="1400" dirty="0"/>
-          </a:p>
-          <a:p>
-            <a:pPr marL="342900" indent="-342900">
-              <a:spcAft>
-                <a:spcPts val="800"/>
-              </a:spcAft>
-              <a:buSzPct val="100000"/>
-              <a:buChar char="•"/>
-            </a:pPr>
-            <a:r>
-              <a:rPr lang="en-US" sz="1400" dirty="0">
-                <a:solidFill>
-                  <a:srgbClr val="3D3A36"/>
-                </a:solidFill>
-                <a:latin typeface="Calibri" pitchFamily="34" charset="0"/>
-                <a:ea typeface="Calibri" pitchFamily="34" charset="-122"/>
-                <a:cs typeface="Calibri" pitchFamily="34" charset="-120"/>
-              </a:rPr>
-              <a:t>Always show your working — write each step on a new line</a:t>
-            </a:r>
-            <a:endParaRPr lang="en-US" sz="1400" dirty="0"/>
+              <a:t>Always check: 2(10) + 10 = 30 ✓</a:t>
+            </a:r>
+            <a:endParaRPr lang="en-US" sz="1600" dirty="0"/>
           </a:p>
         </p:txBody>
       </p:sp>
@@ -2365,7 +2517,7 @@
     <p:bg>
       <p:bgPr>
         <a:solidFill>
-          <a:srgbClr val="1B2A4A"/>
+          <a:srgbClr val="FAF8F5"/>
         </a:solidFill>
       </p:bgPr>
     </p:bg>
@@ -2392,27 +2544,47 @@
         <p:spPr>
           <a:xfrm>
             <a:off x="0" y="0"/>
-            <a:ext cx="109728" cy="5143500"/>
-          </a:xfrm>
-          <a:prstGeom prst="rect">
-            <a:avLst/>
-          </a:prstGeom>
-          <a:solidFill>
-            <a:srgbClr val="E9C46A"/>
-          </a:solidFill>
-          <a:ln/>
-        </p:spPr>
-      </p:sp>
-      <p:sp>
-        <p:nvSpPr>
-          <p:cNvPr id="3" name="Text 1"/>
-          <p:cNvSpPr/>
-          <p:nvPr/>
-        </p:nvSpPr>
-        <p:spPr>
-          <a:xfrm>
-            <a:off x="731520" y="457200"/>
-            <a:ext cx="7772400" cy="731520"/>
+            <a:ext cx="9144000" cy="822960"/>
+          </a:xfrm>
+          <a:prstGeom prst="rect">
+            <a:avLst/>
+          </a:prstGeom>
+          <a:solidFill>
+            <a:srgbClr val="FFFFFF"/>
+          </a:solidFill>
+          <a:ln/>
+        </p:spPr>
+      </p:sp>
+      <p:sp>
+        <p:nvSpPr>
+          <p:cNvPr id="3" name="Shape 1"/>
+          <p:cNvSpPr/>
+          <p:nvPr/>
+        </p:nvSpPr>
+        <p:spPr>
+          <a:xfrm>
+            <a:off x="0" y="795528"/>
+            <a:ext cx="9144000" cy="27432"/>
+          </a:xfrm>
+          <a:prstGeom prst="rect">
+            <a:avLst/>
+          </a:prstGeom>
+          <a:solidFill>
+            <a:srgbClr val="2A9D8F"/>
+          </a:solidFill>
+          <a:ln/>
+        </p:spPr>
+      </p:sp>
+      <p:sp>
+        <p:nvSpPr>
+          <p:cNvPr id="4" name="Text 2"/>
+          <p:cNvSpPr/>
+          <p:nvPr/>
+        </p:nvSpPr>
+        <p:spPr>
+          <a:xfrm>
+            <a:off x="640080" y="91440"/>
+            <a:ext cx="7863840" cy="640080"/>
           </a:xfrm>
           <a:prstGeom prst="rect">
             <a:avLst/>
@@ -2421,37 +2593,84 @@
           <a:ln/>
         </p:spPr>
         <p:txBody>
-          <a:bodyPr wrap="square" rtlCol="0" anchor="ctr"/>
+          <a:bodyPr wrap="square" lIns="0" tIns="0" rIns="0" bIns="0" rtlCol="0" anchor="ctr"/>
           <a:lstStyle/>
           <a:p>
             <a:pPr indent="0" marL="0">
               <a:buNone/>
             </a:pPr>
             <a:r>
-              <a:rPr lang="en-US" sz="3200" b="1" dirty="0">
-                <a:solidFill>
-                  <a:srgbClr val="FFFFFF"/>
+              <a:rPr lang="en-US" sz="2200" b="1" dirty="0">
+                <a:solidFill>
+                  <a:srgbClr val="1B2A4A"/>
                 </a:solidFill>
                 <a:latin typeface="Georgia" pitchFamily="34" charset="0"/>
                 <a:ea typeface="Georgia" pitchFamily="34" charset="-122"/>
                 <a:cs typeface="Georgia" pitchFamily="34" charset="-120"/>
               </a:rPr>
-              <a:t>Key Takeaways</a:t>
-            </a:r>
-            <a:endParaRPr lang="en-US" sz="3200" dirty="0"/>
-          </a:p>
-        </p:txBody>
-      </p:sp>
-      <p:sp>
-        <p:nvSpPr>
-          <p:cNvPr id="4" name="Text 2"/>
-          <p:cNvSpPr/>
-          <p:nvPr/>
-        </p:nvSpPr>
-        <p:spPr>
-          <a:xfrm>
-            <a:off x="731520" y="1463040"/>
-            <a:ext cx="7772400" cy="3200400"/>
+              <a:t>Real-World Two-Step Equations</a:t>
+            </a:r>
+            <a:endParaRPr lang="en-US" sz="2200" dirty="0"/>
+          </a:p>
+        </p:txBody>
+      </p:sp>
+      <p:sp>
+        <p:nvSpPr>
+          <p:cNvPr id="5" name="Shape 3"/>
+          <p:cNvSpPr/>
+          <p:nvPr/>
+        </p:nvSpPr>
+        <p:spPr>
+          <a:xfrm>
+            <a:off x="457200" y="1005840"/>
+            <a:ext cx="3931920" cy="3657600"/>
+          </a:xfrm>
+          <a:prstGeom prst="rect">
+            <a:avLst/>
+          </a:prstGeom>
+          <a:solidFill>
+            <a:srgbClr val="FFFFFF"/>
+          </a:solidFill>
+          <a:ln/>
+          <a:effectLst>
+            <a:outerShdw sx="100000" sy="100000" kx="0" ky="0" algn="bl" rotWithShape="0" blurRad="76200" dist="25400" dir="8100000">
+              <a:srgbClr val="000000">
+                <a:alpha val="12000"/>
+              </a:srgbClr>
+            </a:outerShdw>
+          </a:effectLst>
+        </p:spPr>
+      </p:sp>
+      <p:sp>
+        <p:nvSpPr>
+          <p:cNvPr id="6" name="Shape 4"/>
+          <p:cNvSpPr/>
+          <p:nvPr/>
+        </p:nvSpPr>
+        <p:spPr>
+          <a:xfrm>
+            <a:off x="457200" y="1005840"/>
+            <a:ext cx="3931920" cy="64008"/>
+          </a:xfrm>
+          <a:prstGeom prst="rect">
+            <a:avLst/>
+          </a:prstGeom>
+          <a:solidFill>
+            <a:srgbClr val="2A9D8F"/>
+          </a:solidFill>
+          <a:ln/>
+        </p:spPr>
+      </p:sp>
+      <p:sp>
+        <p:nvSpPr>
+          <p:cNvPr id="7" name="Text 5"/>
+          <p:cNvSpPr/>
+          <p:nvPr/>
+        </p:nvSpPr>
+        <p:spPr>
+          <a:xfrm>
+            <a:off x="640080" y="1188720"/>
+            <a:ext cx="3566160" cy="457200"/>
           </a:xfrm>
           <a:prstGeom prst="rect">
             <a:avLst/>
@@ -2460,151 +2679,1065 @@
           <a:ln/>
         </p:spPr>
         <p:txBody>
-          <a:bodyPr wrap="square" rtlCol="0" anchor="t"/>
+          <a:bodyPr wrap="square" rtlCol="0" anchor="ctr"/>
+          <a:lstStyle/>
+          <a:p>
+            <a:pPr indent="0" marL="0">
+              <a:buNone/>
+            </a:pPr>
+            <a:r>
+              <a:rPr lang="en-US" sz="1600" b="1" dirty="0">
+                <a:solidFill>
+                  <a:srgbClr val="2A9D8F"/>
+                </a:solidFill>
+                <a:latin typeface="Calibri" pitchFamily="34" charset="0"/>
+                <a:ea typeface="Calibri" pitchFamily="34" charset="-122"/>
+                <a:cs typeface="Calibri" pitchFamily="34" charset="-120"/>
+              </a:rPr>
+              <a:t>Food &amp; Transport</a:t>
+            </a:r>
+            <a:endParaRPr lang="en-US" sz="1600" dirty="0"/>
+          </a:p>
+        </p:txBody>
+      </p:sp>
+      <p:sp>
+        <p:nvSpPr>
+          <p:cNvPr id="8" name="Text 6"/>
+          <p:cNvSpPr/>
+          <p:nvPr/>
+        </p:nvSpPr>
+        <p:spPr>
+          <a:xfrm>
+            <a:off x="640080" y="1691640"/>
+            <a:ext cx="3566160" cy="2743200"/>
+          </a:xfrm>
+          <a:prstGeom prst="rect">
+            <a:avLst/>
+          </a:prstGeom>
+          <a:noFill/>
+          <a:ln/>
+        </p:spPr>
+        <p:txBody>
+          <a:bodyPr wrap="square" rtlCol="0" anchor="ctr"/>
           <a:lstStyle/>
           <a:p>
             <a:pPr marL="342900" indent="-342900">
               <a:spcAft>
-                <a:spcPts val="1000"/>
+                <a:spcPts val="600"/>
               </a:spcAft>
               <a:buSzPct val="100000"/>
               <a:buChar char="•"/>
             </a:pPr>
             <a:r>
-              <a:rPr lang="en-US" sz="1500" dirty="0">
-                <a:solidFill>
-                  <a:srgbClr val="CADCFC"/>
+              <a:rPr lang="en-US" sz="1400" dirty="0">
+                <a:solidFill>
+                  <a:srgbClr val="3D3A36"/>
                 </a:solidFill>
                 <a:latin typeface="Calibri" pitchFamily="34" charset="0"/>
                 <a:ea typeface="Calibri" pitchFamily="34" charset="-122"/>
                 <a:cs typeface="Calibri" pitchFamily="34" charset="-120"/>
               </a:rPr>
-              <a:t>Two-step equations need two inverse operations</a:t>
-            </a:r>
-            <a:endParaRPr lang="en-US" sz="1500" dirty="0"/>
+              <a:t>Korean BBQ: 15000p + 5000 = 80000</a:t>
+            </a:r>
+            <a:endParaRPr lang="en-US" sz="1400" dirty="0"/>
           </a:p>
           <a:p>
             <a:pPr marL="342900" indent="-342900">
               <a:spcAft>
-                <a:spcPts val="1000"/>
+                <a:spcPts val="600"/>
               </a:spcAft>
               <a:buSzPct val="100000"/>
               <a:buChar char="•"/>
             </a:pPr>
             <a:r>
-              <a:rPr lang="en-US" sz="1500" dirty="0">
-                <a:solidFill>
-                  <a:srgbClr val="CADCFC"/>
+              <a:rPr lang="en-US" sz="1400" dirty="0">
+                <a:solidFill>
+                  <a:srgbClr val="3D3A36"/>
                 </a:solidFill>
                 <a:latin typeface="Calibri" pitchFamily="34" charset="0"/>
                 <a:ea typeface="Calibri" pitchFamily="34" charset="-122"/>
                 <a:cs typeface="Calibri" pitchFamily="34" charset="-120"/>
               </a:rPr>
-              <a:t>Undo +/− first, then ×/÷ (reverse of BIDMAS)</a:t>
-            </a:r>
-            <a:endParaRPr lang="en-US" sz="1500" dirty="0"/>
+              <a:t>Nanjing taxi: 11 + 2.4(d−3) = 35</a:t>
+            </a:r>
+            <a:endParaRPr lang="en-US" sz="1400" dirty="0"/>
           </a:p>
           <a:p>
             <a:pPr marL="342900" indent="-342900">
               <a:spcAft>
-                <a:spcPts val="1000"/>
+                <a:spcPts val="600"/>
               </a:spcAft>
               <a:buSzPct val="100000"/>
               <a:buChar char="•"/>
             </a:pPr>
             <a:r>
-              <a:rPr lang="en-US" sz="1500" dirty="0">
-                <a:solidFill>
-                  <a:srgbClr val="CADCFC"/>
+              <a:rPr lang="en-US" sz="1400" dirty="0">
+                <a:solidFill>
+                  <a:srgbClr val="3D3A36"/>
                 </a:solidFill>
                 <a:latin typeface="Calibri" pitchFamily="34" charset="0"/>
                 <a:ea typeface="Calibri" pitchFamily="34" charset="-122"/>
                 <a:cs typeface="Calibri" pitchFamily="34" charset="-120"/>
               </a:rPr>
-              <a:t>Whatever you do to one side, do to the other</a:t>
-            </a:r>
-            <a:endParaRPr lang="en-US" sz="1500" dirty="0"/>
-          </a:p>
+              <a:t>German cinema: 2t + 3 = 19</a:t>
+            </a:r>
+            <a:endParaRPr lang="en-US" sz="1400" dirty="0"/>
+          </a:p>
+        </p:txBody>
+      </p:sp>
+      <p:sp>
+        <p:nvSpPr>
+          <p:cNvPr id="9" name="Shape 7"/>
+          <p:cNvSpPr/>
+          <p:nvPr/>
+        </p:nvSpPr>
+        <p:spPr>
+          <a:xfrm>
+            <a:off x="4754880" y="1005840"/>
+            <a:ext cx="3931920" cy="3657600"/>
+          </a:xfrm>
+          <a:prstGeom prst="rect">
+            <a:avLst/>
+          </a:prstGeom>
+          <a:solidFill>
+            <a:srgbClr val="FFFFFF"/>
+          </a:solidFill>
+          <a:ln/>
+          <a:effectLst>
+            <a:outerShdw sx="100000" sy="100000" kx="0" ky="0" algn="bl" rotWithShape="0" blurRad="76200" dist="25400" dir="8100000">
+              <a:srgbClr val="000000">
+                <a:alpha val="12000"/>
+              </a:srgbClr>
+            </a:outerShdw>
+          </a:effectLst>
+        </p:spPr>
+      </p:sp>
+      <p:sp>
+        <p:nvSpPr>
+          <p:cNvPr id="10" name="Shape 8"/>
+          <p:cNvSpPr/>
+          <p:nvPr/>
+        </p:nvSpPr>
+        <p:spPr>
+          <a:xfrm>
+            <a:off x="4754880" y="1005840"/>
+            <a:ext cx="3931920" cy="64008"/>
+          </a:xfrm>
+          <a:prstGeom prst="rect">
+            <a:avLst/>
+          </a:prstGeom>
+          <a:solidFill>
+            <a:srgbClr val="E9C46A"/>
+          </a:solidFill>
+          <a:ln/>
+        </p:spPr>
+      </p:sp>
+      <p:sp>
+        <p:nvSpPr>
+          <p:cNvPr id="11" name="Text 9"/>
+          <p:cNvSpPr/>
+          <p:nvPr/>
+        </p:nvSpPr>
+        <p:spPr>
+          <a:xfrm>
+            <a:off x="4937760" y="1188720"/>
+            <a:ext cx="3566160" cy="457200"/>
+          </a:xfrm>
+          <a:prstGeom prst="rect">
+            <a:avLst/>
+          </a:prstGeom>
+          <a:noFill/>
+          <a:ln/>
+        </p:spPr>
+        <p:txBody>
+          <a:bodyPr wrap="square" rtlCol="0" anchor="ctr"/>
+          <a:lstStyle/>
+          <a:p>
+            <a:pPr indent="0" marL="0">
+              <a:buNone/>
+            </a:pPr>
+            <a:r>
+              <a:rPr lang="en-US" sz="1600" b="1" dirty="0">
+                <a:solidFill>
+                  <a:srgbClr val="E9C46A"/>
+                </a:solidFill>
+                <a:latin typeface="Calibri" pitchFamily="34" charset="0"/>
+                <a:ea typeface="Calibri" pitchFamily="34" charset="-122"/>
+                <a:cs typeface="Calibri" pitchFamily="34" charset="-120"/>
+              </a:rPr>
+              <a:t>Solving</a:t>
+            </a:r>
+            <a:endParaRPr lang="en-US" sz="1600" dirty="0"/>
+          </a:p>
+        </p:txBody>
+      </p:sp>
+      <p:sp>
+        <p:nvSpPr>
+          <p:cNvPr id="12" name="Text 10"/>
+          <p:cNvSpPr/>
+          <p:nvPr/>
+        </p:nvSpPr>
+        <p:spPr>
+          <a:xfrm>
+            <a:off x="4937760" y="1691640"/>
+            <a:ext cx="3566160" cy="2743200"/>
+          </a:xfrm>
+          <a:prstGeom prst="rect">
+            <a:avLst/>
+          </a:prstGeom>
+          <a:noFill/>
+          <a:ln/>
+        </p:spPr>
+        <p:txBody>
+          <a:bodyPr wrap="square" rtlCol="0" anchor="ctr"/>
+          <a:lstStyle/>
           <a:p>
             <a:pPr marL="342900" indent="-342900">
               <a:spcAft>
-                <a:spcPts val="1000"/>
+                <a:spcPts val="600"/>
               </a:spcAft>
               <a:buSzPct val="100000"/>
               <a:buChar char="•"/>
             </a:pPr>
             <a:r>
-              <a:rPr lang="en-US" sz="1500" dirty="0">
-                <a:solidFill>
-                  <a:srgbClr val="CADCFC"/>
+              <a:rPr lang="en-US" sz="1400" dirty="0">
+                <a:solidFill>
+                  <a:srgbClr val="3D3A36"/>
                 </a:solidFill>
                 <a:latin typeface="Calibri" pitchFamily="34" charset="0"/>
                 <a:ea typeface="Calibri" pitchFamily="34" charset="-122"/>
                 <a:cs typeface="Calibri" pitchFamily="34" charset="-120"/>
               </a:rPr>
-              <a:t>Show working: each step on a new line</a:t>
-            </a:r>
-            <a:endParaRPr lang="en-US" sz="1500" dirty="0"/>
+              <a:t>15000p = 75000 → p = 5 people</a:t>
+            </a:r>
+            <a:endParaRPr lang="en-US" sz="1400" dirty="0"/>
           </a:p>
           <a:p>
             <a:pPr marL="342900" indent="-342900">
               <a:spcAft>
-                <a:spcPts val="1000"/>
+                <a:spcPts val="600"/>
               </a:spcAft>
               <a:buSzPct val="100000"/>
               <a:buChar char="•"/>
             </a:pPr>
             <a:r>
-              <a:rPr lang="en-US" sz="1500" dirty="0">
-                <a:solidFill>
-                  <a:srgbClr val="CADCFC"/>
+              <a:rPr lang="en-US" sz="1400" dirty="0">
+                <a:solidFill>
+                  <a:srgbClr val="3D3A36"/>
                 </a:solidFill>
                 <a:latin typeface="Calibri" pitchFamily="34" charset="0"/>
                 <a:ea typeface="Calibri" pitchFamily="34" charset="-122"/>
                 <a:cs typeface="Calibri" pitchFamily="34" charset="-120"/>
               </a:rPr>
-              <a:t>Always check by substituting your answer back</a:t>
-            </a:r>
-            <a:endParaRPr lang="en-US" sz="1500" dirty="0"/>
-          </a:p>
-        </p:txBody>
-      </p:sp>
-      <p:sp>
-        <p:nvSpPr>
-          <p:cNvPr id="5" name="Text 3"/>
-          <p:cNvSpPr/>
-          <p:nvPr/>
-        </p:nvSpPr>
-        <p:spPr>
-          <a:xfrm>
-            <a:off x="731520" y="4572000"/>
-            <a:ext cx="7772400" cy="365760"/>
-          </a:xfrm>
-          <a:prstGeom prst="rect">
-            <a:avLst/>
-          </a:prstGeom>
-          <a:noFill/>
-          <a:ln/>
-        </p:spPr>
-        <p:txBody>
-          <a:bodyPr wrap="square" rtlCol="0" anchor="ctr"/>
-          <a:lstStyle/>
-          <a:p>
-            <a:pPr indent="0" marL="0">
-              <a:buNone/>
-            </a:pPr>
-            <a:r>
-              <a:rPr lang="en-US" sz="1100" dirty="0">
-                <a:solidFill>
-                  <a:srgbClr val="E9C46A"/>
+              <a:t>2.4(d−3) = 24 → d−3 = 10 → d = 13 km</a:t>
+            </a:r>
+            <a:endParaRPr lang="en-US" sz="1400" dirty="0"/>
+          </a:p>
+          <a:p>
+            <a:pPr marL="342900" indent="-342900">
+              <a:spcAft>
+                <a:spcPts val="600"/>
+              </a:spcAft>
+              <a:buSzPct val="100000"/>
+              <a:buChar char="•"/>
+            </a:pPr>
+            <a:r>
+              <a:rPr lang="en-US" sz="1400" dirty="0">
+                <a:solidFill>
+                  <a:srgbClr val="3D3A36"/>
                 </a:solidFill>
                 <a:latin typeface="Calibri" pitchFamily="34" charset="0"/>
                 <a:ea typeface="Calibri" pitchFamily="34" charset="-122"/>
                 <a:cs typeface="Calibri" pitchFamily="34" charset="-120"/>
               </a:rPr>
+              <a:t>2t = 16 → t = 8 tickets</a:t>
+            </a:r>
+            <a:endParaRPr lang="en-US" sz="1400" dirty="0"/>
+          </a:p>
+        </p:txBody>
+      </p:sp>
+    </p:spTree>
+  </p:cSld>
+  <p:clrMapOvr>
+    <a:masterClrMapping/>
+  </p:clrMapOvr>
+</p:sld>
+</file>
+
+<file path=ppt/slides/slide6.xml><?xml version="1.0" encoding="utf-8"?>
+<p:sld xmlns:a="http://schemas.openxmlformats.org/drawingml/2006/main" xmlns:r="http://schemas.openxmlformats.org/officeDocument/2006/relationships" xmlns:p="http://schemas.openxmlformats.org/presentationml/2006/main">
+  <p:cSld name="Slide 6">
+    <p:bg>
+      <p:bgPr>
+        <a:solidFill>
+          <a:srgbClr val="FAF8F5"/>
+        </a:solidFill>
+      </p:bgPr>
+    </p:bg>
+    <p:spTree>
+      <p:nvGrpSpPr>
+        <p:cNvPr id="1" name=""/>
+        <p:cNvGrpSpPr/>
+        <p:nvPr/>
+      </p:nvGrpSpPr>
+      <p:grpSpPr>
+        <a:xfrm>
+          <a:off x="0" y="0"/>
+          <a:ext cx="0" cy="0"/>
+          <a:chOff x="0" y="0"/>
+          <a:chExt cx="0" cy="0"/>
+        </a:xfrm>
+      </p:grpSpPr>
+      <p:sp>
+        <p:nvSpPr>
+          <p:cNvPr id="2" name="Shape 0"/>
+          <p:cNvSpPr/>
+          <p:nvPr/>
+        </p:nvSpPr>
+        <p:spPr>
+          <a:xfrm>
+            <a:off x="0" y="0"/>
+            <a:ext cx="9144000" cy="822960"/>
+          </a:xfrm>
+          <a:prstGeom prst="rect">
+            <a:avLst/>
+          </a:prstGeom>
+          <a:solidFill>
+            <a:srgbClr val="FFFFFF"/>
+          </a:solidFill>
+          <a:ln/>
+        </p:spPr>
+      </p:sp>
+      <p:sp>
+        <p:nvSpPr>
+          <p:cNvPr id="3" name="Shape 1"/>
+          <p:cNvSpPr/>
+          <p:nvPr/>
+        </p:nvSpPr>
+        <p:spPr>
+          <a:xfrm>
+            <a:off x="0" y="795528"/>
+            <a:ext cx="9144000" cy="27432"/>
+          </a:xfrm>
+          <a:prstGeom prst="rect">
+            <a:avLst/>
+          </a:prstGeom>
+          <a:solidFill>
+            <a:srgbClr val="2A9D8F"/>
+          </a:solidFill>
+          <a:ln/>
+        </p:spPr>
+      </p:sp>
+      <p:sp>
+        <p:nvSpPr>
+          <p:cNvPr id="4" name="Text 2"/>
+          <p:cNvSpPr/>
+          <p:nvPr/>
+        </p:nvSpPr>
+        <p:spPr>
+          <a:xfrm>
+            <a:off x="640080" y="91440"/>
+            <a:ext cx="7863840" cy="640080"/>
+          </a:xfrm>
+          <a:prstGeom prst="rect">
+            <a:avLst/>
+          </a:prstGeom>
+          <a:noFill/>
+          <a:ln/>
+        </p:spPr>
+        <p:txBody>
+          <a:bodyPr wrap="square" lIns="0" tIns="0" rIns="0" bIns="0" rtlCol="0" anchor="ctr"/>
+          <a:lstStyle/>
+          <a:p>
+            <a:pPr indent="0" marL="0">
+              <a:buNone/>
+            </a:pPr>
+            <a:r>
+              <a:rPr lang="en-US" sz="2200" b="1" dirty="0">
+                <a:solidFill>
+                  <a:srgbClr val="1B2A4A"/>
+                </a:solidFill>
+                <a:latin typeface="Georgia" pitchFamily="34" charset="0"/>
+                <a:ea typeface="Georgia" pitchFamily="34" charset="-122"/>
+                <a:cs typeface="Georgia" pitchFamily="34" charset="-120"/>
+              </a:rPr>
+              <a:t>Recommended Videos</a:t>
+            </a:r>
+            <a:endParaRPr lang="en-US" sz="2200" dirty="0"/>
+          </a:p>
+        </p:txBody>
+      </p:sp>
+      <p:sp>
+        <p:nvSpPr>
+          <p:cNvPr id="5" name="Text 3"/>
+          <p:cNvSpPr/>
+          <p:nvPr/>
+        </p:nvSpPr>
+        <p:spPr>
+          <a:xfrm>
+            <a:off x="640080" y="868680"/>
+            <a:ext cx="7863840" cy="274320"/>
+          </a:xfrm>
+          <a:prstGeom prst="rect">
+            <a:avLst/>
+          </a:prstGeom>
+          <a:noFill/>
+          <a:ln/>
+        </p:spPr>
+        <p:txBody>
+          <a:bodyPr wrap="square" rtlCol="0" anchor="ctr"/>
+          <a:lstStyle/>
+          <a:p>
+            <a:pPr indent="0" marL="0">
+              <a:buNone/>
+            </a:pPr>
+            <a:r>
+              <a:rPr lang="en-US" sz="1200" i="1" dirty="0">
+                <a:solidFill>
+                  <a:srgbClr val="6B6660"/>
+                </a:solidFill>
+                <a:latin typeface="Calibri" pitchFamily="34" charset="0"/>
+                <a:ea typeface="Calibri" pitchFamily="34" charset="-122"/>
+                <a:cs typeface="Calibri" pitchFamily="34" charset="-120"/>
+              </a:rPr>
+              <a:t>Search these on YouTube to learn more.</a:t>
+            </a:r>
+            <a:endParaRPr lang="en-US" sz="1200" dirty="0"/>
+          </a:p>
+        </p:txBody>
+      </p:sp>
+      <p:sp>
+        <p:nvSpPr>
+          <p:cNvPr id="6" name="Shape 4"/>
+          <p:cNvSpPr/>
+          <p:nvPr/>
+        </p:nvSpPr>
+        <p:spPr>
+          <a:xfrm>
+            <a:off x="457200" y="1234440"/>
+            <a:ext cx="8229600" cy="1051560"/>
+          </a:xfrm>
+          <a:prstGeom prst="rect">
+            <a:avLst/>
+          </a:prstGeom>
+          <a:solidFill>
+            <a:srgbClr val="FFFFFF"/>
+          </a:solidFill>
+          <a:ln/>
+          <a:effectLst>
+            <a:outerShdw sx="100000" sy="100000" kx="0" ky="0" algn="bl" rotWithShape="0" blurRad="76200" dist="25400" dir="8100000">
+              <a:srgbClr val="000000">
+                <a:alpha val="12000"/>
+              </a:srgbClr>
+            </a:outerShdw>
+          </a:effectLst>
+        </p:spPr>
+      </p:sp>
+      <p:sp>
+        <p:nvSpPr>
+          <p:cNvPr id="7" name="Shape 5"/>
+          <p:cNvSpPr/>
+          <p:nvPr/>
+        </p:nvSpPr>
+        <p:spPr>
+          <a:xfrm>
+            <a:off x="457200" y="1234440"/>
+            <a:ext cx="64008" cy="1051560"/>
+          </a:xfrm>
+          <a:prstGeom prst="rect">
+            <a:avLst/>
+          </a:prstGeom>
+          <a:solidFill>
+            <a:srgbClr val="2A9D8F"/>
+          </a:solidFill>
+          <a:ln/>
+        </p:spPr>
+      </p:sp>
+      <p:sp>
+        <p:nvSpPr>
+          <p:cNvPr id="8" name="Text 6"/>
+          <p:cNvSpPr/>
+          <p:nvPr/>
+        </p:nvSpPr>
+        <p:spPr>
+          <a:xfrm>
+            <a:off x="640080" y="1325880"/>
+            <a:ext cx="457200" cy="457200"/>
+          </a:xfrm>
+          <a:prstGeom prst="rect">
+            <a:avLst/>
+          </a:prstGeom>
+          <a:noFill/>
+          <a:ln/>
+        </p:spPr>
+        <p:txBody>
+          <a:bodyPr wrap="square" rtlCol="0" anchor="ctr"/>
+          <a:lstStyle/>
+          <a:p>
+            <a:pPr algn="ctr" indent="0" marL="0">
+              <a:buNone/>
+            </a:pPr>
+            <a:r>
+              <a:rPr lang="en-US" sz="2000" dirty="0">
+                <a:solidFill>
+                  <a:srgbClr val="2A9D8F"/>
+                </a:solidFill>
+                <a:latin typeface="Calibri" pitchFamily="34" charset="0"/>
+                <a:ea typeface="Calibri" pitchFamily="34" charset="-122"/>
+                <a:cs typeface="Calibri" pitchFamily="34" charset="-120"/>
+              </a:rPr>
+              <a:t>▶</a:t>
+            </a:r>
+            <a:endParaRPr lang="en-US" sz="2000" dirty="0"/>
+          </a:p>
+        </p:txBody>
+      </p:sp>
+      <p:sp>
+        <p:nvSpPr>
+          <p:cNvPr id="9" name="Text 7"/>
+          <p:cNvSpPr/>
+          <p:nvPr/>
+        </p:nvSpPr>
+        <p:spPr>
+          <a:xfrm>
+            <a:off x="1188720" y="1307592"/>
+            <a:ext cx="7132320" cy="411480"/>
+          </a:xfrm>
+          <a:prstGeom prst="rect">
+            <a:avLst/>
+          </a:prstGeom>
+          <a:noFill/>
+          <a:ln/>
+        </p:spPr>
+        <p:txBody>
+          <a:bodyPr wrap="square" rtlCol="0" anchor="ctr"/>
+          <a:lstStyle/>
+          <a:p>
+            <a:pPr indent="0" marL="0">
+              <a:buNone/>
+            </a:pPr>
+            <a:r>
+              <a:rPr lang="en-US" sz="1400" b="1" dirty="0">
+                <a:solidFill>
+                  <a:srgbClr val="1B2A4A"/>
+                </a:solidFill>
+                <a:latin typeface="Calibri" pitchFamily="34" charset="0"/>
+                <a:ea typeface="Calibri" pitchFamily="34" charset="-122"/>
+                <a:cs typeface="Calibri" pitchFamily="34" charset="-120"/>
+              </a:rPr>
+              <a:t>Solving Two-Step Equations</a:t>
+            </a:r>
+            <a:endParaRPr lang="en-US" sz="1400" dirty="0"/>
+          </a:p>
+        </p:txBody>
+      </p:sp>
+      <p:sp>
+        <p:nvSpPr>
+          <p:cNvPr id="10" name="Text 8"/>
+          <p:cNvSpPr/>
+          <p:nvPr/>
+        </p:nvSpPr>
+        <p:spPr>
+          <a:xfrm>
+            <a:off x="1188720" y="1691640"/>
+            <a:ext cx="7132320" cy="320040"/>
+          </a:xfrm>
+          <a:prstGeom prst="rect">
+            <a:avLst/>
+          </a:prstGeom>
+          <a:noFill/>
+          <a:ln/>
+        </p:spPr>
+        <p:txBody>
+          <a:bodyPr wrap="square" rtlCol="0" anchor="ctr"/>
+          <a:lstStyle/>
+          <a:p>
+            <a:pPr indent="0" marL="0">
+              <a:buNone/>
+            </a:pPr>
+            <a:r>
+              <a:rPr lang="en-US" sz="1100" dirty="0">
+                <a:solidFill>
+                  <a:srgbClr val="6B6660"/>
+                </a:solidFill>
+                <a:latin typeface="Calibri" pitchFamily="34" charset="0"/>
+                <a:ea typeface="Calibri" pitchFamily="34" charset="-122"/>
+                <a:cs typeface="Calibri" pitchFamily="34" charset="-120"/>
+              </a:rPr>
+              <a:t>Corbettmaths  •  5 min</a:t>
+            </a:r>
+            <a:endParaRPr lang="en-US" sz="1100" dirty="0"/>
+          </a:p>
+        </p:txBody>
+      </p:sp>
+      <p:sp>
+        <p:nvSpPr>
+          <p:cNvPr id="11" name="Shape 9"/>
+          <p:cNvSpPr/>
+          <p:nvPr/>
+        </p:nvSpPr>
+        <p:spPr>
+          <a:xfrm>
+            <a:off x="457200" y="2423160"/>
+            <a:ext cx="8229600" cy="1051560"/>
+          </a:xfrm>
+          <a:prstGeom prst="rect">
+            <a:avLst/>
+          </a:prstGeom>
+          <a:solidFill>
+            <a:srgbClr val="FFFFFF"/>
+          </a:solidFill>
+          <a:ln/>
+          <a:effectLst>
+            <a:outerShdw sx="100000" sy="100000" kx="0" ky="0" algn="bl" rotWithShape="0" blurRad="76200" dist="25400" dir="8100000">
+              <a:srgbClr val="000000">
+                <a:alpha val="12000"/>
+              </a:srgbClr>
+            </a:outerShdw>
+          </a:effectLst>
+        </p:spPr>
+      </p:sp>
+      <p:sp>
+        <p:nvSpPr>
+          <p:cNvPr id="12" name="Shape 10"/>
+          <p:cNvSpPr/>
+          <p:nvPr/>
+        </p:nvSpPr>
+        <p:spPr>
+          <a:xfrm>
+            <a:off x="457200" y="2423160"/>
+            <a:ext cx="64008" cy="1051560"/>
+          </a:xfrm>
+          <a:prstGeom prst="rect">
+            <a:avLst/>
+          </a:prstGeom>
+          <a:solidFill>
+            <a:srgbClr val="2A9D8F"/>
+          </a:solidFill>
+          <a:ln/>
+        </p:spPr>
+      </p:sp>
+      <p:sp>
+        <p:nvSpPr>
+          <p:cNvPr id="13" name="Text 11"/>
+          <p:cNvSpPr/>
+          <p:nvPr/>
+        </p:nvSpPr>
+        <p:spPr>
+          <a:xfrm>
+            <a:off x="640080" y="2514600"/>
+            <a:ext cx="457200" cy="457200"/>
+          </a:xfrm>
+          <a:prstGeom prst="rect">
+            <a:avLst/>
+          </a:prstGeom>
+          <a:noFill/>
+          <a:ln/>
+        </p:spPr>
+        <p:txBody>
+          <a:bodyPr wrap="square" rtlCol="0" anchor="ctr"/>
+          <a:lstStyle/>
+          <a:p>
+            <a:pPr algn="ctr" indent="0" marL="0">
+              <a:buNone/>
+            </a:pPr>
+            <a:r>
+              <a:rPr lang="en-US" sz="2000" dirty="0">
+                <a:solidFill>
+                  <a:srgbClr val="2A9D8F"/>
+                </a:solidFill>
+                <a:latin typeface="Calibri" pitchFamily="34" charset="0"/>
+                <a:ea typeface="Calibri" pitchFamily="34" charset="-122"/>
+                <a:cs typeface="Calibri" pitchFamily="34" charset="-120"/>
+              </a:rPr>
+              <a:t>▶</a:t>
+            </a:r>
+            <a:endParaRPr lang="en-US" sz="2000" dirty="0"/>
+          </a:p>
+        </p:txBody>
+      </p:sp>
+      <p:sp>
+        <p:nvSpPr>
+          <p:cNvPr id="14" name="Text 12"/>
+          <p:cNvSpPr/>
+          <p:nvPr/>
+        </p:nvSpPr>
+        <p:spPr>
+          <a:xfrm>
+            <a:off x="1188720" y="2496312"/>
+            <a:ext cx="7132320" cy="411480"/>
+          </a:xfrm>
+          <a:prstGeom prst="rect">
+            <a:avLst/>
+          </a:prstGeom>
+          <a:noFill/>
+          <a:ln/>
+        </p:spPr>
+        <p:txBody>
+          <a:bodyPr wrap="square" rtlCol="0" anchor="ctr"/>
+          <a:lstStyle/>
+          <a:p>
+            <a:pPr indent="0" marL="0">
+              <a:buNone/>
+            </a:pPr>
+            <a:r>
+              <a:rPr lang="en-US" sz="1400" b="1" dirty="0">
+                <a:solidFill>
+                  <a:srgbClr val="1B2A4A"/>
+                </a:solidFill>
+                <a:latin typeface="Calibri" pitchFamily="34" charset="0"/>
+                <a:ea typeface="Calibri" pitchFamily="34" charset="-122"/>
+                <a:cs typeface="Calibri" pitchFamily="34" charset="-120"/>
+              </a:rPr>
+              <a:t>Two-Step Equations</a:t>
+            </a:r>
+            <a:endParaRPr lang="en-US" sz="1400" dirty="0"/>
+          </a:p>
+        </p:txBody>
+      </p:sp>
+      <p:sp>
+        <p:nvSpPr>
+          <p:cNvPr id="15" name="Text 13"/>
+          <p:cNvSpPr/>
+          <p:nvPr/>
+        </p:nvSpPr>
+        <p:spPr>
+          <a:xfrm>
+            <a:off x="1188720" y="2880360"/>
+            <a:ext cx="7132320" cy="320040"/>
+          </a:xfrm>
+          <a:prstGeom prst="rect">
+            <a:avLst/>
+          </a:prstGeom>
+          <a:noFill/>
+          <a:ln/>
+        </p:spPr>
+        <p:txBody>
+          <a:bodyPr wrap="square" rtlCol="0" anchor="ctr"/>
+          <a:lstStyle/>
+          <a:p>
+            <a:pPr indent="0" marL="0">
+              <a:buNone/>
+            </a:pPr>
+            <a:r>
+              <a:rPr lang="en-US" sz="1100" dirty="0">
+                <a:solidFill>
+                  <a:srgbClr val="6B6660"/>
+                </a:solidFill>
+                <a:latin typeface="Calibri" pitchFamily="34" charset="0"/>
+                <a:ea typeface="Calibri" pitchFamily="34" charset="-122"/>
+                <a:cs typeface="Calibri" pitchFamily="34" charset="-120"/>
+              </a:rPr>
+              <a:t>Math Antics  •  8 min</a:t>
+            </a:r>
+            <a:endParaRPr lang="en-US" sz="1100" dirty="0"/>
+          </a:p>
+        </p:txBody>
+      </p:sp>
+      <p:sp>
+        <p:nvSpPr>
+          <p:cNvPr id="16" name="Shape 14"/>
+          <p:cNvSpPr/>
+          <p:nvPr/>
+        </p:nvSpPr>
+        <p:spPr>
+          <a:xfrm>
+            <a:off x="457200" y="3611880"/>
+            <a:ext cx="8229600" cy="1051560"/>
+          </a:xfrm>
+          <a:prstGeom prst="rect">
+            <a:avLst/>
+          </a:prstGeom>
+          <a:solidFill>
+            <a:srgbClr val="FFFFFF"/>
+          </a:solidFill>
+          <a:ln/>
+          <a:effectLst>
+            <a:outerShdw sx="100000" sy="100000" kx="0" ky="0" algn="bl" rotWithShape="0" blurRad="76200" dist="25400" dir="8100000">
+              <a:srgbClr val="000000">
+                <a:alpha val="12000"/>
+              </a:srgbClr>
+            </a:outerShdw>
+          </a:effectLst>
+        </p:spPr>
+      </p:sp>
+      <p:sp>
+        <p:nvSpPr>
+          <p:cNvPr id="17" name="Shape 15"/>
+          <p:cNvSpPr/>
+          <p:nvPr/>
+        </p:nvSpPr>
+        <p:spPr>
+          <a:xfrm>
+            <a:off x="457200" y="3611880"/>
+            <a:ext cx="64008" cy="1051560"/>
+          </a:xfrm>
+          <a:prstGeom prst="rect">
+            <a:avLst/>
+          </a:prstGeom>
+          <a:solidFill>
+            <a:srgbClr val="2A9D8F"/>
+          </a:solidFill>
+          <a:ln/>
+        </p:spPr>
+      </p:sp>
+      <p:sp>
+        <p:nvSpPr>
+          <p:cNvPr id="18" name="Text 16"/>
+          <p:cNvSpPr/>
+          <p:nvPr/>
+        </p:nvSpPr>
+        <p:spPr>
+          <a:xfrm>
+            <a:off x="640080" y="3703320"/>
+            <a:ext cx="457200" cy="457200"/>
+          </a:xfrm>
+          <a:prstGeom prst="rect">
+            <a:avLst/>
+          </a:prstGeom>
+          <a:noFill/>
+          <a:ln/>
+        </p:spPr>
+        <p:txBody>
+          <a:bodyPr wrap="square" rtlCol="0" anchor="ctr"/>
+          <a:lstStyle/>
+          <a:p>
+            <a:pPr algn="ctr" indent="0" marL="0">
+              <a:buNone/>
+            </a:pPr>
+            <a:r>
+              <a:rPr lang="en-US" sz="2000" dirty="0">
+                <a:solidFill>
+                  <a:srgbClr val="2A9D8F"/>
+                </a:solidFill>
+                <a:latin typeface="Calibri" pitchFamily="34" charset="0"/>
+                <a:ea typeface="Calibri" pitchFamily="34" charset="-122"/>
+                <a:cs typeface="Calibri" pitchFamily="34" charset="-120"/>
+              </a:rPr>
+              <a:t>▶</a:t>
+            </a:r>
+            <a:endParaRPr lang="en-US" sz="2000" dirty="0"/>
+          </a:p>
+        </p:txBody>
+      </p:sp>
+      <p:sp>
+        <p:nvSpPr>
+          <p:cNvPr id="19" name="Text 17"/>
+          <p:cNvSpPr/>
+          <p:nvPr/>
+        </p:nvSpPr>
+        <p:spPr>
+          <a:xfrm>
+            <a:off x="1188720" y="3685032"/>
+            <a:ext cx="7132320" cy="411480"/>
+          </a:xfrm>
+          <a:prstGeom prst="rect">
+            <a:avLst/>
+          </a:prstGeom>
+          <a:noFill/>
+          <a:ln/>
+        </p:spPr>
+        <p:txBody>
+          <a:bodyPr wrap="square" rtlCol="0" anchor="ctr"/>
+          <a:lstStyle/>
+          <a:p>
+            <a:pPr indent="0" marL="0">
+              <a:buNone/>
+            </a:pPr>
+            <a:r>
+              <a:rPr lang="en-US" sz="1400" b="1" dirty="0">
+                <a:solidFill>
+                  <a:srgbClr val="1B2A4A"/>
+                </a:solidFill>
+                <a:latin typeface="Calibri" pitchFamily="34" charset="0"/>
+                <a:ea typeface="Calibri" pitchFamily="34" charset="-122"/>
+                <a:cs typeface="Calibri" pitchFamily="34" charset="-120"/>
+              </a:rPr>
+              <a:t>Harder Equations</a:t>
+            </a:r>
+            <a:endParaRPr lang="en-US" sz="1400" dirty="0"/>
+          </a:p>
+        </p:txBody>
+      </p:sp>
+      <p:sp>
+        <p:nvSpPr>
+          <p:cNvPr id="20" name="Text 18"/>
+          <p:cNvSpPr/>
+          <p:nvPr/>
+        </p:nvSpPr>
+        <p:spPr>
+          <a:xfrm>
+            <a:off x="1188720" y="4069080"/>
+            <a:ext cx="7132320" cy="320040"/>
+          </a:xfrm>
+          <a:prstGeom prst="rect">
+            <a:avLst/>
+          </a:prstGeom>
+          <a:noFill/>
+          <a:ln/>
+        </p:spPr>
+        <p:txBody>
+          <a:bodyPr wrap="square" rtlCol="0" anchor="ctr"/>
+          <a:lstStyle/>
+          <a:p>
+            <a:pPr indent="0" marL="0">
+              <a:buNone/>
+            </a:pPr>
+            <a:r>
+              <a:rPr lang="en-US" sz="1100" dirty="0">
+                <a:solidFill>
+                  <a:srgbClr val="6B6660"/>
+                </a:solidFill>
+                <a:latin typeface="Calibri" pitchFamily="34" charset="0"/>
+                <a:ea typeface="Calibri" pitchFamily="34" charset="-122"/>
+                <a:cs typeface="Calibri" pitchFamily="34" charset="-120"/>
+              </a:rPr>
+              <a:t>Cognito  •  5 min</a:t>
+            </a:r>
+            <a:endParaRPr lang="en-US" sz="1100" dirty="0"/>
+          </a:p>
+        </p:txBody>
+      </p:sp>
+    </p:spTree>
+  </p:cSld>
+  <p:clrMapOvr>
+    <a:masterClrMapping/>
+  </p:clrMapOvr>
+</p:sld>
+</file>
+
+<file path=ppt/slides/slide7.xml><?xml version="1.0" encoding="utf-8"?>
+<p:sld xmlns:a="http://schemas.openxmlformats.org/drawingml/2006/main" xmlns:r="http://schemas.openxmlformats.org/officeDocument/2006/relationships" xmlns:p="http://schemas.openxmlformats.org/presentationml/2006/main">
+  <p:cSld name="Slide 7">
+    <p:spTree>
+      <p:nvGrpSpPr>
+        <p:cNvPr id="1" name=""/>
+        <p:cNvGrpSpPr/>
+        <p:nvPr/>
+      </p:nvGrpSpPr>
+      <p:grpSpPr>
+        <a:xfrm>
+          <a:off x="0" y="0"/>
+          <a:ext cx="0" cy="0"/>
+          <a:chOff x="0" y="0"/>
+          <a:chExt cx="0" cy="0"/>
+        </a:xfrm>
+      </p:grpSpPr>
+      <p:sp>
+        <p:nvSpPr>
+          <p:cNvPr id="2" name="Shape 0"/>
+          <p:cNvSpPr/>
+          <p:nvPr/>
+        </p:nvSpPr>
+        <p:spPr>
+          <a:xfrm>
+            <a:off x="0" y="0"/>
+            <a:ext cx="9144000" cy="5143500"/>
+          </a:xfrm>
+          <a:prstGeom prst="rect">
+            <a:avLst/>
+          </a:prstGeom>
+          <a:solidFill>
+            <a:srgbClr val="1B2A4A"/>
+          </a:solidFill>
+          <a:ln/>
+        </p:spPr>
+      </p:sp>
+      <p:sp>
+        <p:nvSpPr>
+          <p:cNvPr id="3" name="Shape 1"/>
+          <p:cNvSpPr/>
+          <p:nvPr/>
+        </p:nvSpPr>
+        <p:spPr>
+          <a:xfrm>
+            <a:off x="0" y="4777740"/>
+            <a:ext cx="9144000" cy="365760"/>
+          </a:xfrm>
+          <a:prstGeom prst="rect">
+            <a:avLst/>
+          </a:prstGeom>
+          <a:solidFill>
+            <a:srgbClr val="2A9D8F"/>
+          </a:solidFill>
+          <a:ln/>
+        </p:spPr>
+      </p:sp>
+      <p:sp>
+        <p:nvSpPr>
+          <p:cNvPr id="4" name="Text 2"/>
+          <p:cNvSpPr/>
+          <p:nvPr/>
+        </p:nvSpPr>
+        <p:spPr>
+          <a:xfrm>
+            <a:off x="731520" y="1371600"/>
+            <a:ext cx="7680960" cy="914400"/>
+          </a:xfrm>
+          <a:prstGeom prst="rect">
+            <a:avLst/>
+          </a:prstGeom>
+          <a:noFill/>
+          <a:ln/>
+        </p:spPr>
+        <p:txBody>
+          <a:bodyPr wrap="square" rtlCol="0" anchor="ctr"/>
+          <a:lstStyle/>
+          <a:p>
+            <a:pPr algn="ctr" indent="0" marL="0">
+              <a:buNone/>
+            </a:pPr>
+            <a:r>
+              <a:rPr lang="en-US" sz="3600" b="1" dirty="0">
+                <a:solidFill>
+                  <a:srgbClr val="FFFFFF"/>
+                </a:solidFill>
+                <a:latin typeface="Georgia" pitchFamily="34" charset="0"/>
+                <a:ea typeface="Georgia" pitchFamily="34" charset="-122"/>
+                <a:cs typeface="Georgia" pitchFamily="34" charset="-120"/>
+              </a:rPr>
+              <a:t>Review &amp; Practise</a:t>
+            </a:r>
+            <a:endParaRPr lang="en-US" sz="3600" dirty="0"/>
+          </a:p>
+        </p:txBody>
+      </p:sp>
+      <p:sp>
+        <p:nvSpPr>
+          <p:cNvPr id="5" name="Text 3"/>
+          <p:cNvSpPr/>
+          <p:nvPr/>
+        </p:nvSpPr>
+        <p:spPr>
+          <a:xfrm>
+            <a:off x="731520" y="2560320"/>
+            <a:ext cx="7680960" cy="548640"/>
+          </a:xfrm>
+          <a:prstGeom prst="rect">
+            <a:avLst/>
+          </a:prstGeom>
+          <a:noFill/>
+          <a:ln/>
+        </p:spPr>
+        <p:txBody>
+          <a:bodyPr wrap="square" rtlCol="0" anchor="ctr"/>
+          <a:lstStyle/>
+          <a:p>
+            <a:pPr algn="ctr" indent="0" marL="0">
+              <a:buNone/>
+            </a:pPr>
+            <a:r>
+              <a:rPr lang="en-US" sz="2000" dirty="0">
+                <a:solidFill>
+                  <a:srgbClr val="2A9D8F"/>
+                </a:solidFill>
+                <a:latin typeface="Calibri" pitchFamily="34" charset="0"/>
+                <a:ea typeface="Calibri" pitchFamily="34" charset="-122"/>
+                <a:cs typeface="Calibri" pitchFamily="34" charset="-120"/>
+              </a:rPr>
               <a:t>mrzocchi.com</a:t>
             </a:r>
-            <a:endParaRPr lang="en-US" sz="1100" dirty="0"/>
+            <a:endParaRPr lang="en-US" sz="2000" dirty="0"/>
           </a:p>
         </p:txBody>
       </p:sp>

--- a/static/ppts/G6_Math_T4_Two_Step_Equations.pptx
+++ b/static/ppts/G6_Math_T4_Two_Step_Equations.pptx
@@ -16,8 +16,8 @@
   <p:notesMasterIdLst>
     <p:notesMasterId r:id="rId9"/>
   </p:notesMasterIdLst>
-  <p:sldSz cx="9144000" cy="5143500"/>
-  <p:notesSz cx="5143500" cy="9144000"/>
+  <p:sldSz cx="12192000" cy="6858000"/>
+  <p:notesSz cx="6858000" cy="12192000"/>
   <p:defaultTextStyle>
     <a:lvl1pPr marL="0" algn="l" defTabSz="914400" rtl="0" eaLnBrk="1" latinLnBrk="0" hangingPunct="1">
       <a:defRPr sz="1800" kern="1200">
@@ -1388,6 +1388,13 @@
 <file path=ppt/slides/slide1.xml><?xml version="1.0" encoding="utf-8"?>
 <p:sld xmlns:a="http://schemas.openxmlformats.org/drawingml/2006/main" xmlns:r="http://schemas.openxmlformats.org/officeDocument/2006/relationships" xmlns:p="http://schemas.openxmlformats.org/presentationml/2006/main">
   <p:cSld name="Slide 1">
+    <p:bg>
+      <p:bgPr>
+        <a:solidFill>
+          <a:srgbClr val="2A9D8F"/>
+        </a:solidFill>
+      </p:bgPr>
+    </p:bg>
     <p:spTree>
       <p:nvGrpSpPr>
         <p:cNvPr id="1" name=""/>
@@ -1410,48 +1417,30 @@
         </p:nvSpPr>
         <p:spPr>
           <a:xfrm>
-            <a:off x="0" y="0"/>
-            <a:ext cx="9144000" cy="5143500"/>
-          </a:xfrm>
-          <a:prstGeom prst="rect">
+            <a:off x="7772400" y="-914400"/>
+            <a:ext cx="3657600" cy="3657600"/>
+          </a:xfrm>
+          <a:prstGeom prst="ellipse">
             <a:avLst/>
           </a:prstGeom>
           <a:solidFill>
-            <a:srgbClr val="1B2A4A"/>
+            <a:srgbClr val="FFFFFF">
+              <a:alpha val="8000"/>
+            </a:srgbClr>
           </a:solidFill>
           <a:ln/>
         </p:spPr>
       </p:sp>
       <p:sp>
         <p:nvSpPr>
-          <p:cNvPr id="3" name="Shape 1"/>
-          <p:cNvSpPr/>
-          <p:nvPr/>
-        </p:nvSpPr>
-        <p:spPr>
-          <a:xfrm>
-            <a:off x="0" y="4777740"/>
-            <a:ext cx="9144000" cy="365760"/>
-          </a:xfrm>
-          <a:prstGeom prst="rect">
-            <a:avLst/>
-          </a:prstGeom>
-          <a:solidFill>
-            <a:srgbClr val="2A9D8F"/>
-          </a:solidFill>
-          <a:ln/>
-        </p:spPr>
-      </p:sp>
-      <p:sp>
-        <p:nvSpPr>
-          <p:cNvPr id="4" name="Text 2"/>
-          <p:cNvSpPr/>
-          <p:nvPr/>
-        </p:nvSpPr>
-        <p:spPr>
-          <a:xfrm>
-            <a:off x="731520" y="1097280"/>
-            <a:ext cx="7680960" cy="457200"/>
+          <p:cNvPr id="3" name="Text 1"/>
+          <p:cNvSpPr/>
+          <p:nvPr/>
+        </p:nvSpPr>
+        <p:spPr>
+          <a:xfrm>
+            <a:off x="731520" y="548640"/>
+            <a:ext cx="7315200" cy="365760"/>
           </a:xfrm>
           <a:prstGeom prst="rect">
             <a:avLst/>
@@ -1467,46 +1456,49 @@
               <a:buNone/>
             </a:pPr>
             <a:r>
-              <a:rPr lang="en-US" sz="1400" b="1" spc="400" kern="0" dirty="0">
-                <a:solidFill>
-                  <a:srgbClr val="2A9D8F"/>
-                </a:solidFill>
-                <a:latin typeface="Calibri" pitchFamily="34" charset="0"/>
-                <a:ea typeface="Calibri" pitchFamily="34" charset="-122"/>
-                <a:cs typeface="Calibri" pitchFamily="34" charset="-120"/>
+              <a:rPr lang="en-US" sz="1100" b="1" dirty="0">
+                <a:solidFill>
+                  <a:srgbClr val="F2D68A"/>
+                </a:solidFill>
+                <a:latin typeface="Arial" pitchFamily="34" charset="0"/>
+                <a:ea typeface="Arial" pitchFamily="34" charset="-122"/>
+                <a:cs typeface="Arial" pitchFamily="34" charset="-120"/>
               </a:rPr>
               <a:t>GRADE 6 MATHEMATICS</a:t>
             </a:r>
-            <a:endParaRPr lang="en-US" sz="1400" dirty="0"/>
-          </a:p>
-        </p:txBody>
-      </p:sp>
-      <p:sp>
-        <p:nvSpPr>
-          <p:cNvPr id="5" name="Text 3"/>
-          <p:cNvSpPr/>
-          <p:nvPr/>
-        </p:nvSpPr>
-        <p:spPr>
-          <a:xfrm>
-            <a:off x="731520" y="1645920"/>
-            <a:ext cx="7680960" cy="1463040"/>
-          </a:xfrm>
-          <a:prstGeom prst="rect">
-            <a:avLst/>
-          </a:prstGeom>
-          <a:noFill/>
-          <a:ln/>
-        </p:spPr>
-        <p:txBody>
-          <a:bodyPr wrap="square" rtlCol="0" anchor="t"/>
+            <a:endParaRPr lang="en-US" sz="1100" dirty="0"/>
+          </a:p>
+        </p:txBody>
+      </p:sp>
+      <p:sp>
+        <p:nvSpPr>
+          <p:cNvPr id="4" name="Text 2"/>
+          <p:cNvSpPr/>
+          <p:nvPr/>
+        </p:nvSpPr>
+        <p:spPr>
+          <a:xfrm>
+            <a:off x="731520" y="1371600"/>
+            <a:ext cx="9144000" cy="1645920"/>
+          </a:xfrm>
+          <a:prstGeom prst="rect">
+            <a:avLst/>
+          </a:prstGeom>
+          <a:noFill/>
+          <a:ln/>
+        </p:spPr>
+        <p:txBody>
+          <a:bodyPr wrap="square" rtlCol="0" anchor="ctr"/>
           <a:lstStyle/>
           <a:p>
             <a:pPr indent="0" marL="0">
+              <a:lnSpc>
+                <a:spcPct val="110000"/>
+              </a:lnSpc>
               <a:buNone/>
             </a:pPr>
             <a:r>
-              <a:rPr lang="en-US" sz="4000" b="1" dirty="0">
+              <a:rPr lang="en-US" sz="3600" b="1" dirty="0">
                 <a:solidFill>
                   <a:srgbClr val="FFFFFF"/>
                 </a:solidFill>
@@ -1514,26 +1506,50 @@
                 <a:ea typeface="Georgia" pitchFamily="34" charset="-122"/>
                 <a:cs typeface="Georgia" pitchFamily="34" charset="-120"/>
               </a:rPr>
-              <a:t>Solving Two-Step</a:t>
-            </a:r>
-            <a:endParaRPr lang="en-US" sz="4000" dirty="0"/>
-          </a:p>
+              <a:t>Solving Two-Step Equations</a:t>
+            </a:r>
+            <a:endParaRPr lang="en-US" sz="3600" dirty="0"/>
+          </a:p>
+        </p:txBody>
+      </p:sp>
+      <p:sp>
+        <p:nvSpPr>
+          <p:cNvPr id="5" name="Text 3"/>
+          <p:cNvSpPr/>
+          <p:nvPr/>
+        </p:nvSpPr>
+        <p:spPr>
+          <a:xfrm>
+            <a:off x="731520" y="3200400"/>
+            <a:ext cx="7315200" cy="548640"/>
+          </a:xfrm>
+          <a:prstGeom prst="rect">
+            <a:avLst/>
+          </a:prstGeom>
+          <a:noFill/>
+          <a:ln/>
+        </p:spPr>
+        <p:txBody>
+          <a:bodyPr wrap="square" rtlCol="0" anchor="ctr"/>
+          <a:lstStyle/>
           <a:p>
             <a:pPr indent="0" marL="0">
               <a:buNone/>
             </a:pPr>
             <a:r>
-              <a:rPr lang="en-US" sz="4000" b="1" dirty="0">
-                <a:solidFill>
-                  <a:srgbClr val="FFFFFF"/>
-                </a:solidFill>
-                <a:latin typeface="Georgia" pitchFamily="34" charset="0"/>
-                <a:ea typeface="Georgia" pitchFamily="34" charset="-122"/>
-                <a:cs typeface="Georgia" pitchFamily="34" charset="-120"/>
-              </a:rPr>
-              <a:t>Equations</a:t>
-            </a:r>
-            <a:endParaRPr lang="en-US" sz="4000" dirty="0"/>
+              <a:rPr lang="en-US" sz="1600" dirty="0">
+                <a:solidFill>
+                  <a:srgbClr val="FFFFFF">
+                    <a:alpha val="65000"/>
+                  </a:srgbClr>
+                </a:solidFill>
+                <a:latin typeface="Arial" pitchFamily="34" charset="0"/>
+                <a:ea typeface="Arial" pitchFamily="34" charset="-122"/>
+                <a:cs typeface="Arial" pitchFamily="34" charset="-120"/>
+              </a:rPr>
+              <a:t>Equations that need two steps</a:t>
+            </a:r>
+            <a:endParaRPr lang="en-US" sz="1600" dirty="0"/>
           </a:p>
         </p:txBody>
       </p:sp>
@@ -1545,8 +1561,8 @@
         </p:nvSpPr>
         <p:spPr>
           <a:xfrm>
-            <a:off x="731520" y="3200400"/>
-            <a:ext cx="7680960" cy="548640"/>
+            <a:off x="731520" y="4389120"/>
+            <a:ext cx="2743200" cy="320040"/>
           </a:xfrm>
           <a:prstGeom prst="rect">
             <a:avLst/>
@@ -1562,56 +1578,19 @@
               <a:buNone/>
             </a:pPr>
             <a:r>
-              <a:rPr lang="en-US" sz="1600" i="1" dirty="0">
-                <a:solidFill>
-                  <a:srgbClr val="9B9690"/>
-                </a:solidFill>
-                <a:latin typeface="Calibri" pitchFamily="34" charset="0"/>
-                <a:ea typeface="Calibri" pitchFamily="34" charset="-122"/>
-                <a:cs typeface="Calibri" pitchFamily="34" charset="-120"/>
-              </a:rPr>
-              <a:t>Two moves to find the unknown</a:t>
-            </a:r>
-            <a:endParaRPr lang="en-US" sz="1600" dirty="0"/>
-          </a:p>
-        </p:txBody>
-      </p:sp>
-      <p:sp>
-        <p:nvSpPr>
-          <p:cNvPr id="7" name="Text 5"/>
-          <p:cNvSpPr/>
-          <p:nvPr/>
-        </p:nvSpPr>
-        <p:spPr>
-          <a:xfrm>
-            <a:off x="731520" y="4206240"/>
-            <a:ext cx="3657600" cy="365760"/>
-          </a:xfrm>
-          <a:prstGeom prst="rect">
-            <a:avLst/>
-          </a:prstGeom>
-          <a:noFill/>
-          <a:ln/>
-        </p:spPr>
-        <p:txBody>
-          <a:bodyPr wrap="square" rtlCol="0" anchor="ctr"/>
-          <a:lstStyle/>
-          <a:p>
-            <a:pPr indent="0" marL="0">
-              <a:buNone/>
-            </a:pPr>
-            <a:r>
-              <a:rPr lang="en-US" sz="1200" dirty="0">
-                <a:solidFill>
-                  <a:srgbClr val="6B6660"/>
-                </a:solidFill>
-                <a:latin typeface="Calibri" pitchFamily="34" charset="0"/>
-                <a:ea typeface="Calibri" pitchFamily="34" charset="-122"/>
-                <a:cs typeface="Calibri" pitchFamily="34" charset="-120"/>
-              </a:rPr>
-              <a:t>Mr Zocchi</a:t>
-            </a:r>
-            <a:endParaRPr lang="en-US" sz="1200" dirty="0"/>
+              <a:rPr lang="en-US" sz="1000" dirty="0">
+                <a:solidFill>
+                  <a:srgbClr val="FFFFFF">
+                    <a:alpha val="40000"/>
+                  </a:srgbClr>
+                </a:solidFill>
+                <a:latin typeface="Arial" pitchFamily="34" charset="0"/>
+                <a:ea typeface="Arial" pitchFamily="34" charset="-122"/>
+                <a:cs typeface="Arial" pitchFamily="34" charset="-120"/>
+              </a:rPr>
+              <a:t>mrzocchi.com</a:t>
+            </a:r>
+            <a:endParaRPr lang="en-US" sz="1000" dirty="0"/>
           </a:p>
         </p:txBody>
       </p:sp>
@@ -1626,6 +1605,13 @@
 <file path=ppt/slides/slide2.xml><?xml version="1.0" encoding="utf-8"?>
 <p:sld xmlns:a="http://schemas.openxmlformats.org/drawingml/2006/main" xmlns:r="http://schemas.openxmlformats.org/officeDocument/2006/relationships" xmlns:p="http://schemas.openxmlformats.org/presentationml/2006/main">
   <p:cSld name="Slide 2">
+    <p:bg>
+      <p:bgPr>
+        <a:solidFill>
+          <a:srgbClr val="FAF8F5"/>
+        </a:solidFill>
+      </p:bgPr>
+    </p:bg>
     <p:spTree>
       <p:nvGrpSpPr>
         <p:cNvPr id="1" name=""/>
@@ -1649,13 +1635,13 @@
         <p:spPr>
           <a:xfrm>
             <a:off x="0" y="0"/>
-            <a:ext cx="9144000" cy="5143500"/>
+            <a:ext cx="73152" cy="5148072"/>
           </a:xfrm>
           <a:prstGeom prst="rect">
             <a:avLst/>
           </a:prstGeom>
           <a:solidFill>
-            <a:srgbClr val="111D35"/>
+            <a:srgbClr val="2A9D8F"/>
           </a:solidFill>
           <a:ln/>
         </p:spPr>
@@ -1668,8 +1654,8 @@
         </p:nvSpPr>
         <p:spPr>
           <a:xfrm>
-            <a:off x="6858000" y="182880"/>
-            <a:ext cx="2286000" cy="2743200"/>
+            <a:off x="548640" y="274320"/>
+            <a:ext cx="9144000" cy="640080"/>
           </a:xfrm>
           <a:prstGeom prst="rect">
             <a:avLst/>
@@ -1681,64 +1667,43 @@
           <a:bodyPr wrap="square" rtlCol="0" anchor="ctr"/>
           <a:lstStyle/>
           <a:p>
-            <a:pPr algn="ctr" indent="0" marL="0">
+            <a:pPr indent="0" marL="0">
               <a:buNone/>
             </a:pPr>
             <a:r>
-              <a:rPr lang="en-US" sz="16000" b="1" dirty="0">
-                <a:solidFill>
-                  <a:srgbClr val="2A9D8F">
-                    <a:alpha val="80000"/>
-                  </a:srgbClr>
+              <a:rPr lang="en-US" sz="2400" b="1" dirty="0">
+                <a:solidFill>
+                  <a:srgbClr val="1B2A4A"/>
                 </a:solidFill>
                 <a:latin typeface="Georgia" pitchFamily="34" charset="0"/>
                 <a:ea typeface="Georgia" pitchFamily="34" charset="-122"/>
                 <a:cs typeface="Georgia" pitchFamily="34" charset="-120"/>
               </a:rPr>
-              <a:t>?</a:t>
-            </a:r>
-            <a:endParaRPr lang="en-US" sz="16000" dirty="0"/>
-          </a:p>
-        </p:txBody>
-      </p:sp>
-      <p:sp>
-        <p:nvSpPr>
-          <p:cNvPr id="4" name="Text 2"/>
-          <p:cNvSpPr/>
-          <p:nvPr/>
-        </p:nvSpPr>
-        <p:spPr>
-          <a:xfrm>
-            <a:off x="731520" y="548640"/>
-            <a:ext cx="2743200" cy="365760"/>
-          </a:xfrm>
-          <a:prstGeom prst="rect">
-            <a:avLst/>
-          </a:prstGeom>
-          <a:noFill/>
-          <a:ln/>
-        </p:spPr>
-        <p:txBody>
-          <a:bodyPr wrap="square" rtlCol="0" anchor="ctr"/>
-          <a:lstStyle/>
-          <a:p>
-            <a:pPr indent="0" marL="0">
-              <a:buNone/>
-            </a:pPr>
-            <a:r>
-              <a:rPr lang="en-US" sz="1200" b="1" spc="400" kern="0" dirty="0">
-                <a:solidFill>
-                  <a:srgbClr val="2A9D8F"/>
-                </a:solidFill>
-                <a:latin typeface="Calibri" pitchFamily="34" charset="0"/>
-                <a:ea typeface="Calibri" pitchFamily="34" charset="-122"/>
-                <a:cs typeface="Calibri" pitchFamily="34" charset="-120"/>
-              </a:rPr>
-              <a:t>INQUIRY</a:t>
-            </a:r>
-            <a:endParaRPr lang="en-US" sz="1200" dirty="0"/>
-          </a:p>
-        </p:txBody>
+              <a:t>Two Operations to Undo</a:t>
+            </a:r>
+            <a:endParaRPr lang="en-US" sz="2400" dirty="0"/>
+          </a:p>
+        </p:txBody>
+      </p:sp>
+      <p:sp>
+        <p:nvSpPr>
+          <p:cNvPr id="4" name="Shape 2"/>
+          <p:cNvSpPr/>
+          <p:nvPr/>
+        </p:nvSpPr>
+        <p:spPr>
+          <a:xfrm>
+            <a:off x="548640" y="960120"/>
+            <a:ext cx="2286000" cy="36576"/>
+          </a:xfrm>
+          <a:prstGeom prst="rect">
+            <a:avLst/>
+          </a:prstGeom>
+          <a:solidFill>
+            <a:srgbClr val="2A9D8F"/>
+          </a:solidFill>
+          <a:ln/>
+        </p:spPr>
       </p:sp>
       <p:sp>
         <p:nvSpPr>
@@ -1748,8 +1713,8 @@
         </p:nvSpPr>
         <p:spPr>
           <a:xfrm>
-            <a:off x="731520" y="1005840"/>
-            <a:ext cx="6858000" cy="1463040"/>
+            <a:off x="548640" y="1188720"/>
+            <a:ext cx="10058400" cy="3474720"/>
           </a:xfrm>
           <a:prstGeom prst="rect">
             <a:avLst/>
@@ -1761,204 +1726,114 @@
           <a:bodyPr wrap="square" rtlCol="0" anchor="t"/>
           <a:lstStyle/>
           <a:p>
-            <a:pPr indent="0" marL="0">
-              <a:buNone/>
-            </a:pPr>
-            <a:r>
-              <a:rPr lang="en-US" sz="2800" b="1" dirty="0">
-                <a:solidFill>
-                  <a:srgbClr val="FFFFFF"/>
-                </a:solidFill>
-                <a:latin typeface="Georgia" pitchFamily="34" charset="0"/>
-                <a:ea typeface="Georgia" pitchFamily="34" charset="-122"/>
-                <a:cs typeface="Georgia" pitchFamily="34" charset="-120"/>
-              </a:rPr>
-              <a:t>You spent ¥47 on lunch: a bowl of duck blood noodle soup for ¥20 and 3 baozi. How much was each baozi?</a:t>
-            </a:r>
-            <a:endParaRPr lang="en-US" sz="2800" dirty="0"/>
-          </a:p>
-        </p:txBody>
-      </p:sp>
-      <p:sp>
-        <p:nvSpPr>
-          <p:cNvPr id="6" name="Text 4"/>
-          <p:cNvSpPr/>
-          <p:nvPr/>
-        </p:nvSpPr>
-        <p:spPr>
-          <a:xfrm>
-            <a:off x="731520" y="2560320"/>
-            <a:ext cx="6858000" cy="548640"/>
-          </a:xfrm>
-          <a:prstGeom prst="rect">
-            <a:avLst/>
-          </a:prstGeom>
-          <a:noFill/>
-          <a:ln/>
-        </p:spPr>
-        <p:txBody>
-          <a:bodyPr wrap="square" rtlCol="0" anchor="ctr"/>
-          <a:lstStyle/>
-          <a:p>
-            <a:pPr indent="0" marL="0">
-              <a:buNone/>
-            </a:pPr>
-            <a:r>
-              <a:rPr lang="en-US" sz="1400" i="1" dirty="0">
-                <a:solidFill>
-                  <a:srgbClr val="9B9690"/>
-                </a:solidFill>
-                <a:latin typeface="Calibri" pitchFamily="34" charset="0"/>
-                <a:ea typeface="Calibri" pitchFamily="34" charset="-122"/>
-                <a:cs typeface="Calibri" pitchFamily="34" charset="-120"/>
-              </a:rPr>
-              <a:t>This needs TWO steps: first deal with the soup, then divide by the number of baozi.</a:t>
-            </a:r>
-            <a:endParaRPr lang="en-US" sz="1400" dirty="0"/>
-          </a:p>
-        </p:txBody>
-      </p:sp>
-      <p:sp>
-        <p:nvSpPr>
-          <p:cNvPr id="7" name="Shape 5"/>
-          <p:cNvSpPr/>
-          <p:nvPr/>
-        </p:nvSpPr>
-        <p:spPr>
-          <a:xfrm>
-            <a:off x="548640" y="3200400"/>
-            <a:ext cx="7315200" cy="1645920"/>
-          </a:xfrm>
-          <a:prstGeom prst="rect">
-            <a:avLst/>
-          </a:prstGeom>
-          <a:solidFill>
-            <a:srgbClr val="243660"/>
-          </a:solidFill>
-          <a:ln/>
-        </p:spPr>
-      </p:sp>
-      <p:sp>
-        <p:nvSpPr>
-          <p:cNvPr id="8" name="Text 6"/>
-          <p:cNvSpPr/>
-          <p:nvPr/>
-        </p:nvSpPr>
-        <p:spPr>
-          <a:xfrm>
-            <a:off x="731520" y="3246120"/>
-            <a:ext cx="3657600" cy="320040"/>
-          </a:xfrm>
-          <a:prstGeom prst="rect">
-            <a:avLst/>
-          </a:prstGeom>
-          <a:noFill/>
-          <a:ln/>
-        </p:spPr>
-        <p:txBody>
-          <a:bodyPr wrap="square" rtlCol="0" anchor="ctr"/>
-          <a:lstStyle/>
-          <a:p>
-            <a:pPr indent="0" marL="0">
-              <a:buNone/>
-            </a:pPr>
-            <a:r>
-              <a:rPr lang="en-US" sz="1100" b="1" spc="200" kern="0" dirty="0">
-                <a:solidFill>
-                  <a:srgbClr val="2A9D8F"/>
-                </a:solidFill>
-                <a:latin typeface="Calibri" pitchFamily="34" charset="0"/>
-                <a:ea typeface="Calibri" pitchFamily="34" charset="-122"/>
-                <a:cs typeface="Calibri" pitchFamily="34" charset="-120"/>
-              </a:rPr>
-              <a:t>Think — Pair — Share</a:t>
-            </a:r>
-            <a:endParaRPr lang="en-US" sz="1100" dirty="0"/>
-          </a:p>
-        </p:txBody>
-      </p:sp>
-      <p:sp>
-        <p:nvSpPr>
-          <p:cNvPr id="9" name="Text 7"/>
-          <p:cNvSpPr/>
-          <p:nvPr/>
-        </p:nvSpPr>
-        <p:spPr>
-          <a:xfrm>
-            <a:off x="731520" y="3566160"/>
-            <a:ext cx="6949440" cy="1188720"/>
-          </a:xfrm>
-          <a:prstGeom prst="rect">
-            <a:avLst/>
-          </a:prstGeom>
-          <a:noFill/>
-          <a:ln/>
-        </p:spPr>
-        <p:txBody>
-          <a:bodyPr wrap="square" rtlCol="0" anchor="ctr"/>
-          <a:lstStyle/>
-          <a:p>
-            <a:pPr marL="342900" indent="-342900">
+            <a:pPr>
+              <a:lnSpc>
+                <a:spcPct val="150000"/>
+              </a:lnSpc>
               <a:spcAft>
                 <a:spcPts val="600"/>
               </a:spcAft>
-              <a:buSzPct val="100000"/>
-              <a:buChar char="•"/>
-            </a:pPr>
-            <a:r>
-              <a:rPr lang="en-US" sz="1400" dirty="0">
-                <a:solidFill>
-                  <a:srgbClr val="E5E2DC"/>
-                </a:solidFill>
-                <a:latin typeface="Calibri" pitchFamily="34" charset="0"/>
-                <a:ea typeface="Calibri" pitchFamily="34" charset="-122"/>
-                <a:cs typeface="Calibri" pitchFamily="34" charset="-120"/>
-              </a:rPr>
-              <a:t>Can you write this as an equation? (20 + 3b = 47)</a:t>
-            </a:r>
-            <a:endParaRPr lang="en-US" sz="1400" dirty="0"/>
-          </a:p>
-          <a:p>
-            <a:pPr marL="342900" indent="-342900">
+            </a:pPr>
+            <a:r>
+              <a:rPr lang="en-US" sz="1500" dirty="0">
+                <a:solidFill>
+                  <a:srgbClr val="3D3A36"/>
+                </a:solidFill>
+                <a:latin typeface="Arial" pitchFamily="34" charset="0"/>
+                <a:ea typeface="Arial" pitchFamily="34" charset="-122"/>
+                <a:cs typeface="Arial" pitchFamily="34" charset="-120"/>
+              </a:rPr>
+              <a:t>A two-step equation has TWO operations to reverse.</a:t>
+            </a:r>
+            <a:endParaRPr lang="en-US" sz="1500" dirty="0"/>
+          </a:p>
+          <a:p>
+            <a:pPr>
+              <a:lnSpc>
+                <a:spcPct val="150000"/>
+              </a:lnSpc>
               <a:spcAft>
                 <a:spcPts val="600"/>
               </a:spcAft>
-              <a:buSzPct val="100000"/>
-              <a:buChar char="•"/>
-            </a:pPr>
-            <a:r>
-              <a:rPr lang="en-US" sz="1400" dirty="0">
-                <a:solidFill>
-                  <a:srgbClr val="E5E2DC"/>
-                </a:solidFill>
-                <a:latin typeface="Calibri" pitchFamily="34" charset="0"/>
-                <a:ea typeface="Calibri" pitchFamily="34" charset="-122"/>
-                <a:cs typeface="Calibri" pitchFamily="34" charset="-120"/>
-              </a:rPr>
-              <a:t>Which part do you 'undo' first?</a:t>
-            </a:r>
-            <a:endParaRPr lang="en-US" sz="1400" dirty="0"/>
-          </a:p>
-          <a:p>
-            <a:pPr marL="342900" indent="-342900">
+            </a:pPr>
+            <a:r>
+              <a:rPr lang="en-US" sz="1500" dirty="0">
+                <a:solidFill>
+                  <a:srgbClr val="3D3A36"/>
+                </a:solidFill>
+                <a:latin typeface="Arial" pitchFamily="34" charset="0"/>
+                <a:ea typeface="Arial" pitchFamily="34" charset="-122"/>
+                <a:cs typeface="Arial" pitchFamily="34" charset="-120"/>
+              </a:rPr>
+              <a:t>Example: 3x + 5 = 20.</a:t>
+            </a:r>
+            <a:endParaRPr lang="en-US" sz="1500" dirty="0"/>
+          </a:p>
+          <a:p>
+            <a:pPr>
+              <a:lnSpc>
+                <a:spcPct val="150000"/>
+              </a:lnSpc>
               <a:spcAft>
                 <a:spcPts val="600"/>
               </a:spcAft>
-              <a:buSzPct val="100000"/>
-              <a:buChar char="•"/>
-            </a:pPr>
-            <a:r>
-              <a:rPr lang="en-US" sz="1400" dirty="0">
-                <a:solidFill>
-                  <a:srgbClr val="E5E2DC"/>
-                </a:solidFill>
-                <a:latin typeface="Calibri" pitchFamily="34" charset="0"/>
-                <a:ea typeface="Calibri" pitchFamily="34" charset="-122"/>
-                <a:cs typeface="Calibri" pitchFamily="34" charset="-120"/>
-              </a:rPr>
-              <a:t>Why can't you divide by 3 first?</a:t>
-            </a:r>
-            <a:endParaRPr lang="en-US" sz="1400" dirty="0"/>
+            </a:pPr>
+            <a:r>
+              <a:rPr lang="en-US" sz="1500" dirty="0">
+                <a:solidFill>
+                  <a:srgbClr val="3D3A36"/>
+                </a:solidFill>
+                <a:latin typeface="Arial" pitchFamily="34" charset="0"/>
+                <a:ea typeface="Arial" pitchFamily="34" charset="-122"/>
+                <a:cs typeface="Arial" pitchFamily="34" charset="-120"/>
+              </a:rPr>
+              <a:t>Step 1: Undo the addition → subtract 5 from both sides → 3x = 15.</a:t>
+            </a:r>
+            <a:endParaRPr lang="en-US" sz="1500" dirty="0"/>
+          </a:p>
+          <a:p>
+            <a:pPr>
+              <a:lnSpc>
+                <a:spcPct val="150000"/>
+              </a:lnSpc>
+              <a:spcAft>
+                <a:spcPts val="600"/>
+              </a:spcAft>
+            </a:pPr>
+            <a:r>
+              <a:rPr lang="en-US" sz="1500" dirty="0">
+                <a:solidFill>
+                  <a:srgbClr val="3D3A36"/>
+                </a:solidFill>
+                <a:latin typeface="Arial" pitchFamily="34" charset="0"/>
+                <a:ea typeface="Arial" pitchFamily="34" charset="-122"/>
+                <a:cs typeface="Arial" pitchFamily="34" charset="-120"/>
+              </a:rPr>
+              <a:t>Step 2: Undo the multiplication → divide both by 3 → x = 5.</a:t>
+            </a:r>
+            <a:endParaRPr lang="en-US" sz="1500" dirty="0"/>
+          </a:p>
+          <a:p>
+            <a:pPr>
+              <a:lnSpc>
+                <a:spcPct val="150000"/>
+              </a:lnSpc>
+              <a:spcAft>
+                <a:spcPts val="600"/>
+              </a:spcAft>
+            </a:pPr>
+            <a:r>
+              <a:rPr lang="en-US" sz="1500" dirty="0">
+                <a:solidFill>
+                  <a:srgbClr val="3D3A36"/>
+                </a:solidFill>
+                <a:latin typeface="Arial" pitchFamily="34" charset="0"/>
+                <a:ea typeface="Arial" pitchFamily="34" charset="-122"/>
+                <a:cs typeface="Arial" pitchFamily="34" charset="-120"/>
+              </a:rPr>
+              <a:t>Rule: undo addition/subtraction FIRST, then multiplication/division.</a:t>
+            </a:r>
+            <a:endParaRPr lang="en-US" sz="1500" dirty="0"/>
           </a:p>
         </p:txBody>
       </p:sp>
@@ -2003,27 +1878,7 @@
         <p:spPr>
           <a:xfrm>
             <a:off x="0" y="0"/>
-            <a:ext cx="9144000" cy="822960"/>
-          </a:xfrm>
-          <a:prstGeom prst="rect">
-            <a:avLst/>
-          </a:prstGeom>
-          <a:solidFill>
-            <a:srgbClr val="FFFFFF"/>
-          </a:solidFill>
-          <a:ln/>
-        </p:spPr>
-      </p:sp>
-      <p:sp>
-        <p:nvSpPr>
-          <p:cNvPr id="3" name="Shape 1"/>
-          <p:cNvSpPr/>
-          <p:nvPr/>
-        </p:nvSpPr>
-        <p:spPr>
-          <a:xfrm>
-            <a:off x="0" y="795528"/>
-            <a:ext cx="9144000" cy="27432"/>
+            <a:ext cx="73152" cy="5148072"/>
           </a:xfrm>
           <a:prstGeom prst="rect">
             <a:avLst/>
@@ -2036,30 +1891,91 @@
       </p:sp>
       <p:sp>
         <p:nvSpPr>
+          <p:cNvPr id="3" name="Shape 1"/>
+          <p:cNvSpPr/>
+          <p:nvPr/>
+        </p:nvSpPr>
+        <p:spPr>
+          <a:xfrm>
+            <a:off x="548640" y="274320"/>
+            <a:ext cx="2011680" cy="320040"/>
+          </a:xfrm>
+          <a:prstGeom prst="roundRect">
+            <a:avLst>
+              <a:gd name="adj" fmla="val 17143"/>
+            </a:avLst>
+          </a:prstGeom>
+          <a:solidFill>
+            <a:srgbClr val="2A9D8F"/>
+          </a:solidFill>
+          <a:ln/>
+        </p:spPr>
+      </p:sp>
+      <p:sp>
+        <p:nvSpPr>
           <p:cNvPr id="4" name="Text 2"/>
           <p:cNvSpPr/>
           <p:nvPr/>
         </p:nvSpPr>
         <p:spPr>
           <a:xfrm>
-            <a:off x="640080" y="91440"/>
-            <a:ext cx="7863840" cy="640080"/>
-          </a:xfrm>
-          <a:prstGeom prst="rect">
-            <a:avLst/>
-          </a:prstGeom>
-          <a:noFill/>
-          <a:ln/>
-        </p:spPr>
-        <p:txBody>
-          <a:bodyPr wrap="square" lIns="0" tIns="0" rIns="0" bIns="0" rtlCol="0" anchor="ctr"/>
+            <a:off x="548640" y="274320"/>
+            <a:ext cx="2011680" cy="320040"/>
+          </a:xfrm>
+          <a:prstGeom prst="rect">
+            <a:avLst/>
+          </a:prstGeom>
+          <a:noFill/>
+          <a:ln/>
+        </p:spPr>
+        <p:txBody>
+          <a:bodyPr wrap="square" rtlCol="0" anchor="ctr"/>
+          <a:lstStyle/>
+          <a:p>
+            <a:pPr algn="ctr" indent="0" marL="0">
+              <a:buNone/>
+            </a:pPr>
+            <a:r>
+              <a:rPr lang="en-US" sz="1000" b="1" dirty="0">
+                <a:solidFill>
+                  <a:srgbClr val="FFFFFF"/>
+                </a:solidFill>
+                <a:latin typeface="Arial" pitchFamily="34" charset="0"/>
+                <a:ea typeface="Arial" pitchFamily="34" charset="-122"/>
+                <a:cs typeface="Arial" pitchFamily="34" charset="-120"/>
+              </a:rPr>
+              <a:t>WORKED EXAMPLE</a:t>
+            </a:r>
+            <a:endParaRPr lang="en-US" sz="1000" dirty="0"/>
+          </a:p>
+        </p:txBody>
+      </p:sp>
+      <p:sp>
+        <p:nvSpPr>
+          <p:cNvPr id="5" name="Text 3"/>
+          <p:cNvSpPr/>
+          <p:nvPr/>
+        </p:nvSpPr>
+        <p:spPr>
+          <a:xfrm>
+            <a:off x="2743200" y="274320"/>
+            <a:ext cx="7315200" cy="457200"/>
+          </a:xfrm>
+          <a:prstGeom prst="rect">
+            <a:avLst/>
+          </a:prstGeom>
+          <a:noFill/>
+          <a:ln/>
+        </p:spPr>
+        <p:txBody>
+          <a:bodyPr wrap="square" rtlCol="0" anchor="ctr"/>
           <a:lstStyle/>
           <a:p>
             <a:pPr indent="0" marL="0">
               <a:buNone/>
             </a:pPr>
             <a:r>
-              <a:rPr lang="en-US" sz="2200" b="1" dirty="0">
+              <a:rPr lang="en-US" sz="2000" b="1" dirty="0">
                 <a:solidFill>
                   <a:srgbClr val="1B2A4A"/>
                 </a:solidFill>
@@ -2067,22 +1983,42 @@
                 <a:ea typeface="Georgia" pitchFamily="34" charset="-122"/>
                 <a:cs typeface="Georgia" pitchFamily="34" charset="-120"/>
               </a:rPr>
-              <a:t>Two Steps, Two Inverses</a:t>
-            </a:r>
-            <a:endParaRPr lang="en-US" sz="2200" dirty="0"/>
-          </a:p>
-        </p:txBody>
-      </p:sp>
-      <p:sp>
-        <p:nvSpPr>
-          <p:cNvPr id="5" name="Text 3"/>
-          <p:cNvSpPr/>
-          <p:nvPr/>
-        </p:nvSpPr>
-        <p:spPr>
-          <a:xfrm>
-            <a:off x="640080" y="1005840"/>
-            <a:ext cx="7863840" cy="2926080"/>
+              <a:t>Solve: 4x − 7 = 13</a:t>
+            </a:r>
+            <a:endParaRPr lang="en-US" sz="2000" dirty="0"/>
+          </a:p>
+        </p:txBody>
+      </p:sp>
+      <p:sp>
+        <p:nvSpPr>
+          <p:cNvPr id="6" name="Shape 4"/>
+          <p:cNvSpPr/>
+          <p:nvPr/>
+        </p:nvSpPr>
+        <p:spPr>
+          <a:xfrm>
+            <a:off x="548640" y="1051560"/>
+            <a:ext cx="365760" cy="365760"/>
+          </a:xfrm>
+          <a:prstGeom prst="ellipse">
+            <a:avLst/>
+          </a:prstGeom>
+          <a:solidFill>
+            <a:srgbClr val="111D35"/>
+          </a:solidFill>
+          <a:ln/>
+        </p:spPr>
+      </p:sp>
+      <p:sp>
+        <p:nvSpPr>
+          <p:cNvPr id="7" name="Text 5"/>
+          <p:cNvSpPr/>
+          <p:nvPr/>
+        </p:nvSpPr>
+        <p:spPr>
+          <a:xfrm>
+            <a:off x="548640" y="1051560"/>
+            <a:ext cx="365760" cy="365760"/>
           </a:xfrm>
           <a:prstGeom prst="rect">
             <a:avLst/>
@@ -2094,151 +2030,369 @@
           <a:bodyPr wrap="square" rtlCol="0" anchor="ctr"/>
           <a:lstStyle/>
           <a:p>
-            <a:pPr marL="342900" indent="-342900">
-              <a:spcAft>
-                <a:spcPts val="800"/>
-              </a:spcAft>
-              <a:buSzPct val="100000"/>
-              <a:buChar char="•"/>
-            </a:pPr>
-            <a:r>
-              <a:rPr lang="en-US" sz="1600" dirty="0">
+            <a:pPr algn="ctr" indent="0" marL="0">
+              <a:buNone/>
+            </a:pPr>
+            <a:r>
+              <a:rPr lang="en-US" sz="1300" b="1" dirty="0">
+                <a:solidFill>
+                  <a:srgbClr val="FFFFFF"/>
+                </a:solidFill>
+                <a:latin typeface="Arial" pitchFamily="34" charset="0"/>
+                <a:ea typeface="Arial" pitchFamily="34" charset="-122"/>
+                <a:cs typeface="Arial" pitchFamily="34" charset="-120"/>
+              </a:rPr>
+              <a:t>1</a:t>
+            </a:r>
+            <a:endParaRPr lang="en-US" sz="1300" dirty="0"/>
+          </a:p>
+        </p:txBody>
+      </p:sp>
+      <p:sp>
+        <p:nvSpPr>
+          <p:cNvPr id="8" name="Text 6"/>
+          <p:cNvSpPr/>
+          <p:nvPr/>
+        </p:nvSpPr>
+        <p:spPr>
+          <a:xfrm>
+            <a:off x="1097280" y="1005840"/>
+            <a:ext cx="9601200" cy="502920"/>
+          </a:xfrm>
+          <a:prstGeom prst="rect">
+            <a:avLst/>
+          </a:prstGeom>
+          <a:noFill/>
+          <a:ln/>
+        </p:spPr>
+        <p:txBody>
+          <a:bodyPr wrap="square" rtlCol="0" anchor="ctr"/>
+          <a:lstStyle/>
+          <a:p>
+            <a:pPr indent="0" marL="0">
+              <a:buNone/>
+            </a:pPr>
+            <a:r>
+              <a:rPr lang="en-US" sz="1500" dirty="0">
                 <a:solidFill>
                   <a:srgbClr val="3D3A36"/>
                 </a:solidFill>
-                <a:latin typeface="Calibri" pitchFamily="34" charset="0"/>
-                <a:ea typeface="Calibri" pitchFamily="34" charset="-122"/>
-                <a:cs typeface="Calibri" pitchFamily="34" charset="-120"/>
-              </a:rPr>
-              <a:t>Example: 3x + 5 = 20</a:t>
-            </a:r>
-            <a:endParaRPr lang="en-US" sz="1600" dirty="0"/>
-          </a:p>
-          <a:p>
-            <a:pPr marL="342900" indent="-342900">
-              <a:spcAft>
-                <a:spcPts val="800"/>
-              </a:spcAft>
-              <a:buSzPct val="100000"/>
-              <a:buChar char="•"/>
-            </a:pPr>
-            <a:r>
-              <a:rPr lang="en-US" sz="1600" dirty="0">
+                <a:latin typeface="Arial" pitchFamily="34" charset="0"/>
+                <a:ea typeface="Arial" pitchFamily="34" charset="-122"/>
+                <a:cs typeface="Arial" pitchFamily="34" charset="-120"/>
+              </a:rPr>
+              <a:t>Step 1: Add 7 to both sides (undo the −7).</a:t>
+            </a:r>
+            <a:endParaRPr lang="en-US" sz="1500" dirty="0"/>
+          </a:p>
+        </p:txBody>
+      </p:sp>
+      <p:sp>
+        <p:nvSpPr>
+          <p:cNvPr id="9" name="Shape 7"/>
+          <p:cNvSpPr/>
+          <p:nvPr/>
+        </p:nvSpPr>
+        <p:spPr>
+          <a:xfrm>
+            <a:off x="548640" y="1783080"/>
+            <a:ext cx="365760" cy="365760"/>
+          </a:xfrm>
+          <a:prstGeom prst="ellipse">
+            <a:avLst/>
+          </a:prstGeom>
+          <a:solidFill>
+            <a:srgbClr val="111D35"/>
+          </a:solidFill>
+          <a:ln/>
+        </p:spPr>
+      </p:sp>
+      <p:sp>
+        <p:nvSpPr>
+          <p:cNvPr id="10" name="Text 8"/>
+          <p:cNvSpPr/>
+          <p:nvPr/>
+        </p:nvSpPr>
+        <p:spPr>
+          <a:xfrm>
+            <a:off x="548640" y="1783080"/>
+            <a:ext cx="365760" cy="365760"/>
+          </a:xfrm>
+          <a:prstGeom prst="rect">
+            <a:avLst/>
+          </a:prstGeom>
+          <a:noFill/>
+          <a:ln/>
+        </p:spPr>
+        <p:txBody>
+          <a:bodyPr wrap="square" rtlCol="0" anchor="ctr"/>
+          <a:lstStyle/>
+          <a:p>
+            <a:pPr algn="ctr" indent="0" marL="0">
+              <a:buNone/>
+            </a:pPr>
+            <a:r>
+              <a:rPr lang="en-US" sz="1300" b="1" dirty="0">
+                <a:solidFill>
+                  <a:srgbClr val="FFFFFF"/>
+                </a:solidFill>
+                <a:latin typeface="Arial" pitchFamily="34" charset="0"/>
+                <a:ea typeface="Arial" pitchFamily="34" charset="-122"/>
+                <a:cs typeface="Arial" pitchFamily="34" charset="-120"/>
+              </a:rPr>
+              <a:t>2</a:t>
+            </a:r>
+            <a:endParaRPr lang="en-US" sz="1300" dirty="0"/>
+          </a:p>
+        </p:txBody>
+      </p:sp>
+      <p:sp>
+        <p:nvSpPr>
+          <p:cNvPr id="11" name="Text 9"/>
+          <p:cNvSpPr/>
+          <p:nvPr/>
+        </p:nvSpPr>
+        <p:spPr>
+          <a:xfrm>
+            <a:off x="1097280" y="1737360"/>
+            <a:ext cx="9601200" cy="502920"/>
+          </a:xfrm>
+          <a:prstGeom prst="rect">
+            <a:avLst/>
+          </a:prstGeom>
+          <a:noFill/>
+          <a:ln/>
+        </p:spPr>
+        <p:txBody>
+          <a:bodyPr wrap="square" rtlCol="0" anchor="ctr"/>
+          <a:lstStyle/>
+          <a:p>
+            <a:pPr indent="0" marL="0">
+              <a:buNone/>
+            </a:pPr>
+            <a:r>
+              <a:rPr lang="en-US" sz="1500" dirty="0">
                 <a:solidFill>
                   <a:srgbClr val="3D3A36"/>
                 </a:solidFill>
-                <a:latin typeface="Calibri" pitchFamily="34" charset="0"/>
-                <a:ea typeface="Calibri" pitchFamily="34" charset="-122"/>
-                <a:cs typeface="Calibri" pitchFamily="34" charset="-120"/>
-              </a:rPr>
-              <a:t>Step 1: Undo the +5 → 3x = 15</a:t>
-            </a:r>
-            <a:endParaRPr lang="en-US" sz="1600" dirty="0"/>
-          </a:p>
-          <a:p>
-            <a:pPr marL="342900" indent="-342900">
-              <a:spcAft>
-                <a:spcPts val="800"/>
-              </a:spcAft>
-              <a:buSzPct val="100000"/>
-              <a:buChar char="•"/>
-            </a:pPr>
-            <a:r>
-              <a:rPr lang="en-US" sz="1600" dirty="0">
+                <a:latin typeface="Arial" pitchFamily="34" charset="0"/>
+                <a:ea typeface="Arial" pitchFamily="34" charset="-122"/>
+                <a:cs typeface="Arial" pitchFamily="34" charset="-120"/>
+              </a:rPr>
+              <a:t>4x = 13 + 7 = 20.</a:t>
+            </a:r>
+            <a:endParaRPr lang="en-US" sz="1500" dirty="0"/>
+          </a:p>
+        </p:txBody>
+      </p:sp>
+      <p:sp>
+        <p:nvSpPr>
+          <p:cNvPr id="12" name="Shape 10"/>
+          <p:cNvSpPr/>
+          <p:nvPr/>
+        </p:nvSpPr>
+        <p:spPr>
+          <a:xfrm>
+            <a:off x="548640" y="2514600"/>
+            <a:ext cx="365760" cy="365760"/>
+          </a:xfrm>
+          <a:prstGeom prst="ellipse">
+            <a:avLst/>
+          </a:prstGeom>
+          <a:solidFill>
+            <a:srgbClr val="111D35"/>
+          </a:solidFill>
+          <a:ln/>
+        </p:spPr>
+      </p:sp>
+      <p:sp>
+        <p:nvSpPr>
+          <p:cNvPr id="13" name="Text 11"/>
+          <p:cNvSpPr/>
+          <p:nvPr/>
+        </p:nvSpPr>
+        <p:spPr>
+          <a:xfrm>
+            <a:off x="548640" y="2514600"/>
+            <a:ext cx="365760" cy="365760"/>
+          </a:xfrm>
+          <a:prstGeom prst="rect">
+            <a:avLst/>
+          </a:prstGeom>
+          <a:noFill/>
+          <a:ln/>
+        </p:spPr>
+        <p:txBody>
+          <a:bodyPr wrap="square" rtlCol="0" anchor="ctr"/>
+          <a:lstStyle/>
+          <a:p>
+            <a:pPr algn="ctr" indent="0" marL="0">
+              <a:buNone/>
+            </a:pPr>
+            <a:r>
+              <a:rPr lang="en-US" sz="1300" b="1" dirty="0">
+                <a:solidFill>
+                  <a:srgbClr val="FFFFFF"/>
+                </a:solidFill>
+                <a:latin typeface="Arial" pitchFamily="34" charset="0"/>
+                <a:ea typeface="Arial" pitchFamily="34" charset="-122"/>
+                <a:cs typeface="Arial" pitchFamily="34" charset="-120"/>
+              </a:rPr>
+              <a:t>3</a:t>
+            </a:r>
+            <a:endParaRPr lang="en-US" sz="1300" dirty="0"/>
+          </a:p>
+        </p:txBody>
+      </p:sp>
+      <p:sp>
+        <p:nvSpPr>
+          <p:cNvPr id="14" name="Text 12"/>
+          <p:cNvSpPr/>
+          <p:nvPr/>
+        </p:nvSpPr>
+        <p:spPr>
+          <a:xfrm>
+            <a:off x="1097280" y="2468880"/>
+            <a:ext cx="9601200" cy="502920"/>
+          </a:xfrm>
+          <a:prstGeom prst="rect">
+            <a:avLst/>
+          </a:prstGeom>
+          <a:noFill/>
+          <a:ln/>
+        </p:spPr>
+        <p:txBody>
+          <a:bodyPr wrap="square" rtlCol="0" anchor="ctr"/>
+          <a:lstStyle/>
+          <a:p>
+            <a:pPr indent="0" marL="0">
+              <a:buNone/>
+            </a:pPr>
+            <a:r>
+              <a:rPr lang="en-US" sz="1500" dirty="0">
                 <a:solidFill>
                   <a:srgbClr val="3D3A36"/>
                 </a:solidFill>
-                <a:latin typeface="Calibri" pitchFamily="34" charset="0"/>
-                <a:ea typeface="Calibri" pitchFamily="34" charset="-122"/>
-                <a:cs typeface="Calibri" pitchFamily="34" charset="-120"/>
-              </a:rPr>
-              <a:t>Step 2: Undo the ×3 → x = 5</a:t>
-            </a:r>
-            <a:endParaRPr lang="en-US" sz="1600" dirty="0"/>
-          </a:p>
-          <a:p>
-            <a:pPr marL="342900" indent="-342900">
-              <a:spcAft>
-                <a:spcPts val="800"/>
-              </a:spcAft>
-              <a:buSzPct val="100000"/>
-              <a:buChar char="•"/>
-            </a:pPr>
-            <a:r>
-              <a:rPr lang="en-US" sz="1600" dirty="0">
+                <a:latin typeface="Arial" pitchFamily="34" charset="0"/>
+                <a:ea typeface="Arial" pitchFamily="34" charset="-122"/>
+                <a:cs typeface="Arial" pitchFamily="34" charset="-120"/>
+              </a:rPr>
+              <a:t>Step 2: Divide both sides by 4 (undo the ×4).</a:t>
+            </a:r>
+            <a:endParaRPr lang="en-US" sz="1500" dirty="0"/>
+          </a:p>
+        </p:txBody>
+      </p:sp>
+      <p:sp>
+        <p:nvSpPr>
+          <p:cNvPr id="15" name="Shape 13"/>
+          <p:cNvSpPr/>
+          <p:nvPr/>
+        </p:nvSpPr>
+        <p:spPr>
+          <a:xfrm>
+            <a:off x="548640" y="3246120"/>
+            <a:ext cx="365760" cy="365760"/>
+          </a:xfrm>
+          <a:prstGeom prst="ellipse">
+            <a:avLst/>
+          </a:prstGeom>
+          <a:solidFill>
+            <a:srgbClr val="111D35"/>
+          </a:solidFill>
+          <a:ln/>
+        </p:spPr>
+      </p:sp>
+      <p:sp>
+        <p:nvSpPr>
+          <p:cNvPr id="16" name="Text 14"/>
+          <p:cNvSpPr/>
+          <p:nvPr/>
+        </p:nvSpPr>
+        <p:spPr>
+          <a:xfrm>
+            <a:off x="548640" y="3246120"/>
+            <a:ext cx="365760" cy="365760"/>
+          </a:xfrm>
+          <a:prstGeom prst="rect">
+            <a:avLst/>
+          </a:prstGeom>
+          <a:noFill/>
+          <a:ln/>
+        </p:spPr>
+        <p:txBody>
+          <a:bodyPr wrap="square" rtlCol="0" anchor="ctr"/>
+          <a:lstStyle/>
+          <a:p>
+            <a:pPr algn="ctr" indent="0" marL="0">
+              <a:buNone/>
+            </a:pPr>
+            <a:r>
+              <a:rPr lang="en-US" sz="1300" b="1" dirty="0">
+                <a:solidFill>
+                  <a:srgbClr val="FFFFFF"/>
+                </a:solidFill>
+                <a:latin typeface="Arial" pitchFamily="34" charset="0"/>
+                <a:ea typeface="Arial" pitchFamily="34" charset="-122"/>
+                <a:cs typeface="Arial" pitchFamily="34" charset="-120"/>
+              </a:rPr>
+              <a:t>4</a:t>
+            </a:r>
+            <a:endParaRPr lang="en-US" sz="1300" dirty="0"/>
+          </a:p>
+        </p:txBody>
+      </p:sp>
+      <p:sp>
+        <p:nvSpPr>
+          <p:cNvPr id="17" name="Text 15"/>
+          <p:cNvSpPr/>
+          <p:nvPr/>
+        </p:nvSpPr>
+        <p:spPr>
+          <a:xfrm>
+            <a:off x="1097280" y="3200400"/>
+            <a:ext cx="9601200" cy="502920"/>
+          </a:xfrm>
+          <a:prstGeom prst="rect">
+            <a:avLst/>
+          </a:prstGeom>
+          <a:noFill/>
+          <a:ln/>
+        </p:spPr>
+        <p:txBody>
+          <a:bodyPr wrap="square" rtlCol="0" anchor="ctr"/>
+          <a:lstStyle/>
+          <a:p>
+            <a:pPr indent="0" marL="0">
+              <a:buNone/>
+            </a:pPr>
+            <a:r>
+              <a:rPr lang="en-US" sz="1500" dirty="0">
                 <a:solidFill>
                   <a:srgbClr val="3D3A36"/>
                 </a:solidFill>
-                <a:latin typeface="Calibri" pitchFamily="34" charset="0"/>
-                <a:ea typeface="Calibri" pitchFamily="34" charset="-122"/>
-                <a:cs typeface="Calibri" pitchFamily="34" charset="-120"/>
-              </a:rPr>
-              <a:t>Rule: deal with + or − FIRST, then × or ÷</a:t>
-            </a:r>
-            <a:endParaRPr lang="en-US" sz="1600" dirty="0"/>
-          </a:p>
-          <a:p>
-            <a:pPr marL="342900" indent="-342900">
-              <a:spcAft>
-                <a:spcPts val="800"/>
-              </a:spcAft>
-              <a:buSzPct val="100000"/>
-              <a:buChar char="•"/>
-            </a:pPr>
-            <a:r>
-              <a:rPr lang="en-US" sz="1600" dirty="0">
-                <a:solidFill>
-                  <a:srgbClr val="3D3A36"/>
-                </a:solidFill>
-                <a:latin typeface="Calibri" pitchFamily="34" charset="0"/>
-                <a:ea typeface="Calibri" pitchFamily="34" charset="-122"/>
-                <a:cs typeface="Calibri" pitchFamily="34" charset="-120"/>
-              </a:rPr>
-              <a:t>Think of it as reverse BIDMAS!</a:t>
-            </a:r>
-            <a:endParaRPr lang="en-US" sz="1600" dirty="0"/>
-          </a:p>
-        </p:txBody>
-      </p:sp>
-      <p:sp>
-        <p:nvSpPr>
-          <p:cNvPr id="6" name="Shape 4"/>
-          <p:cNvSpPr/>
-          <p:nvPr/>
-        </p:nvSpPr>
-        <p:spPr>
-          <a:xfrm>
-            <a:off x="640080" y="4114800"/>
-            <a:ext cx="7863840" cy="731520"/>
-          </a:xfrm>
-          <a:prstGeom prst="rect">
-            <a:avLst/>
-          </a:prstGeom>
-          <a:solidFill>
-            <a:srgbClr val="E8F5F3"/>
-          </a:solidFill>
-          <a:ln/>
-          <a:effectLst>
-            <a:outerShdw sx="100000" sy="100000" kx="0" ky="0" algn="bl" rotWithShape="0" blurRad="76200" dist="25400" dir="8100000">
-              <a:srgbClr val="000000">
-                <a:alpha val="12000"/>
-              </a:srgbClr>
-            </a:outerShdw>
-          </a:effectLst>
-        </p:spPr>
-      </p:sp>
-      <p:sp>
-        <p:nvSpPr>
-          <p:cNvPr id="7" name="Shape 5"/>
-          <p:cNvSpPr/>
-          <p:nvPr/>
-        </p:nvSpPr>
-        <p:spPr>
-          <a:xfrm>
-            <a:off x="640080" y="4114800"/>
-            <a:ext cx="64008" cy="731520"/>
-          </a:xfrm>
-          <a:prstGeom prst="rect">
+                <a:latin typeface="Arial" pitchFamily="34" charset="0"/>
+                <a:ea typeface="Arial" pitchFamily="34" charset="-122"/>
+                <a:cs typeface="Arial" pitchFamily="34" charset="-120"/>
+              </a:rPr>
+              <a:t>x = 20 ÷ 4 = 5.</a:t>
+            </a:r>
+            <a:endParaRPr lang="en-US" sz="1500" dirty="0"/>
+          </a:p>
+        </p:txBody>
+      </p:sp>
+      <p:sp>
+        <p:nvSpPr>
+          <p:cNvPr id="18" name="Shape 16"/>
+          <p:cNvSpPr/>
+          <p:nvPr/>
+        </p:nvSpPr>
+        <p:spPr>
+          <a:xfrm>
+            <a:off x="548640" y="3977640"/>
+            <a:ext cx="365760" cy="365760"/>
+          </a:xfrm>
+          <a:prstGeom prst="ellipse">
             <a:avLst/>
           </a:prstGeom>
           <a:solidFill>
@@ -2249,14 +2403,53 @@
       </p:sp>
       <p:sp>
         <p:nvSpPr>
-          <p:cNvPr id="8" name="Text 6"/>
-          <p:cNvSpPr/>
-          <p:nvPr/>
-        </p:nvSpPr>
-        <p:spPr>
-          <a:xfrm>
-            <a:off x="914400" y="4160520"/>
-            <a:ext cx="7406640" cy="640080"/>
+          <p:cNvPr id="19" name="Text 17"/>
+          <p:cNvSpPr/>
+          <p:nvPr/>
+        </p:nvSpPr>
+        <p:spPr>
+          <a:xfrm>
+            <a:off x="548640" y="3977640"/>
+            <a:ext cx="365760" cy="365760"/>
+          </a:xfrm>
+          <a:prstGeom prst="rect">
+            <a:avLst/>
+          </a:prstGeom>
+          <a:noFill/>
+          <a:ln/>
+        </p:spPr>
+        <p:txBody>
+          <a:bodyPr wrap="square" rtlCol="0" anchor="ctr"/>
+          <a:lstStyle/>
+          <a:p>
+            <a:pPr algn="ctr" indent="0" marL="0">
+              <a:buNone/>
+            </a:pPr>
+            <a:r>
+              <a:rPr lang="en-US" sz="1300" b="1" dirty="0">
+                <a:solidFill>
+                  <a:srgbClr val="FFFFFF"/>
+                </a:solidFill>
+                <a:latin typeface="Arial" pitchFamily="34" charset="0"/>
+                <a:ea typeface="Arial" pitchFamily="34" charset="-122"/>
+                <a:cs typeface="Arial" pitchFamily="34" charset="-120"/>
+              </a:rPr>
+              <a:t>5</a:t>
+            </a:r>
+            <a:endParaRPr lang="en-US" sz="1300" dirty="0"/>
+          </a:p>
+        </p:txBody>
+      </p:sp>
+      <p:sp>
+        <p:nvSpPr>
+          <p:cNvPr id="20" name="Text 18"/>
+          <p:cNvSpPr/>
+          <p:nvPr/>
+        </p:nvSpPr>
+        <p:spPr>
+          <a:xfrm>
+            <a:off x="1097280" y="3931920"/>
+            <a:ext cx="9601200" cy="502920"/>
           </a:xfrm>
           <a:prstGeom prst="rect">
             <a:avLst/>
@@ -2272,17 +2465,17 @@
               <a:buNone/>
             </a:pPr>
             <a:r>
-              <a:rPr lang="en-US" sz="1300" i="1" dirty="0">
-                <a:solidFill>
-                  <a:srgbClr val="3D3A36"/>
-                </a:solidFill>
-                <a:latin typeface="Calibri" pitchFamily="34" charset="0"/>
-                <a:ea typeface="Calibri" pitchFamily="34" charset="-122"/>
-                <a:cs typeface="Calibri" pitchFamily="34" charset="-120"/>
-              </a:rPr>
-              <a:t>Baozi problem: 20 + 3b = 47 → 3b = 27 → b = 9. Each baozi costs ¥9.</a:t>
-            </a:r>
-            <a:endParaRPr lang="en-US" sz="1300" dirty="0"/>
+              <a:rPr lang="en-US" sz="1500" b="1" dirty="0">
+                <a:solidFill>
+                  <a:srgbClr val="2A9D8F"/>
+                </a:solidFill>
+                <a:latin typeface="Arial" pitchFamily="34" charset="0"/>
+                <a:ea typeface="Arial" pitchFamily="34" charset="-122"/>
+                <a:cs typeface="Arial" pitchFamily="34" charset="-120"/>
+              </a:rPr>
+              <a:t>Check: 4(5) − 7 = 20 − 7 = 13 ✓</a:t>
+            </a:r>
+            <a:endParaRPr lang="en-US" sz="1500" dirty="0"/>
           </a:p>
         </p:txBody>
       </p:sp>
@@ -2327,27 +2520,7 @@
         <p:spPr>
           <a:xfrm>
             <a:off x="0" y="0"/>
-            <a:ext cx="9144000" cy="822960"/>
-          </a:xfrm>
-          <a:prstGeom prst="rect">
-            <a:avLst/>
-          </a:prstGeom>
-          <a:solidFill>
-            <a:srgbClr val="FFFFFF"/>
-          </a:solidFill>
-          <a:ln/>
-        </p:spPr>
-      </p:sp>
-      <p:sp>
-        <p:nvSpPr>
-          <p:cNvPr id="3" name="Shape 1"/>
-          <p:cNvSpPr/>
-          <p:nvPr/>
-        </p:nvSpPr>
-        <p:spPr>
-          <a:xfrm>
-            <a:off x="0" y="795528"/>
-            <a:ext cx="9144000" cy="27432"/>
+            <a:ext cx="73152" cy="5148072"/>
           </a:xfrm>
           <a:prstGeom prst="rect">
             <a:avLst/>
@@ -2360,30 +2533,91 @@
       </p:sp>
       <p:sp>
         <p:nvSpPr>
+          <p:cNvPr id="3" name="Shape 1"/>
+          <p:cNvSpPr/>
+          <p:nvPr/>
+        </p:nvSpPr>
+        <p:spPr>
+          <a:xfrm>
+            <a:off x="548640" y="274320"/>
+            <a:ext cx="2011680" cy="320040"/>
+          </a:xfrm>
+          <a:prstGeom prst="roundRect">
+            <a:avLst>
+              <a:gd name="adj" fmla="val 17143"/>
+            </a:avLst>
+          </a:prstGeom>
+          <a:solidFill>
+            <a:srgbClr val="2A9D8F"/>
+          </a:solidFill>
+          <a:ln/>
+        </p:spPr>
+      </p:sp>
+      <p:sp>
+        <p:nvSpPr>
           <p:cNvPr id="4" name="Text 2"/>
           <p:cNvSpPr/>
           <p:nvPr/>
         </p:nvSpPr>
         <p:spPr>
           <a:xfrm>
-            <a:off x="640080" y="91440"/>
-            <a:ext cx="7863840" cy="640080"/>
-          </a:xfrm>
-          <a:prstGeom prst="rect">
-            <a:avLst/>
-          </a:prstGeom>
-          <a:noFill/>
-          <a:ln/>
-        </p:spPr>
-        <p:txBody>
-          <a:bodyPr wrap="square" lIns="0" tIns="0" rIns="0" bIns="0" rtlCol="0" anchor="ctr"/>
+            <a:off x="548640" y="274320"/>
+            <a:ext cx="2011680" cy="320040"/>
+          </a:xfrm>
+          <a:prstGeom prst="rect">
+            <a:avLst/>
+          </a:prstGeom>
+          <a:noFill/>
+          <a:ln/>
+        </p:spPr>
+        <p:txBody>
+          <a:bodyPr wrap="square" rtlCol="0" anchor="ctr"/>
+          <a:lstStyle/>
+          <a:p>
+            <a:pPr algn="ctr" indent="0" marL="0">
+              <a:buNone/>
+            </a:pPr>
+            <a:r>
+              <a:rPr lang="en-US" sz="1000" b="1" dirty="0">
+                <a:solidFill>
+                  <a:srgbClr val="FFFFFF"/>
+                </a:solidFill>
+                <a:latin typeface="Arial" pitchFamily="34" charset="0"/>
+                <a:ea typeface="Arial" pitchFamily="34" charset="-122"/>
+                <a:cs typeface="Arial" pitchFamily="34" charset="-120"/>
+              </a:rPr>
+              <a:t>WORKED EXAMPLE</a:t>
+            </a:r>
+            <a:endParaRPr lang="en-US" sz="1000" dirty="0"/>
+          </a:p>
+        </p:txBody>
+      </p:sp>
+      <p:sp>
+        <p:nvSpPr>
+          <p:cNvPr id="5" name="Text 3"/>
+          <p:cNvSpPr/>
+          <p:nvPr/>
+        </p:nvSpPr>
+        <p:spPr>
+          <a:xfrm>
+            <a:off x="2743200" y="274320"/>
+            <a:ext cx="7315200" cy="457200"/>
+          </a:xfrm>
+          <a:prstGeom prst="rect">
+            <a:avLst/>
+          </a:prstGeom>
+          <a:noFill/>
+          <a:ln/>
+        </p:spPr>
+        <p:txBody>
+          <a:bodyPr wrap="square" rtlCol="0" anchor="ctr"/>
           <a:lstStyle/>
           <a:p>
             <a:pPr indent="0" marL="0">
               <a:buNone/>
             </a:pPr>
             <a:r>
-              <a:rPr lang="en-US" sz="2200" b="1" dirty="0">
+              <a:rPr lang="en-US" sz="2000" b="1" dirty="0">
                 <a:solidFill>
                   <a:srgbClr val="1B2A4A"/>
                 </a:solidFill>
@@ -2391,22 +2625,42 @@
                 <a:ea typeface="Georgia" pitchFamily="34" charset="-122"/>
                 <a:cs typeface="Georgia" pitchFamily="34" charset="-120"/>
               </a:rPr>
-              <a:t>Worked Examples</a:t>
-            </a:r>
-            <a:endParaRPr lang="en-US" sz="2200" dirty="0"/>
-          </a:p>
-        </p:txBody>
-      </p:sp>
-      <p:sp>
-        <p:nvSpPr>
-          <p:cNvPr id="5" name="Text 3"/>
-          <p:cNvSpPr/>
-          <p:nvPr/>
-        </p:nvSpPr>
-        <p:spPr>
-          <a:xfrm>
-            <a:off x="640080" y="1005840"/>
-            <a:ext cx="7863840" cy="2926080"/>
+              <a:t>Solve: (x + 3)/2 = 8</a:t>
+            </a:r>
+            <a:endParaRPr lang="en-US" sz="2000" dirty="0"/>
+          </a:p>
+        </p:txBody>
+      </p:sp>
+      <p:sp>
+        <p:nvSpPr>
+          <p:cNvPr id="6" name="Shape 4"/>
+          <p:cNvSpPr/>
+          <p:nvPr/>
+        </p:nvSpPr>
+        <p:spPr>
+          <a:xfrm>
+            <a:off x="548640" y="1051560"/>
+            <a:ext cx="365760" cy="365760"/>
+          </a:xfrm>
+          <a:prstGeom prst="ellipse">
+            <a:avLst/>
+          </a:prstGeom>
+          <a:solidFill>
+            <a:srgbClr val="111D35"/>
+          </a:solidFill>
+          <a:ln/>
+        </p:spPr>
+      </p:sp>
+      <p:sp>
+        <p:nvSpPr>
+          <p:cNvPr id="7" name="Text 5"/>
+          <p:cNvSpPr/>
+          <p:nvPr/>
+        </p:nvSpPr>
+        <p:spPr>
+          <a:xfrm>
+            <a:off x="548640" y="1051560"/>
+            <a:ext cx="365760" cy="365760"/>
           </a:xfrm>
           <a:prstGeom prst="rect">
             <a:avLst/>
@@ -2418,88 +2672,452 @@
           <a:bodyPr wrap="square" rtlCol="0" anchor="ctr"/>
           <a:lstStyle/>
           <a:p>
-            <a:pPr marL="342900" indent="-342900">
-              <a:spcAft>
-                <a:spcPts val="800"/>
-              </a:spcAft>
-              <a:buSzPct val="100000"/>
-              <a:buChar char="•"/>
-            </a:pPr>
-            <a:r>
-              <a:rPr lang="en-US" sz="1600" dirty="0">
+            <a:pPr algn="ctr" indent="0" marL="0">
+              <a:buNone/>
+            </a:pPr>
+            <a:r>
+              <a:rPr lang="en-US" sz="1300" b="1" dirty="0">
+                <a:solidFill>
+                  <a:srgbClr val="FFFFFF"/>
+                </a:solidFill>
+                <a:latin typeface="Arial" pitchFamily="34" charset="0"/>
+                <a:ea typeface="Arial" pitchFamily="34" charset="-122"/>
+                <a:cs typeface="Arial" pitchFamily="34" charset="-120"/>
+              </a:rPr>
+              <a:t>1</a:t>
+            </a:r>
+            <a:endParaRPr lang="en-US" sz="1300" dirty="0"/>
+          </a:p>
+        </p:txBody>
+      </p:sp>
+      <p:sp>
+        <p:nvSpPr>
+          <p:cNvPr id="8" name="Text 6"/>
+          <p:cNvSpPr/>
+          <p:nvPr/>
+        </p:nvSpPr>
+        <p:spPr>
+          <a:xfrm>
+            <a:off x="1097280" y="1005840"/>
+            <a:ext cx="9601200" cy="502920"/>
+          </a:xfrm>
+          <a:prstGeom prst="rect">
+            <a:avLst/>
+          </a:prstGeom>
+          <a:noFill/>
+          <a:ln/>
+        </p:spPr>
+        <p:txBody>
+          <a:bodyPr wrap="square" rtlCol="0" anchor="ctr"/>
+          <a:lstStyle/>
+          <a:p>
+            <a:pPr indent="0" marL="0">
+              <a:buNone/>
+            </a:pPr>
+            <a:r>
+              <a:rPr lang="en-US" sz="1500" dirty="0">
                 <a:solidFill>
                   <a:srgbClr val="3D3A36"/>
                 </a:solidFill>
-                <a:latin typeface="Calibri" pitchFamily="34" charset="0"/>
-                <a:ea typeface="Calibri" pitchFamily="34" charset="-122"/>
-                <a:cs typeface="Calibri" pitchFamily="34" charset="-120"/>
-              </a:rPr>
-              <a:t>4y − 7 = 13 → 4y = 20 → y = 5</a:t>
-            </a:r>
-            <a:endParaRPr lang="en-US" sz="1600" dirty="0"/>
-          </a:p>
-          <a:p>
-            <a:pPr marL="342900" indent="-342900">
-              <a:spcAft>
-                <a:spcPts val="800"/>
-              </a:spcAft>
-              <a:buSzPct val="100000"/>
-              <a:buChar char="•"/>
-            </a:pPr>
-            <a:r>
-              <a:rPr lang="en-US" sz="1600" dirty="0">
+                <a:latin typeface="Arial" pitchFamily="34" charset="0"/>
+                <a:ea typeface="Arial" pitchFamily="34" charset="-122"/>
+                <a:cs typeface="Arial" pitchFamily="34" charset="-120"/>
+              </a:rPr>
+              <a:t>Step 1: Multiply both sides by 2 (undo the ÷2).</a:t>
+            </a:r>
+            <a:endParaRPr lang="en-US" sz="1500" dirty="0"/>
+          </a:p>
+        </p:txBody>
+      </p:sp>
+      <p:sp>
+        <p:nvSpPr>
+          <p:cNvPr id="9" name="Shape 7"/>
+          <p:cNvSpPr/>
+          <p:nvPr/>
+        </p:nvSpPr>
+        <p:spPr>
+          <a:xfrm>
+            <a:off x="548640" y="1783080"/>
+            <a:ext cx="365760" cy="365760"/>
+          </a:xfrm>
+          <a:prstGeom prst="ellipse">
+            <a:avLst/>
+          </a:prstGeom>
+          <a:solidFill>
+            <a:srgbClr val="111D35"/>
+          </a:solidFill>
+          <a:ln/>
+        </p:spPr>
+      </p:sp>
+      <p:sp>
+        <p:nvSpPr>
+          <p:cNvPr id="10" name="Text 8"/>
+          <p:cNvSpPr/>
+          <p:nvPr/>
+        </p:nvSpPr>
+        <p:spPr>
+          <a:xfrm>
+            <a:off x="548640" y="1783080"/>
+            <a:ext cx="365760" cy="365760"/>
+          </a:xfrm>
+          <a:prstGeom prst="rect">
+            <a:avLst/>
+          </a:prstGeom>
+          <a:noFill/>
+          <a:ln/>
+        </p:spPr>
+        <p:txBody>
+          <a:bodyPr wrap="square" rtlCol="0" anchor="ctr"/>
+          <a:lstStyle/>
+          <a:p>
+            <a:pPr algn="ctr" indent="0" marL="0">
+              <a:buNone/>
+            </a:pPr>
+            <a:r>
+              <a:rPr lang="en-US" sz="1300" b="1" dirty="0">
+                <a:solidFill>
+                  <a:srgbClr val="FFFFFF"/>
+                </a:solidFill>
+                <a:latin typeface="Arial" pitchFamily="34" charset="0"/>
+                <a:ea typeface="Arial" pitchFamily="34" charset="-122"/>
+                <a:cs typeface="Arial" pitchFamily="34" charset="-120"/>
+              </a:rPr>
+              <a:t>2</a:t>
+            </a:r>
+            <a:endParaRPr lang="en-US" sz="1300" dirty="0"/>
+          </a:p>
+        </p:txBody>
+      </p:sp>
+      <p:sp>
+        <p:nvSpPr>
+          <p:cNvPr id="11" name="Text 9"/>
+          <p:cNvSpPr/>
+          <p:nvPr/>
+        </p:nvSpPr>
+        <p:spPr>
+          <a:xfrm>
+            <a:off x="1097280" y="1737360"/>
+            <a:ext cx="9601200" cy="502920"/>
+          </a:xfrm>
+          <a:prstGeom prst="rect">
+            <a:avLst/>
+          </a:prstGeom>
+          <a:noFill/>
+          <a:ln/>
+        </p:spPr>
+        <p:txBody>
+          <a:bodyPr wrap="square" rtlCol="0" anchor="ctr"/>
+          <a:lstStyle/>
+          <a:p>
+            <a:pPr indent="0" marL="0">
+              <a:buNone/>
+            </a:pPr>
+            <a:r>
+              <a:rPr lang="en-US" sz="1500" dirty="0">
                 <a:solidFill>
                   <a:srgbClr val="3D3A36"/>
                 </a:solidFill>
-                <a:latin typeface="Calibri" pitchFamily="34" charset="0"/>
-                <a:ea typeface="Calibri" pitchFamily="34" charset="-122"/>
-                <a:cs typeface="Calibri" pitchFamily="34" charset="-120"/>
-              </a:rPr>
-              <a:t>(x + 3) ÷ 2 = 8 → x + 3 = 16 → x = 13</a:t>
-            </a:r>
-            <a:endParaRPr lang="en-US" sz="1600" dirty="0"/>
-          </a:p>
-          <a:p>
-            <a:pPr marL="342900" indent="-342900">
-              <a:spcAft>
-                <a:spcPts val="800"/>
-              </a:spcAft>
-              <a:buSzPct val="100000"/>
-              <a:buChar char="•"/>
-            </a:pPr>
-            <a:r>
-              <a:rPr lang="en-US" sz="1600" dirty="0">
+                <a:latin typeface="Arial" pitchFamily="34" charset="0"/>
+                <a:ea typeface="Arial" pitchFamily="34" charset="-122"/>
+                <a:cs typeface="Arial" pitchFamily="34" charset="-120"/>
+              </a:rPr>
+              <a:t>x + 3 = 16.</a:t>
+            </a:r>
+            <a:endParaRPr lang="en-US" sz="1500" dirty="0"/>
+          </a:p>
+        </p:txBody>
+      </p:sp>
+      <p:sp>
+        <p:nvSpPr>
+          <p:cNvPr id="12" name="Shape 10"/>
+          <p:cNvSpPr/>
+          <p:nvPr/>
+        </p:nvSpPr>
+        <p:spPr>
+          <a:xfrm>
+            <a:off x="548640" y="2514600"/>
+            <a:ext cx="365760" cy="365760"/>
+          </a:xfrm>
+          <a:prstGeom prst="ellipse">
+            <a:avLst/>
+          </a:prstGeom>
+          <a:solidFill>
+            <a:srgbClr val="111D35"/>
+          </a:solidFill>
+          <a:ln/>
+        </p:spPr>
+      </p:sp>
+      <p:sp>
+        <p:nvSpPr>
+          <p:cNvPr id="13" name="Text 11"/>
+          <p:cNvSpPr/>
+          <p:nvPr/>
+        </p:nvSpPr>
+        <p:spPr>
+          <a:xfrm>
+            <a:off x="548640" y="2514600"/>
+            <a:ext cx="365760" cy="365760"/>
+          </a:xfrm>
+          <a:prstGeom prst="rect">
+            <a:avLst/>
+          </a:prstGeom>
+          <a:noFill/>
+          <a:ln/>
+        </p:spPr>
+        <p:txBody>
+          <a:bodyPr wrap="square" rtlCol="0" anchor="ctr"/>
+          <a:lstStyle/>
+          <a:p>
+            <a:pPr algn="ctr" indent="0" marL="0">
+              <a:buNone/>
+            </a:pPr>
+            <a:r>
+              <a:rPr lang="en-US" sz="1300" b="1" dirty="0">
+                <a:solidFill>
+                  <a:srgbClr val="FFFFFF"/>
+                </a:solidFill>
+                <a:latin typeface="Arial" pitchFamily="34" charset="0"/>
+                <a:ea typeface="Arial" pitchFamily="34" charset="-122"/>
+                <a:cs typeface="Arial" pitchFamily="34" charset="-120"/>
+              </a:rPr>
+              <a:t>3</a:t>
+            </a:r>
+            <a:endParaRPr lang="en-US" sz="1300" dirty="0"/>
+          </a:p>
+        </p:txBody>
+      </p:sp>
+      <p:sp>
+        <p:nvSpPr>
+          <p:cNvPr id="14" name="Text 12"/>
+          <p:cNvSpPr/>
+          <p:nvPr/>
+        </p:nvSpPr>
+        <p:spPr>
+          <a:xfrm>
+            <a:off x="1097280" y="2468880"/>
+            <a:ext cx="9601200" cy="502920"/>
+          </a:xfrm>
+          <a:prstGeom prst="rect">
+            <a:avLst/>
+          </a:prstGeom>
+          <a:noFill/>
+          <a:ln/>
+        </p:spPr>
+        <p:txBody>
+          <a:bodyPr wrap="square" rtlCol="0" anchor="ctr"/>
+          <a:lstStyle/>
+          <a:p>
+            <a:pPr indent="0" marL="0">
+              <a:buNone/>
+            </a:pPr>
+            <a:r>
+              <a:rPr lang="en-US" sz="1500" dirty="0">
                 <a:solidFill>
                   <a:srgbClr val="3D3A36"/>
                 </a:solidFill>
-                <a:latin typeface="Calibri" pitchFamily="34" charset="0"/>
-                <a:ea typeface="Calibri" pitchFamily="34" charset="-122"/>
-                <a:cs typeface="Calibri" pitchFamily="34" charset="-120"/>
-              </a:rPr>
-              <a:t>2n + 10 = 30 → 2n = 20 → n = 10</a:t>
-            </a:r>
-            <a:endParaRPr lang="en-US" sz="1600" dirty="0"/>
-          </a:p>
-          <a:p>
-            <a:pPr marL="342900" indent="-342900">
-              <a:spcAft>
-                <a:spcPts val="800"/>
-              </a:spcAft>
-              <a:buSzPct val="100000"/>
-              <a:buChar char="•"/>
-            </a:pPr>
-            <a:r>
-              <a:rPr lang="en-US" sz="1600" dirty="0">
+                <a:latin typeface="Arial" pitchFamily="34" charset="0"/>
+                <a:ea typeface="Arial" pitchFamily="34" charset="-122"/>
+                <a:cs typeface="Arial" pitchFamily="34" charset="-120"/>
+              </a:rPr>
+              <a:t>Step 2: Subtract 3 from both sides (undo the +3).</a:t>
+            </a:r>
+            <a:endParaRPr lang="en-US" sz="1500" dirty="0"/>
+          </a:p>
+        </p:txBody>
+      </p:sp>
+      <p:sp>
+        <p:nvSpPr>
+          <p:cNvPr id="15" name="Shape 13"/>
+          <p:cNvSpPr/>
+          <p:nvPr/>
+        </p:nvSpPr>
+        <p:spPr>
+          <a:xfrm>
+            <a:off x="548640" y="3246120"/>
+            <a:ext cx="365760" cy="365760"/>
+          </a:xfrm>
+          <a:prstGeom prst="ellipse">
+            <a:avLst/>
+          </a:prstGeom>
+          <a:solidFill>
+            <a:srgbClr val="111D35"/>
+          </a:solidFill>
+          <a:ln/>
+        </p:spPr>
+      </p:sp>
+      <p:sp>
+        <p:nvSpPr>
+          <p:cNvPr id="16" name="Text 14"/>
+          <p:cNvSpPr/>
+          <p:nvPr/>
+        </p:nvSpPr>
+        <p:spPr>
+          <a:xfrm>
+            <a:off x="548640" y="3246120"/>
+            <a:ext cx="365760" cy="365760"/>
+          </a:xfrm>
+          <a:prstGeom prst="rect">
+            <a:avLst/>
+          </a:prstGeom>
+          <a:noFill/>
+          <a:ln/>
+        </p:spPr>
+        <p:txBody>
+          <a:bodyPr wrap="square" rtlCol="0" anchor="ctr"/>
+          <a:lstStyle/>
+          <a:p>
+            <a:pPr algn="ctr" indent="0" marL="0">
+              <a:buNone/>
+            </a:pPr>
+            <a:r>
+              <a:rPr lang="en-US" sz="1300" b="1" dirty="0">
+                <a:solidFill>
+                  <a:srgbClr val="FFFFFF"/>
+                </a:solidFill>
+                <a:latin typeface="Arial" pitchFamily="34" charset="0"/>
+                <a:ea typeface="Arial" pitchFamily="34" charset="-122"/>
+                <a:cs typeface="Arial" pitchFamily="34" charset="-120"/>
+              </a:rPr>
+              <a:t>4</a:t>
+            </a:r>
+            <a:endParaRPr lang="en-US" sz="1300" dirty="0"/>
+          </a:p>
+        </p:txBody>
+      </p:sp>
+      <p:sp>
+        <p:nvSpPr>
+          <p:cNvPr id="17" name="Text 15"/>
+          <p:cNvSpPr/>
+          <p:nvPr/>
+        </p:nvSpPr>
+        <p:spPr>
+          <a:xfrm>
+            <a:off x="1097280" y="3200400"/>
+            <a:ext cx="9601200" cy="502920"/>
+          </a:xfrm>
+          <a:prstGeom prst="rect">
+            <a:avLst/>
+          </a:prstGeom>
+          <a:noFill/>
+          <a:ln/>
+        </p:spPr>
+        <p:txBody>
+          <a:bodyPr wrap="square" rtlCol="0" anchor="ctr"/>
+          <a:lstStyle/>
+          <a:p>
+            <a:pPr indent="0" marL="0">
+              <a:buNone/>
+            </a:pPr>
+            <a:r>
+              <a:rPr lang="en-US" sz="1500" dirty="0">
                 <a:solidFill>
                   <a:srgbClr val="3D3A36"/>
                 </a:solidFill>
-                <a:latin typeface="Calibri" pitchFamily="34" charset="0"/>
-                <a:ea typeface="Calibri" pitchFamily="34" charset="-122"/>
-                <a:cs typeface="Calibri" pitchFamily="34" charset="-120"/>
-              </a:rPr>
-              <a:t>Always check: 2(10) + 10 = 30 ✓</a:t>
-            </a:r>
-            <a:endParaRPr lang="en-US" sz="1600" dirty="0"/>
+                <a:latin typeface="Arial" pitchFamily="34" charset="0"/>
+                <a:ea typeface="Arial" pitchFamily="34" charset="-122"/>
+                <a:cs typeface="Arial" pitchFamily="34" charset="-120"/>
+              </a:rPr>
+              <a:t>x = 13.</a:t>
+            </a:r>
+            <a:endParaRPr lang="en-US" sz="1500" dirty="0"/>
+          </a:p>
+        </p:txBody>
+      </p:sp>
+      <p:sp>
+        <p:nvSpPr>
+          <p:cNvPr id="18" name="Shape 16"/>
+          <p:cNvSpPr/>
+          <p:nvPr/>
+        </p:nvSpPr>
+        <p:spPr>
+          <a:xfrm>
+            <a:off x="548640" y="3977640"/>
+            <a:ext cx="365760" cy="365760"/>
+          </a:xfrm>
+          <a:prstGeom prst="ellipse">
+            <a:avLst/>
+          </a:prstGeom>
+          <a:solidFill>
+            <a:srgbClr val="2A9D8F"/>
+          </a:solidFill>
+          <a:ln/>
+        </p:spPr>
+      </p:sp>
+      <p:sp>
+        <p:nvSpPr>
+          <p:cNvPr id="19" name="Text 17"/>
+          <p:cNvSpPr/>
+          <p:nvPr/>
+        </p:nvSpPr>
+        <p:spPr>
+          <a:xfrm>
+            <a:off x="548640" y="3977640"/>
+            <a:ext cx="365760" cy="365760"/>
+          </a:xfrm>
+          <a:prstGeom prst="rect">
+            <a:avLst/>
+          </a:prstGeom>
+          <a:noFill/>
+          <a:ln/>
+        </p:spPr>
+        <p:txBody>
+          <a:bodyPr wrap="square" rtlCol="0" anchor="ctr"/>
+          <a:lstStyle/>
+          <a:p>
+            <a:pPr algn="ctr" indent="0" marL="0">
+              <a:buNone/>
+            </a:pPr>
+            <a:r>
+              <a:rPr lang="en-US" sz="1300" b="1" dirty="0">
+                <a:solidFill>
+                  <a:srgbClr val="FFFFFF"/>
+                </a:solidFill>
+                <a:latin typeface="Arial" pitchFamily="34" charset="0"/>
+                <a:ea typeface="Arial" pitchFamily="34" charset="-122"/>
+                <a:cs typeface="Arial" pitchFamily="34" charset="-120"/>
+              </a:rPr>
+              <a:t>5</a:t>
+            </a:r>
+            <a:endParaRPr lang="en-US" sz="1300" dirty="0"/>
+          </a:p>
+        </p:txBody>
+      </p:sp>
+      <p:sp>
+        <p:nvSpPr>
+          <p:cNvPr id="20" name="Text 18"/>
+          <p:cNvSpPr/>
+          <p:nvPr/>
+        </p:nvSpPr>
+        <p:spPr>
+          <a:xfrm>
+            <a:off x="1097280" y="3931920"/>
+            <a:ext cx="9601200" cy="502920"/>
+          </a:xfrm>
+          <a:prstGeom prst="rect">
+            <a:avLst/>
+          </a:prstGeom>
+          <a:noFill/>
+          <a:ln/>
+        </p:spPr>
+        <p:txBody>
+          <a:bodyPr wrap="square" rtlCol="0" anchor="ctr"/>
+          <a:lstStyle/>
+          <a:p>
+            <a:pPr indent="0" marL="0">
+              <a:buNone/>
+            </a:pPr>
+            <a:r>
+              <a:rPr lang="en-US" sz="1500" b="1" dirty="0">
+                <a:solidFill>
+                  <a:srgbClr val="2A9D8F"/>
+                </a:solidFill>
+                <a:latin typeface="Arial" pitchFamily="34" charset="0"/>
+                <a:ea typeface="Arial" pitchFamily="34" charset="-122"/>
+                <a:cs typeface="Arial" pitchFamily="34" charset="-120"/>
+              </a:rPr>
+              <a:t>Check: (13 + 3)/2 = 16/2 = 8 ✓</a:t>
+            </a:r>
+            <a:endParaRPr lang="en-US" sz="1500" dirty="0"/>
           </a:p>
         </p:txBody>
       </p:sp>
@@ -2544,27 +3162,7 @@
         <p:spPr>
           <a:xfrm>
             <a:off x="0" y="0"/>
-            <a:ext cx="9144000" cy="822960"/>
-          </a:xfrm>
-          <a:prstGeom prst="rect">
-            <a:avLst/>
-          </a:prstGeom>
-          <a:solidFill>
-            <a:srgbClr val="FFFFFF"/>
-          </a:solidFill>
-          <a:ln/>
-        </p:spPr>
-      </p:sp>
-      <p:sp>
-        <p:nvSpPr>
-          <p:cNvPr id="3" name="Shape 1"/>
-          <p:cNvSpPr/>
-          <p:nvPr/>
-        </p:nvSpPr>
-        <p:spPr>
-          <a:xfrm>
-            <a:off x="0" y="795528"/>
-            <a:ext cx="9144000" cy="27432"/>
+            <a:ext cx="73152" cy="5148072"/>
           </a:xfrm>
           <a:prstGeom prst="rect">
             <a:avLst/>
@@ -2577,30 +3175,30 @@
       </p:sp>
       <p:sp>
         <p:nvSpPr>
-          <p:cNvPr id="4" name="Text 2"/>
-          <p:cNvSpPr/>
-          <p:nvPr/>
-        </p:nvSpPr>
-        <p:spPr>
-          <a:xfrm>
-            <a:off x="640080" y="91440"/>
-            <a:ext cx="7863840" cy="640080"/>
-          </a:xfrm>
-          <a:prstGeom prst="rect">
-            <a:avLst/>
-          </a:prstGeom>
-          <a:noFill/>
-          <a:ln/>
-        </p:spPr>
-        <p:txBody>
-          <a:bodyPr wrap="square" lIns="0" tIns="0" rIns="0" bIns="0" rtlCol="0" anchor="ctr"/>
+          <p:cNvPr id="3" name="Text 1"/>
+          <p:cNvSpPr/>
+          <p:nvPr/>
+        </p:nvSpPr>
+        <p:spPr>
+          <a:xfrm>
+            <a:off x="548640" y="274320"/>
+            <a:ext cx="9144000" cy="640080"/>
+          </a:xfrm>
+          <a:prstGeom prst="rect">
+            <a:avLst/>
+          </a:prstGeom>
+          <a:noFill/>
+          <a:ln/>
+        </p:spPr>
+        <p:txBody>
+          <a:bodyPr wrap="square" rtlCol="0" anchor="ctr"/>
           <a:lstStyle/>
           <a:p>
             <a:pPr indent="0" marL="0">
               <a:buNone/>
             </a:pPr>
             <a:r>
-              <a:rPr lang="en-US" sz="2200" b="1" dirty="0">
+              <a:rPr lang="en-US" sz="2400" b="1" dirty="0">
                 <a:solidFill>
                   <a:srgbClr val="1B2A4A"/>
                 </a:solidFill>
@@ -2608,49 +3206,22 @@
                 <a:ea typeface="Georgia" pitchFamily="34" charset="-122"/>
                 <a:cs typeface="Georgia" pitchFamily="34" charset="-120"/>
               </a:rPr>
-              <a:t>Real-World Two-Step Equations</a:t>
-            </a:r>
-            <a:endParaRPr lang="en-US" sz="2200" dirty="0"/>
-          </a:p>
-        </p:txBody>
-      </p:sp>
-      <p:sp>
-        <p:nvSpPr>
-          <p:cNvPr id="5" name="Shape 3"/>
-          <p:cNvSpPr/>
-          <p:nvPr/>
-        </p:nvSpPr>
-        <p:spPr>
-          <a:xfrm>
-            <a:off x="457200" y="1005840"/>
-            <a:ext cx="3931920" cy="3657600"/>
-          </a:xfrm>
-          <a:prstGeom prst="rect">
-            <a:avLst/>
-          </a:prstGeom>
-          <a:solidFill>
-            <a:srgbClr val="FFFFFF"/>
-          </a:solidFill>
-          <a:ln/>
-          <a:effectLst>
-            <a:outerShdw sx="100000" sy="100000" kx="0" ky="0" algn="bl" rotWithShape="0" blurRad="76200" dist="25400" dir="8100000">
-              <a:srgbClr val="000000">
-                <a:alpha val="12000"/>
-              </a:srgbClr>
-            </a:outerShdw>
-          </a:effectLst>
-        </p:spPr>
-      </p:sp>
-      <p:sp>
-        <p:nvSpPr>
-          <p:cNvPr id="6" name="Shape 4"/>
-          <p:cNvSpPr/>
-          <p:nvPr/>
-        </p:nvSpPr>
-        <p:spPr>
-          <a:xfrm>
-            <a:off x="457200" y="1005840"/>
-            <a:ext cx="3931920" cy="64008"/>
+              <a:t>Writing Equations from Word Problems</a:t>
+            </a:r>
+            <a:endParaRPr lang="en-US" sz="2400" dirty="0"/>
+          </a:p>
+        </p:txBody>
+      </p:sp>
+      <p:sp>
+        <p:nvSpPr>
+          <p:cNvPr id="4" name="Shape 2"/>
+          <p:cNvSpPr/>
+          <p:nvPr/>
+        </p:nvSpPr>
+        <p:spPr>
+          <a:xfrm>
+            <a:off x="548640" y="960120"/>
+            <a:ext cx="2286000" cy="36576"/>
           </a:xfrm>
           <a:prstGeom prst="rect">
             <a:avLst/>
@@ -2663,296 +3234,133 @@
       </p:sp>
       <p:sp>
         <p:nvSpPr>
-          <p:cNvPr id="7" name="Text 5"/>
-          <p:cNvSpPr/>
-          <p:nvPr/>
-        </p:nvSpPr>
-        <p:spPr>
-          <a:xfrm>
-            <a:off x="640080" y="1188720"/>
-            <a:ext cx="3566160" cy="457200"/>
-          </a:xfrm>
-          <a:prstGeom prst="rect">
-            <a:avLst/>
-          </a:prstGeom>
-          <a:noFill/>
-          <a:ln/>
-        </p:spPr>
-        <p:txBody>
-          <a:bodyPr wrap="square" rtlCol="0" anchor="ctr"/>
-          <a:lstStyle/>
-          <a:p>
-            <a:pPr indent="0" marL="0">
-              <a:buNone/>
-            </a:pPr>
-            <a:r>
-              <a:rPr lang="en-US" sz="1600" b="1" dirty="0">
-                <a:solidFill>
-                  <a:srgbClr val="2A9D8F"/>
-                </a:solidFill>
-                <a:latin typeface="Calibri" pitchFamily="34" charset="0"/>
-                <a:ea typeface="Calibri" pitchFamily="34" charset="-122"/>
-                <a:cs typeface="Calibri" pitchFamily="34" charset="-120"/>
-              </a:rPr>
-              <a:t>Food &amp; Transport</a:t>
-            </a:r>
-            <a:endParaRPr lang="en-US" sz="1600" dirty="0"/>
-          </a:p>
-        </p:txBody>
-      </p:sp>
-      <p:sp>
-        <p:nvSpPr>
-          <p:cNvPr id="8" name="Text 6"/>
-          <p:cNvSpPr/>
-          <p:nvPr/>
-        </p:nvSpPr>
-        <p:spPr>
-          <a:xfrm>
-            <a:off x="640080" y="1691640"/>
-            <a:ext cx="3566160" cy="2743200"/>
-          </a:xfrm>
-          <a:prstGeom prst="rect">
-            <a:avLst/>
-          </a:prstGeom>
-          <a:noFill/>
-          <a:ln/>
-        </p:spPr>
-        <p:txBody>
-          <a:bodyPr wrap="square" rtlCol="0" anchor="ctr"/>
-          <a:lstStyle/>
-          <a:p>
-            <a:pPr marL="342900" indent="-342900">
+          <p:cNvPr id="5" name="Text 3"/>
+          <p:cNvSpPr/>
+          <p:nvPr/>
+        </p:nvSpPr>
+        <p:spPr>
+          <a:xfrm>
+            <a:off x="548640" y="1188720"/>
+            <a:ext cx="10058400" cy="3474720"/>
+          </a:xfrm>
+          <a:prstGeom prst="rect">
+            <a:avLst/>
+          </a:prstGeom>
+          <a:noFill/>
+          <a:ln/>
+        </p:spPr>
+        <p:txBody>
+          <a:bodyPr wrap="square" rtlCol="0" anchor="t"/>
+          <a:lstStyle/>
+          <a:p>
+            <a:pPr>
+              <a:lnSpc>
+                <a:spcPct val="150000"/>
+              </a:lnSpc>
               <a:spcAft>
                 <a:spcPts val="600"/>
               </a:spcAft>
-              <a:buSzPct val="100000"/>
-              <a:buChar char="•"/>
-            </a:pPr>
-            <a:r>
-              <a:rPr lang="en-US" sz="1400" dirty="0">
+            </a:pPr>
+            <a:r>
+              <a:rPr lang="en-US" sz="1500" dirty="0">
                 <a:solidFill>
                   <a:srgbClr val="3D3A36"/>
                 </a:solidFill>
-                <a:latin typeface="Calibri" pitchFamily="34" charset="0"/>
-                <a:ea typeface="Calibri" pitchFamily="34" charset="-122"/>
-                <a:cs typeface="Calibri" pitchFamily="34" charset="-120"/>
-              </a:rPr>
-              <a:t>Korean BBQ: 15000p + 5000 = 80000</a:t>
-            </a:r>
-            <a:endParaRPr lang="en-US" sz="1400" dirty="0"/>
-          </a:p>
-          <a:p>
-            <a:pPr marL="342900" indent="-342900">
+                <a:latin typeface="Arial" pitchFamily="34" charset="0"/>
+                <a:ea typeface="Arial" pitchFamily="34" charset="-122"/>
+                <a:cs typeface="Arial" pitchFamily="34" charset="-120"/>
+              </a:rPr>
+              <a:t>'I think of a number, double it, and add 3. The answer is 17.'</a:t>
+            </a:r>
+            <a:endParaRPr lang="en-US" sz="1500" dirty="0"/>
+          </a:p>
+          <a:p>
+            <a:pPr>
+              <a:lnSpc>
+                <a:spcPct val="150000"/>
+              </a:lnSpc>
               <a:spcAft>
                 <a:spcPts val="600"/>
               </a:spcAft>
-              <a:buSzPct val="100000"/>
-              <a:buChar char="•"/>
-            </a:pPr>
-            <a:r>
-              <a:rPr lang="en-US" sz="1400" dirty="0">
+            </a:pPr>
+            <a:r>
+              <a:rPr lang="en-US" sz="1500" dirty="0">
                 <a:solidFill>
                   <a:srgbClr val="3D3A36"/>
                 </a:solidFill>
-                <a:latin typeface="Calibri" pitchFamily="34" charset="0"/>
-                <a:ea typeface="Calibri" pitchFamily="34" charset="-122"/>
-                <a:cs typeface="Calibri" pitchFamily="34" charset="-120"/>
-              </a:rPr>
-              <a:t>Nanjing taxi: 11 + 2.4(d−3) = 35</a:t>
-            </a:r>
-            <a:endParaRPr lang="en-US" sz="1400" dirty="0"/>
-          </a:p>
-          <a:p>
-            <a:pPr marL="342900" indent="-342900">
+                <a:latin typeface="Arial" pitchFamily="34" charset="0"/>
+                <a:ea typeface="Arial" pitchFamily="34" charset="-122"/>
+                <a:cs typeface="Arial" pitchFamily="34" charset="-120"/>
+              </a:rPr>
+              <a:t>Let the number be n: 2n + 3 = 17.</a:t>
+            </a:r>
+            <a:endParaRPr lang="en-US" sz="1500" dirty="0"/>
+          </a:p>
+          <a:p>
+            <a:pPr>
+              <a:lnSpc>
+                <a:spcPct val="150000"/>
+              </a:lnSpc>
               <a:spcAft>
                 <a:spcPts val="600"/>
               </a:spcAft>
-              <a:buSzPct val="100000"/>
-              <a:buChar char="•"/>
-            </a:pPr>
-            <a:r>
-              <a:rPr lang="en-US" sz="1400" dirty="0">
+            </a:pPr>
+            <a:r>
+              <a:rPr lang="en-US" sz="1500" dirty="0">
                 <a:solidFill>
                   <a:srgbClr val="3D3A36"/>
                 </a:solidFill>
-                <a:latin typeface="Calibri" pitchFamily="34" charset="0"/>
-                <a:ea typeface="Calibri" pitchFamily="34" charset="-122"/>
-                <a:cs typeface="Calibri" pitchFamily="34" charset="-120"/>
-              </a:rPr>
-              <a:t>German cinema: 2t + 3 = 19</a:t>
-            </a:r>
-            <a:endParaRPr lang="en-US" sz="1400" dirty="0"/>
-          </a:p>
-        </p:txBody>
-      </p:sp>
-      <p:sp>
-        <p:nvSpPr>
-          <p:cNvPr id="9" name="Shape 7"/>
-          <p:cNvSpPr/>
-          <p:nvPr/>
-        </p:nvSpPr>
-        <p:spPr>
-          <a:xfrm>
-            <a:off x="4754880" y="1005840"/>
-            <a:ext cx="3931920" cy="3657600"/>
-          </a:xfrm>
-          <a:prstGeom prst="rect">
-            <a:avLst/>
-          </a:prstGeom>
-          <a:solidFill>
-            <a:srgbClr val="FFFFFF"/>
-          </a:solidFill>
-          <a:ln/>
-          <a:effectLst>
-            <a:outerShdw sx="100000" sy="100000" kx="0" ky="0" algn="bl" rotWithShape="0" blurRad="76200" dist="25400" dir="8100000">
-              <a:srgbClr val="000000">
-                <a:alpha val="12000"/>
-              </a:srgbClr>
-            </a:outerShdw>
-          </a:effectLst>
-        </p:spPr>
-      </p:sp>
-      <p:sp>
-        <p:nvSpPr>
-          <p:cNvPr id="10" name="Shape 8"/>
-          <p:cNvSpPr/>
-          <p:nvPr/>
-        </p:nvSpPr>
-        <p:spPr>
-          <a:xfrm>
-            <a:off x="4754880" y="1005840"/>
-            <a:ext cx="3931920" cy="64008"/>
-          </a:xfrm>
-          <a:prstGeom prst="rect">
-            <a:avLst/>
-          </a:prstGeom>
-          <a:solidFill>
-            <a:srgbClr val="E9C46A"/>
-          </a:solidFill>
-          <a:ln/>
-        </p:spPr>
-      </p:sp>
-      <p:sp>
-        <p:nvSpPr>
-          <p:cNvPr id="11" name="Text 9"/>
-          <p:cNvSpPr/>
-          <p:nvPr/>
-        </p:nvSpPr>
-        <p:spPr>
-          <a:xfrm>
-            <a:off x="4937760" y="1188720"/>
-            <a:ext cx="3566160" cy="457200"/>
-          </a:xfrm>
-          <a:prstGeom prst="rect">
-            <a:avLst/>
-          </a:prstGeom>
-          <a:noFill/>
-          <a:ln/>
-        </p:spPr>
-        <p:txBody>
-          <a:bodyPr wrap="square" rtlCol="0" anchor="ctr"/>
-          <a:lstStyle/>
-          <a:p>
-            <a:pPr indent="0" marL="0">
-              <a:buNone/>
-            </a:pPr>
-            <a:r>
-              <a:rPr lang="en-US" sz="1600" b="1" dirty="0">
-                <a:solidFill>
-                  <a:srgbClr val="E9C46A"/>
-                </a:solidFill>
-                <a:latin typeface="Calibri" pitchFamily="34" charset="0"/>
-                <a:ea typeface="Calibri" pitchFamily="34" charset="-122"/>
-                <a:cs typeface="Calibri" pitchFamily="34" charset="-120"/>
-              </a:rPr>
-              <a:t>Solving</a:t>
-            </a:r>
-            <a:endParaRPr lang="en-US" sz="1600" dirty="0"/>
-          </a:p>
-        </p:txBody>
-      </p:sp>
-      <p:sp>
-        <p:nvSpPr>
-          <p:cNvPr id="12" name="Text 10"/>
-          <p:cNvSpPr/>
-          <p:nvPr/>
-        </p:nvSpPr>
-        <p:spPr>
-          <a:xfrm>
-            <a:off x="4937760" y="1691640"/>
-            <a:ext cx="3566160" cy="2743200"/>
-          </a:xfrm>
-          <a:prstGeom prst="rect">
-            <a:avLst/>
-          </a:prstGeom>
-          <a:noFill/>
-          <a:ln/>
-        </p:spPr>
-        <p:txBody>
-          <a:bodyPr wrap="square" rtlCol="0" anchor="ctr"/>
-          <a:lstStyle/>
-          <a:p>
-            <a:pPr marL="342900" indent="-342900">
+                <a:latin typeface="Arial" pitchFamily="34" charset="0"/>
+                <a:ea typeface="Arial" pitchFamily="34" charset="-122"/>
+                <a:cs typeface="Arial" pitchFamily="34" charset="-120"/>
+              </a:rPr>
+              <a:t>Solve: 2n = 14 → n = 7.</a:t>
+            </a:r>
+            <a:endParaRPr lang="en-US" sz="1500" dirty="0"/>
+          </a:p>
+          <a:p>
+            <a:pPr>
+              <a:lnSpc>
+                <a:spcPct val="150000"/>
+              </a:lnSpc>
               <a:spcAft>
                 <a:spcPts val="600"/>
               </a:spcAft>
-              <a:buSzPct val="100000"/>
-              <a:buChar char="•"/>
-            </a:pPr>
-            <a:r>
-              <a:rPr lang="en-US" sz="1400" dirty="0">
+            </a:pPr>
+            <a:r>
+              <a:rPr lang="en-US" sz="1500" dirty="0">
                 <a:solidFill>
                   <a:srgbClr val="3D3A36"/>
                 </a:solidFill>
-                <a:latin typeface="Calibri" pitchFamily="34" charset="0"/>
-                <a:ea typeface="Calibri" pitchFamily="34" charset="-122"/>
-                <a:cs typeface="Calibri" pitchFamily="34" charset="-120"/>
-              </a:rPr>
-              <a:t>15000p = 75000 → p = 5 people</a:t>
-            </a:r>
-            <a:endParaRPr lang="en-US" sz="1400" dirty="0"/>
-          </a:p>
-          <a:p>
-            <a:pPr marL="342900" indent="-342900">
+                <a:latin typeface="Arial" pitchFamily="34" charset="0"/>
+                <a:ea typeface="Arial" pitchFamily="34" charset="-122"/>
+                <a:cs typeface="Arial" pitchFamily="34" charset="-120"/>
+              </a:rPr>
+              <a:t>'A taxi costs $3 plus $2 per km. Total cost is $15. How far?'</a:t>
+            </a:r>
+            <a:endParaRPr lang="en-US" sz="1500" dirty="0"/>
+          </a:p>
+          <a:p>
+            <a:pPr>
+              <a:lnSpc>
+                <a:spcPct val="150000"/>
+              </a:lnSpc>
               <a:spcAft>
                 <a:spcPts val="600"/>
               </a:spcAft>
-              <a:buSzPct val="100000"/>
-              <a:buChar char="•"/>
-            </a:pPr>
-            <a:r>
-              <a:rPr lang="en-US" sz="1400" dirty="0">
+            </a:pPr>
+            <a:r>
+              <a:rPr lang="en-US" sz="1500" dirty="0">
                 <a:solidFill>
                   <a:srgbClr val="3D3A36"/>
                 </a:solidFill>
-                <a:latin typeface="Calibri" pitchFamily="34" charset="0"/>
-                <a:ea typeface="Calibri" pitchFamily="34" charset="-122"/>
-                <a:cs typeface="Calibri" pitchFamily="34" charset="-120"/>
-              </a:rPr>
-              <a:t>2.4(d−3) = 24 → d−3 = 10 → d = 13 km</a:t>
-            </a:r>
-            <a:endParaRPr lang="en-US" sz="1400" dirty="0"/>
-          </a:p>
-          <a:p>
-            <a:pPr marL="342900" indent="-342900">
-              <a:spcAft>
-                <a:spcPts val="600"/>
-              </a:spcAft>
-              <a:buSzPct val="100000"/>
-              <a:buChar char="•"/>
-            </a:pPr>
-            <a:r>
-              <a:rPr lang="en-US" sz="1400" dirty="0">
-                <a:solidFill>
-                  <a:srgbClr val="3D3A36"/>
-                </a:solidFill>
-                <a:latin typeface="Calibri" pitchFamily="34" charset="0"/>
-                <a:ea typeface="Calibri" pitchFamily="34" charset="-122"/>
-                <a:cs typeface="Calibri" pitchFamily="34" charset="-120"/>
-              </a:rPr>
-              <a:t>2t = 16 → t = 8 tickets</a:t>
-            </a:r>
-            <a:endParaRPr lang="en-US" sz="1400" dirty="0"/>
+                <a:latin typeface="Arial" pitchFamily="34" charset="0"/>
+                <a:ea typeface="Arial" pitchFamily="34" charset="-122"/>
+                <a:cs typeface="Arial" pitchFamily="34" charset="-120"/>
+              </a:rPr>
+              <a:t>3 + 2d = 15 → 2d = 12 → d = 6 km.</a:t>
+            </a:r>
+            <a:endParaRPr lang="en-US" sz="1500" dirty="0"/>
           </a:p>
         </p:txBody>
       </p:sp>
@@ -2997,27 +3405,7 @@
         <p:spPr>
           <a:xfrm>
             <a:off x="0" y="0"/>
-            <a:ext cx="9144000" cy="822960"/>
-          </a:xfrm>
-          <a:prstGeom prst="rect">
-            <a:avLst/>
-          </a:prstGeom>
-          <a:solidFill>
-            <a:srgbClr val="FFFFFF"/>
-          </a:solidFill>
-          <a:ln/>
-        </p:spPr>
-      </p:sp>
-      <p:sp>
-        <p:nvSpPr>
-          <p:cNvPr id="3" name="Shape 1"/>
-          <p:cNvSpPr/>
-          <p:nvPr/>
-        </p:nvSpPr>
-        <p:spPr>
-          <a:xfrm>
-            <a:off x="0" y="795528"/>
-            <a:ext cx="9144000" cy="27432"/>
+            <a:ext cx="73152" cy="5148072"/>
           </a:xfrm>
           <a:prstGeom prst="rect">
             <a:avLst/>
@@ -3030,30 +3418,30 @@
       </p:sp>
       <p:sp>
         <p:nvSpPr>
-          <p:cNvPr id="4" name="Text 2"/>
-          <p:cNvSpPr/>
-          <p:nvPr/>
-        </p:nvSpPr>
-        <p:spPr>
-          <a:xfrm>
-            <a:off x="640080" y="91440"/>
-            <a:ext cx="7863840" cy="640080"/>
-          </a:xfrm>
-          <a:prstGeom prst="rect">
-            <a:avLst/>
-          </a:prstGeom>
-          <a:noFill/>
-          <a:ln/>
-        </p:spPr>
-        <p:txBody>
-          <a:bodyPr wrap="square" lIns="0" tIns="0" rIns="0" bIns="0" rtlCol="0" anchor="ctr"/>
+          <p:cNvPr id="3" name="Text 1"/>
+          <p:cNvSpPr/>
+          <p:nvPr/>
+        </p:nvSpPr>
+        <p:spPr>
+          <a:xfrm>
+            <a:off x="548640" y="274320"/>
+            <a:ext cx="9144000" cy="640080"/>
+          </a:xfrm>
+          <a:prstGeom prst="rect">
+            <a:avLst/>
+          </a:prstGeom>
+          <a:noFill/>
+          <a:ln/>
+        </p:spPr>
+        <p:txBody>
+          <a:bodyPr wrap="square" rtlCol="0" anchor="ctr"/>
           <a:lstStyle/>
           <a:p>
             <a:pPr indent="0" marL="0">
               <a:buNone/>
             </a:pPr>
             <a:r>
-              <a:rPr lang="en-US" sz="2200" b="1" dirty="0">
+              <a:rPr lang="en-US" sz="2400" b="1" dirty="0">
                 <a:solidFill>
                   <a:srgbClr val="1B2A4A"/>
                 </a:solidFill>
@@ -3061,88 +3449,22 @@
                 <a:ea typeface="Georgia" pitchFamily="34" charset="-122"/>
                 <a:cs typeface="Georgia" pitchFamily="34" charset="-120"/>
               </a:rPr>
-              <a:t>Recommended Videos</a:t>
-            </a:r>
-            <a:endParaRPr lang="en-US" sz="2200" dirty="0"/>
-          </a:p>
-        </p:txBody>
-      </p:sp>
-      <p:sp>
-        <p:nvSpPr>
-          <p:cNvPr id="5" name="Text 3"/>
-          <p:cNvSpPr/>
-          <p:nvPr/>
-        </p:nvSpPr>
-        <p:spPr>
-          <a:xfrm>
-            <a:off x="640080" y="868680"/>
-            <a:ext cx="7863840" cy="274320"/>
-          </a:xfrm>
-          <a:prstGeom prst="rect">
-            <a:avLst/>
-          </a:prstGeom>
-          <a:noFill/>
-          <a:ln/>
-        </p:spPr>
-        <p:txBody>
-          <a:bodyPr wrap="square" rtlCol="0" anchor="ctr"/>
-          <a:lstStyle/>
-          <a:p>
-            <a:pPr indent="0" marL="0">
-              <a:buNone/>
-            </a:pPr>
-            <a:r>
-              <a:rPr lang="en-US" sz="1200" i="1" dirty="0">
-                <a:solidFill>
-                  <a:srgbClr val="6B6660"/>
-                </a:solidFill>
-                <a:latin typeface="Calibri" pitchFamily="34" charset="0"/>
-                <a:ea typeface="Calibri" pitchFamily="34" charset="-122"/>
-                <a:cs typeface="Calibri" pitchFamily="34" charset="-120"/>
-              </a:rPr>
-              <a:t>Search these on YouTube to learn more.</a:t>
-            </a:r>
-            <a:endParaRPr lang="en-US" sz="1200" dirty="0"/>
-          </a:p>
-        </p:txBody>
-      </p:sp>
-      <p:sp>
-        <p:nvSpPr>
-          <p:cNvPr id="6" name="Shape 4"/>
-          <p:cNvSpPr/>
-          <p:nvPr/>
-        </p:nvSpPr>
-        <p:spPr>
-          <a:xfrm>
-            <a:off x="457200" y="1234440"/>
-            <a:ext cx="8229600" cy="1051560"/>
-          </a:xfrm>
-          <a:prstGeom prst="rect">
-            <a:avLst/>
-          </a:prstGeom>
-          <a:solidFill>
-            <a:srgbClr val="FFFFFF"/>
-          </a:solidFill>
-          <a:ln/>
-          <a:effectLst>
-            <a:outerShdw sx="100000" sy="100000" kx="0" ky="0" algn="bl" rotWithShape="0" blurRad="76200" dist="25400" dir="8100000">
-              <a:srgbClr val="000000">
-                <a:alpha val="12000"/>
-              </a:srgbClr>
-            </a:outerShdw>
-          </a:effectLst>
-        </p:spPr>
-      </p:sp>
-      <p:sp>
-        <p:nvSpPr>
-          <p:cNvPr id="7" name="Shape 5"/>
-          <p:cNvSpPr/>
-          <p:nvPr/>
-        </p:nvSpPr>
-        <p:spPr>
-          <a:xfrm>
-            <a:off x="457200" y="1234440"/>
-            <a:ext cx="64008" cy="1051560"/>
+              <a:t>Check Your Understanding</a:t>
+            </a:r>
+            <a:endParaRPr lang="en-US" sz="2400" dirty="0"/>
+          </a:p>
+        </p:txBody>
+      </p:sp>
+      <p:sp>
+        <p:nvSpPr>
+          <p:cNvPr id="4" name="Shape 2"/>
+          <p:cNvSpPr/>
+          <p:nvPr/>
+        </p:nvSpPr>
+        <p:spPr>
+          <a:xfrm>
+            <a:off x="548640" y="960120"/>
+            <a:ext cx="2286000" cy="36576"/>
           </a:xfrm>
           <a:prstGeom prst="rect">
             <a:avLst/>
@@ -3155,53 +3477,14 @@
       </p:sp>
       <p:sp>
         <p:nvSpPr>
-          <p:cNvPr id="8" name="Text 6"/>
-          <p:cNvSpPr/>
-          <p:nvPr/>
-        </p:nvSpPr>
-        <p:spPr>
-          <a:xfrm>
-            <a:off x="640080" y="1325880"/>
-            <a:ext cx="457200" cy="457200"/>
-          </a:xfrm>
-          <a:prstGeom prst="rect">
-            <a:avLst/>
-          </a:prstGeom>
-          <a:noFill/>
-          <a:ln/>
-        </p:spPr>
-        <p:txBody>
-          <a:bodyPr wrap="square" rtlCol="0" anchor="ctr"/>
-          <a:lstStyle/>
-          <a:p>
-            <a:pPr algn="ctr" indent="0" marL="0">
-              <a:buNone/>
-            </a:pPr>
-            <a:r>
-              <a:rPr lang="en-US" sz="2000" dirty="0">
-                <a:solidFill>
-                  <a:srgbClr val="2A9D8F"/>
-                </a:solidFill>
-                <a:latin typeface="Calibri" pitchFamily="34" charset="0"/>
-                <a:ea typeface="Calibri" pitchFamily="34" charset="-122"/>
-                <a:cs typeface="Calibri" pitchFamily="34" charset="-120"/>
-              </a:rPr>
-              <a:t>▶</a:t>
-            </a:r>
-            <a:endParaRPr lang="en-US" sz="2000" dirty="0"/>
-          </a:p>
-        </p:txBody>
-      </p:sp>
-      <p:sp>
-        <p:nvSpPr>
-          <p:cNvPr id="9" name="Text 7"/>
-          <p:cNvSpPr/>
-          <p:nvPr/>
-        </p:nvSpPr>
-        <p:spPr>
-          <a:xfrm>
-            <a:off x="1188720" y="1307592"/>
-            <a:ext cx="7132320" cy="411480"/>
+          <p:cNvPr id="5" name="Text 3"/>
+          <p:cNvSpPr/>
+          <p:nvPr/>
+        </p:nvSpPr>
+        <p:spPr>
+          <a:xfrm>
+            <a:off x="548640" y="1188720"/>
+            <a:ext cx="365760" cy="457200"/>
           </a:xfrm>
           <a:prstGeom prst="rect">
             <a:avLst/>
@@ -3217,15 +3500,57 @@
               <a:buNone/>
             </a:pPr>
             <a:r>
-              <a:rPr lang="en-US" sz="1400" b="1" dirty="0">
-                <a:solidFill>
-                  <a:srgbClr val="1B2A4A"/>
-                </a:solidFill>
-                <a:latin typeface="Calibri" pitchFamily="34" charset="0"/>
-                <a:ea typeface="Calibri" pitchFamily="34" charset="-122"/>
-                <a:cs typeface="Calibri" pitchFamily="34" charset="-120"/>
-              </a:rPr>
-              <a:t>Solving Two-Step Equations</a:t>
+              <a:rPr lang="en-US" sz="1600" dirty="0">
+                <a:solidFill>
+                  <a:srgbClr val="2A9D8F"/>
+                </a:solidFill>
+                <a:latin typeface="Arial" pitchFamily="34" charset="0"/>
+                <a:ea typeface="Arial" pitchFamily="34" charset="-122"/>
+                <a:cs typeface="Arial" pitchFamily="34" charset="-120"/>
+              </a:rPr>
+              <a:t>☐</a:t>
+            </a:r>
+            <a:endParaRPr lang="en-US" sz="1600" dirty="0"/>
+          </a:p>
+        </p:txBody>
+      </p:sp>
+      <p:sp>
+        <p:nvSpPr>
+          <p:cNvPr id="6" name="Text 4"/>
+          <p:cNvSpPr/>
+          <p:nvPr/>
+        </p:nvSpPr>
+        <p:spPr>
+          <a:xfrm>
+            <a:off x="1005840" y="1188720"/>
+            <a:ext cx="9601200" cy="457200"/>
+          </a:xfrm>
+          <a:prstGeom prst="rect">
+            <a:avLst/>
+          </a:prstGeom>
+          <a:noFill/>
+          <a:ln/>
+        </p:spPr>
+        <p:txBody>
+          <a:bodyPr wrap="square" rtlCol="0" anchor="ctr"/>
+          <a:lstStyle/>
+          <a:p>
+            <a:pPr indent="0" marL="0">
+              <a:lnSpc>
+                <a:spcPct val="130000"/>
+              </a:lnSpc>
+              <a:buNone/>
+            </a:pPr>
+            <a:r>
+              <a:rPr lang="en-US" sz="1400" dirty="0">
+                <a:solidFill>
+                  <a:srgbClr val="3D3A36"/>
+                </a:solidFill>
+                <a:latin typeface="Arial" pitchFamily="34" charset="0"/>
+                <a:ea typeface="Arial" pitchFamily="34" charset="-122"/>
+                <a:cs typeface="Arial" pitchFamily="34" charset="-120"/>
+              </a:rPr>
+              <a:t>I can solve two-step equations.</a:t>
             </a:r>
             <a:endParaRPr lang="en-US" sz="1400" dirty="0"/>
           </a:p>
@@ -3233,14 +3558,14 @@
       </p:sp>
       <p:sp>
         <p:nvSpPr>
-          <p:cNvPr id="10" name="Text 8"/>
-          <p:cNvSpPr/>
-          <p:nvPr/>
-        </p:nvSpPr>
-        <p:spPr>
-          <a:xfrm>
-            <a:off x="1188720" y="1691640"/>
-            <a:ext cx="7132320" cy="320040"/>
+          <p:cNvPr id="7" name="Text 5"/>
+          <p:cNvSpPr/>
+          <p:nvPr/>
+        </p:nvSpPr>
+        <p:spPr>
+          <a:xfrm>
+            <a:off x="548640" y="1783080"/>
+            <a:ext cx="365760" cy="457200"/>
           </a:xfrm>
           <a:prstGeom prst="rect">
             <a:avLst/>
@@ -3256,77 +3581,30 @@
               <a:buNone/>
             </a:pPr>
             <a:r>
-              <a:rPr lang="en-US" sz="1100" dirty="0">
-                <a:solidFill>
-                  <a:srgbClr val="6B6660"/>
-                </a:solidFill>
-                <a:latin typeface="Calibri" pitchFamily="34" charset="0"/>
-                <a:ea typeface="Calibri" pitchFamily="34" charset="-122"/>
-                <a:cs typeface="Calibri" pitchFamily="34" charset="-120"/>
-              </a:rPr>
-              <a:t>Corbettmaths  •  5 min</a:t>
-            </a:r>
-            <a:endParaRPr lang="en-US" sz="1100" dirty="0"/>
-          </a:p>
-        </p:txBody>
-      </p:sp>
-      <p:sp>
-        <p:nvSpPr>
-          <p:cNvPr id="11" name="Shape 9"/>
-          <p:cNvSpPr/>
-          <p:nvPr/>
-        </p:nvSpPr>
-        <p:spPr>
-          <a:xfrm>
-            <a:off x="457200" y="2423160"/>
-            <a:ext cx="8229600" cy="1051560"/>
-          </a:xfrm>
-          <a:prstGeom prst="rect">
-            <a:avLst/>
-          </a:prstGeom>
-          <a:solidFill>
-            <a:srgbClr val="FFFFFF"/>
-          </a:solidFill>
-          <a:ln/>
-          <a:effectLst>
-            <a:outerShdw sx="100000" sy="100000" kx="0" ky="0" algn="bl" rotWithShape="0" blurRad="76200" dist="25400" dir="8100000">
-              <a:srgbClr val="000000">
-                <a:alpha val="12000"/>
-              </a:srgbClr>
-            </a:outerShdw>
-          </a:effectLst>
-        </p:spPr>
-      </p:sp>
-      <p:sp>
-        <p:nvSpPr>
-          <p:cNvPr id="12" name="Shape 10"/>
-          <p:cNvSpPr/>
-          <p:nvPr/>
-        </p:nvSpPr>
-        <p:spPr>
-          <a:xfrm>
-            <a:off x="457200" y="2423160"/>
-            <a:ext cx="64008" cy="1051560"/>
-          </a:xfrm>
-          <a:prstGeom prst="rect">
-            <a:avLst/>
-          </a:prstGeom>
-          <a:solidFill>
-            <a:srgbClr val="2A9D8F"/>
-          </a:solidFill>
-          <a:ln/>
-        </p:spPr>
-      </p:sp>
-      <p:sp>
-        <p:nvSpPr>
-          <p:cNvPr id="13" name="Text 11"/>
-          <p:cNvSpPr/>
-          <p:nvPr/>
-        </p:nvSpPr>
-        <p:spPr>
-          <a:xfrm>
-            <a:off x="640080" y="2514600"/>
-            <a:ext cx="457200" cy="457200"/>
+              <a:rPr lang="en-US" sz="1600" dirty="0">
+                <a:solidFill>
+                  <a:srgbClr val="2A9D8F"/>
+                </a:solidFill>
+                <a:latin typeface="Arial" pitchFamily="34" charset="0"/>
+                <a:ea typeface="Arial" pitchFamily="34" charset="-122"/>
+                <a:cs typeface="Arial" pitchFamily="34" charset="-120"/>
+              </a:rPr>
+              <a:t>☐</a:t>
+            </a:r>
+            <a:endParaRPr lang="en-US" sz="1600" dirty="0"/>
+          </a:p>
+        </p:txBody>
+      </p:sp>
+      <p:sp>
+        <p:nvSpPr>
+          <p:cNvPr id="8" name="Text 6"/>
+          <p:cNvSpPr/>
+          <p:nvPr/>
+        </p:nvSpPr>
+        <p:spPr>
+          <a:xfrm>
+            <a:off x="1005840" y="1783080"/>
+            <a:ext cx="9601200" cy="457200"/>
           </a:xfrm>
           <a:prstGeom prst="rect">
             <a:avLst/>
@@ -3338,34 +3616,37 @@
           <a:bodyPr wrap="square" rtlCol="0" anchor="ctr"/>
           <a:lstStyle/>
           <a:p>
-            <a:pPr algn="ctr" indent="0" marL="0">
+            <a:pPr indent="0" marL="0">
+              <a:lnSpc>
+                <a:spcPct val="130000"/>
+              </a:lnSpc>
               <a:buNone/>
             </a:pPr>
             <a:r>
-              <a:rPr lang="en-US" sz="2000" dirty="0">
-                <a:solidFill>
-                  <a:srgbClr val="2A9D8F"/>
-                </a:solidFill>
-                <a:latin typeface="Calibri" pitchFamily="34" charset="0"/>
-                <a:ea typeface="Calibri" pitchFamily="34" charset="-122"/>
-                <a:cs typeface="Calibri" pitchFamily="34" charset="-120"/>
-              </a:rPr>
-              <a:t>▶</a:t>
-            </a:r>
-            <a:endParaRPr lang="en-US" sz="2000" dirty="0"/>
-          </a:p>
-        </p:txBody>
-      </p:sp>
-      <p:sp>
-        <p:nvSpPr>
-          <p:cNvPr id="14" name="Text 12"/>
-          <p:cNvSpPr/>
-          <p:nvPr/>
-        </p:nvSpPr>
-        <p:spPr>
-          <a:xfrm>
-            <a:off x="1188720" y="2496312"/>
-            <a:ext cx="7132320" cy="411480"/>
+              <a:rPr lang="en-US" sz="1400" dirty="0">
+                <a:solidFill>
+                  <a:srgbClr val="3D3A36"/>
+                </a:solidFill>
+                <a:latin typeface="Arial" pitchFamily="34" charset="0"/>
+                <a:ea typeface="Arial" pitchFamily="34" charset="-122"/>
+                <a:cs typeface="Arial" pitchFamily="34" charset="-120"/>
+              </a:rPr>
+              <a:t>I know to undo +/− first, then ×/÷.</a:t>
+            </a:r>
+            <a:endParaRPr lang="en-US" sz="1400" dirty="0"/>
+          </a:p>
+        </p:txBody>
+      </p:sp>
+      <p:sp>
+        <p:nvSpPr>
+          <p:cNvPr id="9" name="Text 7"/>
+          <p:cNvSpPr/>
+          <p:nvPr/>
+        </p:nvSpPr>
+        <p:spPr>
+          <a:xfrm>
+            <a:off x="548640" y="2377440"/>
+            <a:ext cx="365760" cy="457200"/>
           </a:xfrm>
           <a:prstGeom prst="rect">
             <a:avLst/>
@@ -3381,15 +3662,57 @@
               <a:buNone/>
             </a:pPr>
             <a:r>
-              <a:rPr lang="en-US" sz="1400" b="1" dirty="0">
-                <a:solidFill>
-                  <a:srgbClr val="1B2A4A"/>
-                </a:solidFill>
-                <a:latin typeface="Calibri" pitchFamily="34" charset="0"/>
-                <a:ea typeface="Calibri" pitchFamily="34" charset="-122"/>
-                <a:cs typeface="Calibri" pitchFamily="34" charset="-120"/>
-              </a:rPr>
-              <a:t>Two-Step Equations</a:t>
+              <a:rPr lang="en-US" sz="1600" dirty="0">
+                <a:solidFill>
+                  <a:srgbClr val="2A9D8F"/>
+                </a:solidFill>
+                <a:latin typeface="Arial" pitchFamily="34" charset="0"/>
+                <a:ea typeface="Arial" pitchFamily="34" charset="-122"/>
+                <a:cs typeface="Arial" pitchFamily="34" charset="-120"/>
+              </a:rPr>
+              <a:t>☐</a:t>
+            </a:r>
+            <a:endParaRPr lang="en-US" sz="1600" dirty="0"/>
+          </a:p>
+        </p:txBody>
+      </p:sp>
+      <p:sp>
+        <p:nvSpPr>
+          <p:cNvPr id="10" name="Text 8"/>
+          <p:cNvSpPr/>
+          <p:nvPr/>
+        </p:nvSpPr>
+        <p:spPr>
+          <a:xfrm>
+            <a:off x="1005840" y="2377440"/>
+            <a:ext cx="9601200" cy="457200"/>
+          </a:xfrm>
+          <a:prstGeom prst="rect">
+            <a:avLst/>
+          </a:prstGeom>
+          <a:noFill/>
+          <a:ln/>
+        </p:spPr>
+        <p:txBody>
+          <a:bodyPr wrap="square" rtlCol="0" anchor="ctr"/>
+          <a:lstStyle/>
+          <a:p>
+            <a:pPr indent="0" marL="0">
+              <a:lnSpc>
+                <a:spcPct val="130000"/>
+              </a:lnSpc>
+              <a:buNone/>
+            </a:pPr>
+            <a:r>
+              <a:rPr lang="en-US" sz="1400" dirty="0">
+                <a:solidFill>
+                  <a:srgbClr val="3D3A36"/>
+                </a:solidFill>
+                <a:latin typeface="Arial" pitchFamily="34" charset="0"/>
+                <a:ea typeface="Arial" pitchFamily="34" charset="-122"/>
+                <a:cs typeface="Arial" pitchFamily="34" charset="-120"/>
+              </a:rPr>
+              <a:t>I can write equations from word problems.</a:t>
             </a:r>
             <a:endParaRPr lang="en-US" sz="1400" dirty="0"/>
           </a:p>
@@ -3397,14 +3720,14 @@
       </p:sp>
       <p:sp>
         <p:nvSpPr>
-          <p:cNvPr id="15" name="Text 13"/>
-          <p:cNvSpPr/>
-          <p:nvPr/>
-        </p:nvSpPr>
-        <p:spPr>
-          <a:xfrm>
-            <a:off x="1188720" y="2880360"/>
-            <a:ext cx="7132320" cy="320040"/>
+          <p:cNvPr id="11" name="Text 9"/>
+          <p:cNvSpPr/>
+          <p:nvPr/>
+        </p:nvSpPr>
+        <p:spPr>
+          <a:xfrm>
+            <a:off x="548640" y="2971800"/>
+            <a:ext cx="365760" cy="457200"/>
           </a:xfrm>
           <a:prstGeom prst="rect">
             <a:avLst/>
@@ -3420,77 +3743,30 @@
               <a:buNone/>
             </a:pPr>
             <a:r>
-              <a:rPr lang="en-US" sz="1100" dirty="0">
-                <a:solidFill>
-                  <a:srgbClr val="6B6660"/>
-                </a:solidFill>
-                <a:latin typeface="Calibri" pitchFamily="34" charset="0"/>
-                <a:ea typeface="Calibri" pitchFamily="34" charset="-122"/>
-                <a:cs typeface="Calibri" pitchFamily="34" charset="-120"/>
-              </a:rPr>
-              <a:t>Math Antics  •  8 min</a:t>
-            </a:r>
-            <a:endParaRPr lang="en-US" sz="1100" dirty="0"/>
-          </a:p>
-        </p:txBody>
-      </p:sp>
-      <p:sp>
-        <p:nvSpPr>
-          <p:cNvPr id="16" name="Shape 14"/>
-          <p:cNvSpPr/>
-          <p:nvPr/>
-        </p:nvSpPr>
-        <p:spPr>
-          <a:xfrm>
-            <a:off x="457200" y="3611880"/>
-            <a:ext cx="8229600" cy="1051560"/>
-          </a:xfrm>
-          <a:prstGeom prst="rect">
-            <a:avLst/>
-          </a:prstGeom>
-          <a:solidFill>
-            <a:srgbClr val="FFFFFF"/>
-          </a:solidFill>
-          <a:ln/>
-          <a:effectLst>
-            <a:outerShdw sx="100000" sy="100000" kx="0" ky="0" algn="bl" rotWithShape="0" blurRad="76200" dist="25400" dir="8100000">
-              <a:srgbClr val="000000">
-                <a:alpha val="12000"/>
-              </a:srgbClr>
-            </a:outerShdw>
-          </a:effectLst>
-        </p:spPr>
-      </p:sp>
-      <p:sp>
-        <p:nvSpPr>
-          <p:cNvPr id="17" name="Shape 15"/>
-          <p:cNvSpPr/>
-          <p:nvPr/>
-        </p:nvSpPr>
-        <p:spPr>
-          <a:xfrm>
-            <a:off x="457200" y="3611880"/>
-            <a:ext cx="64008" cy="1051560"/>
-          </a:xfrm>
-          <a:prstGeom prst="rect">
-            <a:avLst/>
-          </a:prstGeom>
-          <a:solidFill>
-            <a:srgbClr val="2A9D8F"/>
-          </a:solidFill>
-          <a:ln/>
-        </p:spPr>
-      </p:sp>
-      <p:sp>
-        <p:nvSpPr>
-          <p:cNvPr id="18" name="Text 16"/>
-          <p:cNvSpPr/>
-          <p:nvPr/>
-        </p:nvSpPr>
-        <p:spPr>
-          <a:xfrm>
-            <a:off x="640080" y="3703320"/>
-            <a:ext cx="457200" cy="457200"/>
+              <a:rPr lang="en-US" sz="1600" dirty="0">
+                <a:solidFill>
+                  <a:srgbClr val="2A9D8F"/>
+                </a:solidFill>
+                <a:latin typeface="Arial" pitchFamily="34" charset="0"/>
+                <a:ea typeface="Arial" pitchFamily="34" charset="-122"/>
+                <a:cs typeface="Arial" pitchFamily="34" charset="-120"/>
+              </a:rPr>
+              <a:t>☐</a:t>
+            </a:r>
+            <a:endParaRPr lang="en-US" sz="1600" dirty="0"/>
+          </a:p>
+        </p:txBody>
+      </p:sp>
+      <p:sp>
+        <p:nvSpPr>
+          <p:cNvPr id="12" name="Text 10"/>
+          <p:cNvSpPr/>
+          <p:nvPr/>
+        </p:nvSpPr>
+        <p:spPr>
+          <a:xfrm>
+            <a:off x="1005840" y="2971800"/>
+            <a:ext cx="9601200" cy="457200"/>
           </a:xfrm>
           <a:prstGeom prst="rect">
             <a:avLst/>
@@ -3502,99 +3778,24 @@
           <a:bodyPr wrap="square" rtlCol="0" anchor="ctr"/>
           <a:lstStyle/>
           <a:p>
-            <a:pPr algn="ctr" indent="0" marL="0">
+            <a:pPr indent="0" marL="0">
+              <a:lnSpc>
+                <a:spcPct val="130000"/>
+              </a:lnSpc>
               <a:buNone/>
             </a:pPr>
             <a:r>
-              <a:rPr lang="en-US" sz="2000" dirty="0">
-                <a:solidFill>
-                  <a:srgbClr val="2A9D8F"/>
-                </a:solidFill>
-                <a:latin typeface="Calibri" pitchFamily="34" charset="0"/>
-                <a:ea typeface="Calibri" pitchFamily="34" charset="-122"/>
-                <a:cs typeface="Calibri" pitchFamily="34" charset="-120"/>
-              </a:rPr>
-              <a:t>▶</a:t>
-            </a:r>
-            <a:endParaRPr lang="en-US" sz="2000" dirty="0"/>
-          </a:p>
-        </p:txBody>
-      </p:sp>
-      <p:sp>
-        <p:nvSpPr>
-          <p:cNvPr id="19" name="Text 17"/>
-          <p:cNvSpPr/>
-          <p:nvPr/>
-        </p:nvSpPr>
-        <p:spPr>
-          <a:xfrm>
-            <a:off x="1188720" y="3685032"/>
-            <a:ext cx="7132320" cy="411480"/>
-          </a:xfrm>
-          <a:prstGeom prst="rect">
-            <a:avLst/>
-          </a:prstGeom>
-          <a:noFill/>
-          <a:ln/>
-        </p:spPr>
-        <p:txBody>
-          <a:bodyPr wrap="square" rtlCol="0" anchor="ctr"/>
-          <a:lstStyle/>
-          <a:p>
-            <a:pPr indent="0" marL="0">
-              <a:buNone/>
-            </a:pPr>
-            <a:r>
-              <a:rPr lang="en-US" sz="1400" b="1" dirty="0">
-                <a:solidFill>
-                  <a:srgbClr val="1B2A4A"/>
-                </a:solidFill>
-                <a:latin typeface="Calibri" pitchFamily="34" charset="0"/>
-                <a:ea typeface="Calibri" pitchFamily="34" charset="-122"/>
-                <a:cs typeface="Calibri" pitchFamily="34" charset="-120"/>
-              </a:rPr>
-              <a:t>Harder Equations</a:t>
+              <a:rPr lang="en-US" sz="1400" dirty="0">
+                <a:solidFill>
+                  <a:srgbClr val="3D3A36"/>
+                </a:solidFill>
+                <a:latin typeface="Arial" pitchFamily="34" charset="0"/>
+                <a:ea typeface="Arial" pitchFamily="34" charset="-122"/>
+                <a:cs typeface="Arial" pitchFamily="34" charset="-120"/>
+              </a:rPr>
+              <a:t>I always check my solutions.</a:t>
             </a:r>
             <a:endParaRPr lang="en-US" sz="1400" dirty="0"/>
-          </a:p>
-        </p:txBody>
-      </p:sp>
-      <p:sp>
-        <p:nvSpPr>
-          <p:cNvPr id="20" name="Text 18"/>
-          <p:cNvSpPr/>
-          <p:nvPr/>
-        </p:nvSpPr>
-        <p:spPr>
-          <a:xfrm>
-            <a:off x="1188720" y="4069080"/>
-            <a:ext cx="7132320" cy="320040"/>
-          </a:xfrm>
-          <a:prstGeom prst="rect">
-            <a:avLst/>
-          </a:prstGeom>
-          <a:noFill/>
-          <a:ln/>
-        </p:spPr>
-        <p:txBody>
-          <a:bodyPr wrap="square" rtlCol="0" anchor="ctr"/>
-          <a:lstStyle/>
-          <a:p>
-            <a:pPr indent="0" marL="0">
-              <a:buNone/>
-            </a:pPr>
-            <a:r>
-              <a:rPr lang="en-US" sz="1100" dirty="0">
-                <a:solidFill>
-                  <a:srgbClr val="6B6660"/>
-                </a:solidFill>
-                <a:latin typeface="Calibri" pitchFamily="34" charset="0"/>
-                <a:ea typeface="Calibri" pitchFamily="34" charset="-122"/>
-                <a:cs typeface="Calibri" pitchFamily="34" charset="-120"/>
-              </a:rPr>
-              <a:t>Cognito  •  5 min</a:t>
-            </a:r>
-            <a:endParaRPr lang="en-US" sz="1100" dirty="0"/>
           </a:p>
         </p:txBody>
       </p:sp>
@@ -3609,6 +3810,13 @@
 <file path=ppt/slides/slide7.xml><?xml version="1.0" encoding="utf-8"?>
 <p:sld xmlns:a="http://schemas.openxmlformats.org/drawingml/2006/main" xmlns:r="http://schemas.openxmlformats.org/officeDocument/2006/relationships" xmlns:p="http://schemas.openxmlformats.org/presentationml/2006/main">
   <p:cSld name="Slide 7">
+    <p:bg>
+      <p:bgPr>
+        <a:solidFill>
+          <a:srgbClr val="111D35"/>
+        </a:solidFill>
+      </p:bgPr>
+    </p:bg>
     <p:spTree>
       <p:nvGrpSpPr>
         <p:cNvPr id="1" name=""/>
@@ -3625,54 +3833,14 @@
       </p:grpSpPr>
       <p:sp>
         <p:nvSpPr>
-          <p:cNvPr id="2" name="Shape 0"/>
-          <p:cNvSpPr/>
-          <p:nvPr/>
-        </p:nvSpPr>
-        <p:spPr>
-          <a:xfrm>
-            <a:off x="0" y="0"/>
-            <a:ext cx="9144000" cy="5143500"/>
-          </a:xfrm>
-          <a:prstGeom prst="rect">
-            <a:avLst/>
-          </a:prstGeom>
-          <a:solidFill>
-            <a:srgbClr val="1B2A4A"/>
-          </a:solidFill>
-          <a:ln/>
-        </p:spPr>
-      </p:sp>
-      <p:sp>
-        <p:nvSpPr>
-          <p:cNvPr id="3" name="Shape 1"/>
-          <p:cNvSpPr/>
-          <p:nvPr/>
-        </p:nvSpPr>
-        <p:spPr>
-          <a:xfrm>
-            <a:off x="0" y="4777740"/>
-            <a:ext cx="9144000" cy="365760"/>
-          </a:xfrm>
-          <a:prstGeom prst="rect">
-            <a:avLst/>
-          </a:prstGeom>
-          <a:solidFill>
-            <a:srgbClr val="2A9D8F"/>
-          </a:solidFill>
-          <a:ln/>
-        </p:spPr>
-      </p:sp>
-      <p:sp>
-        <p:nvSpPr>
-          <p:cNvPr id="4" name="Text 2"/>
+          <p:cNvPr id="2" name="Text 0"/>
           <p:cNvSpPr/>
           <p:nvPr/>
         </p:nvSpPr>
         <p:spPr>
           <a:xfrm>
             <a:off x="731520" y="1371600"/>
-            <a:ext cx="7680960" cy="914400"/>
+            <a:ext cx="9144000" cy="914400"/>
           </a:xfrm>
           <a:prstGeom prst="rect">
             <a:avLst/>
@@ -3684,11 +3852,11 @@
           <a:bodyPr wrap="square" rtlCol="0" anchor="ctr"/>
           <a:lstStyle/>
           <a:p>
-            <a:pPr algn="ctr" indent="0" marL="0">
+            <a:pPr indent="0" marL="0">
               <a:buNone/>
             </a:pPr>
             <a:r>
-              <a:rPr lang="en-US" sz="3600" b="1" dirty="0">
+              <a:rPr lang="en-US" sz="3200" b="1" dirty="0">
                 <a:solidFill>
                   <a:srgbClr val="FFFFFF"/>
                 </a:solidFill>
@@ -3698,20 +3866,20 @@
               </a:rPr>
               <a:t>Review &amp; Practise</a:t>
             </a:r>
-            <a:endParaRPr lang="en-US" sz="3600" dirty="0"/>
-          </a:p>
-        </p:txBody>
-      </p:sp>
-      <p:sp>
-        <p:nvSpPr>
-          <p:cNvPr id="5" name="Text 3"/>
-          <p:cNvSpPr/>
-          <p:nvPr/>
-        </p:nvSpPr>
-        <p:spPr>
-          <a:xfrm>
-            <a:off x="731520" y="2560320"/>
-            <a:ext cx="7680960" cy="548640"/>
+            <a:endParaRPr lang="en-US" sz="3200" dirty="0"/>
+          </a:p>
+        </p:txBody>
+      </p:sp>
+      <p:sp>
+        <p:nvSpPr>
+          <p:cNvPr id="3" name="Text 1"/>
+          <p:cNvSpPr/>
+          <p:nvPr/>
+        </p:nvSpPr>
+        <p:spPr>
+          <a:xfrm>
+            <a:off x="731520" y="2377440"/>
+            <a:ext cx="7315200" cy="548640"/>
           </a:xfrm>
           <a:prstGeom prst="rect">
             <a:avLst/>
@@ -3723,21 +3891,62 @@
           <a:bodyPr wrap="square" rtlCol="0" anchor="ctr"/>
           <a:lstStyle/>
           <a:p>
-            <a:pPr algn="ctr" indent="0" marL="0">
+            <a:pPr indent="0" marL="0">
               <a:buNone/>
             </a:pPr>
             <a:r>
-              <a:rPr lang="en-US" sz="2000" dirty="0">
-                <a:solidFill>
-                  <a:srgbClr val="2A9D8F"/>
-                </a:solidFill>
-                <a:latin typeface="Calibri" pitchFamily="34" charset="0"/>
-                <a:ea typeface="Calibri" pitchFamily="34" charset="-122"/>
-                <a:cs typeface="Calibri" pitchFamily="34" charset="-120"/>
+              <a:rPr lang="en-US" sz="1500" dirty="0">
+                <a:solidFill>
+                  <a:srgbClr val="FFFFFF">
+                    <a:alpha val="60000"/>
+                  </a:srgbClr>
+                </a:solidFill>
+                <a:latin typeface="Arial" pitchFamily="34" charset="0"/>
+                <a:ea typeface="Arial" pitchFamily="34" charset="-122"/>
+                <a:cs typeface="Arial" pitchFamily="34" charset="-120"/>
+              </a:rPr>
+              <a:t>Use the Self-Quiz, Review Games, and Practice Builder to test yourself.</a:t>
+            </a:r>
+            <a:endParaRPr lang="en-US" sz="1500" dirty="0"/>
+          </a:p>
+        </p:txBody>
+      </p:sp>
+      <p:sp>
+        <p:nvSpPr>
+          <p:cNvPr id="4" name="Text 2"/>
+          <p:cNvSpPr/>
+          <p:nvPr/>
+        </p:nvSpPr>
+        <p:spPr>
+          <a:xfrm>
+            <a:off x="731520" y="3291840"/>
+            <a:ext cx="3657600" cy="457200"/>
+          </a:xfrm>
+          <a:prstGeom prst="rect">
+            <a:avLst/>
+          </a:prstGeom>
+          <a:noFill/>
+          <a:ln/>
+        </p:spPr>
+        <p:txBody>
+          <a:bodyPr wrap="square" rtlCol="0" anchor="ctr"/>
+          <a:lstStyle/>
+          <a:p>
+            <a:pPr indent="0" marL="0">
+              <a:buNone/>
+            </a:pPr>
+            <a:r>
+              <a:rPr lang="en-US" sz="1800" b="1" dirty="0">
+                <a:solidFill>
+                  <a:srgbClr val="E9C46A"/>
+                </a:solidFill>
+                <a:latin typeface="Georgia" pitchFamily="34" charset="0"/>
+                <a:ea typeface="Georgia" pitchFamily="34" charset="-122"/>
+                <a:cs typeface="Georgia" pitchFamily="34" charset="-120"/>
               </a:rPr>
               <a:t>mrzocchi.com</a:t>
             </a:r>
-            <a:endParaRPr lang="en-US" sz="2000" dirty="0"/>
+            <a:endParaRPr lang="en-US" sz="1800" dirty="0"/>
           </a:p>
         </p:txBody>
       </p:sp>
